--- a/data-eng/decks/w5d5s3.pptx
+++ b/data-eng/decks/w5d5s3.pptx
@@ -3100,7 +3100,7 @@
       <p:grpSpPr/>
       <p:sp>
         <p:nvSpPr>
-          <p:cNvPr id="2" name="Oval 1"/>
+          <p:cNvPr id="2" name="deckgen:decor"/>
           <p:cNvSpPr/>
           <p:nvPr/>
         </p:nvSpPr>
@@ -3130,7 +3130,7 @@
       </p:sp>
       <p:sp>
         <p:nvSpPr>
-          <p:cNvPr id="3" name="Oval 2"/>
+          <p:cNvPr id="3" name="deckgen:decor"/>
           <p:cNvSpPr/>
           <p:nvPr/>
         </p:nvSpPr>
@@ -3160,7 +3160,7 @@
       </p:sp>
       <p:sp>
         <p:nvSpPr>
-          <p:cNvPr id="4" name="Oval 3"/>
+          <p:cNvPr id="4" name="deckgen:decor"/>
           <p:cNvSpPr/>
           <p:nvPr/>
         </p:nvSpPr>
@@ -3190,7 +3190,7 @@
       </p:sp>
       <p:sp>
         <p:nvSpPr>
-          <p:cNvPr id="5" name="Rectangle 4"/>
+          <p:cNvPr id="5" name="deckgen:decor"/>
           <p:cNvSpPr/>
           <p:nvPr/>
         </p:nvSpPr>
@@ -3220,7 +3220,7 @@
       </p:sp>
       <p:sp>
         <p:nvSpPr>
-          <p:cNvPr id="6" name="Oval 5"/>
+          <p:cNvPr id="6" name="deckgen:decor"/>
           <p:cNvSpPr/>
           <p:nvPr/>
         </p:nvSpPr>
@@ -3250,7 +3250,7 @@
       </p:sp>
       <p:sp>
         <p:nvSpPr>
-          <p:cNvPr id="7" name="Oval 6"/>
+          <p:cNvPr id="7" name="deckgen:decor"/>
           <p:cNvSpPr/>
           <p:nvPr/>
         </p:nvSpPr>
@@ -3280,7 +3280,7 @@
       </p:sp>
       <p:sp>
         <p:nvSpPr>
-          <p:cNvPr id="8" name="Oval 7"/>
+          <p:cNvPr id="8" name="deckgen:decor"/>
           <p:cNvSpPr/>
           <p:nvPr/>
         </p:nvSpPr>
@@ -3310,7 +3310,7 @@
       </p:sp>
       <p:sp>
         <p:nvSpPr>
-          <p:cNvPr id="9" name="Oval 8"/>
+          <p:cNvPr id="9" name="deckgen:decor"/>
           <p:cNvSpPr/>
           <p:nvPr/>
         </p:nvSpPr>
@@ -3340,7 +3340,7 @@
       </p:sp>
       <p:sp>
         <p:nvSpPr>
-          <p:cNvPr id="10" name="Rectangle 9"/>
+          <p:cNvPr id="10" name="deckgen:decor"/>
           <p:cNvSpPr/>
           <p:nvPr/>
         </p:nvSpPr>
@@ -3534,7 +3534,7 @@
                 <a:ea typeface="Pretendard"/>
                 <a:cs typeface="Pretendard"/>
               </a:rPr>
-              <a:t>mart.py 한 파일 — 이것이 5주차 산출물</a:t>
+              <a:t>mart.py 한 파일 — 5주차 산출물</a:t>
             </a:r>
           </a:p>
         </p:txBody>
@@ -3618,7 +3618,7 @@
       <p:grpSpPr/>
       <p:sp>
         <p:nvSpPr>
-          <p:cNvPr id="2" name="Oval 1"/>
+          <p:cNvPr id="2" name="deckgen:decor"/>
           <p:cNvSpPr/>
           <p:nvPr/>
         </p:nvSpPr>
@@ -3648,7 +3648,7 @@
       </p:sp>
       <p:sp>
         <p:nvSpPr>
-          <p:cNvPr id="3" name="Oval 2"/>
+          <p:cNvPr id="3" name="deckgen:decor"/>
           <p:cNvSpPr/>
           <p:nvPr/>
         </p:nvSpPr>
@@ -3678,7 +3678,7 @@
       </p:sp>
       <p:sp>
         <p:nvSpPr>
-          <p:cNvPr id="4" name="Oval 3"/>
+          <p:cNvPr id="4" name="deckgen:decor"/>
           <p:cNvSpPr/>
           <p:nvPr/>
         </p:nvSpPr>
@@ -3959,7 +3959,7 @@
                 <a:ea typeface="Pretendard"/>
                 <a:cs typeface="Pretendard"/>
               </a:rPr>
-              <a:t>로그 끝에 날짜별 3행의 daily_amount · order_cnt 표가 찍힌다</a:t>
+              <a:t>셸을 exit() 한 뒤 spark-submit 이 기다리지 않고 돈다</a:t>
             </a:r>
           </a:p>
         </p:txBody>
@@ -4105,7 +4105,7 @@
                 <a:ea typeface="Pretendard"/>
                 <a:cs typeface="Pretendard"/>
               </a:rPr>
-              <a:t>MinIO warehouse/db/daily_sales_mart/data/ 에 Parquet 1개</a:t>
+              <a:t>표 3행 113000·2 / 1155000·2 / 46000·1</a:t>
             </a:r>
           </a:p>
         </p:txBody>
@@ -4251,7 +4251,7 @@
                 <a:ea typeface="Pretendard"/>
                 <a:cs typeface="Pretendard"/>
               </a:rPr>
-              <a:t>두 번째 실행도 같은 3행 — createOrReplace 의 멱등</a:t>
+              <a:t>MinIO warehouse/lake/db/daily_sales_mart/data/ 에 Parquet</a:t>
             </a:r>
           </a:p>
         </p:txBody>
@@ -4397,7 +4397,7 @@
                 <a:ea typeface="Pretendard"/>
                 <a:cs typeface="Pretendard"/>
               </a:rPr>
-              <a:t>2026-08-25 를 주면 그 날짜만, 2099-01-01 은 실패로 끝난다</a:t>
+              <a:t>종료 코드 0 · 1 · 0 — 마지막에 마트가 다시 3행</a:t>
             </a:r>
           </a:p>
         </p:txBody>
@@ -4543,7 +4543,7 @@
                 <a:ea typeface="Pretendard"/>
                 <a:cs typeface="Pretendard"/>
               </a:rPr>
-              <a:t>mart.py · 조회 캡처 · 실측표가 제출 형태로 모였다</a:t>
+              <a:t>mart.py · 조회 결과 · README 가 제출 형태로 모였다</a:t>
             </a:r>
           </a:p>
         </p:txBody>
@@ -4680,7 +4680,7 @@
       <p:grpSpPr/>
       <p:sp>
         <p:nvSpPr>
-          <p:cNvPr id="2" name="Oval 1"/>
+          <p:cNvPr id="2" name="deckgen:decor"/>
           <p:cNvSpPr/>
           <p:nvPr/>
         </p:nvSpPr>
@@ -4710,7 +4710,7 @@
       </p:sp>
       <p:sp>
         <p:nvSpPr>
-          <p:cNvPr id="3" name="Oval 2"/>
+          <p:cNvPr id="3" name="deckgen:decor"/>
           <p:cNvSpPr/>
           <p:nvPr/>
         </p:nvSpPr>
@@ -4886,7 +4886,7 @@
                 <a:ea typeface="Pretendard"/>
                 <a:cs typeface="Pretendard"/>
               </a:rPr>
-              <a:t>5주차 닷새를 표 하나로 되짚고, 튜닝 체크리스트와 자주 겪는 오류를 정리한 뒤 6주차 Kafka 로 넘어갈 준비를 합니다</a:t>
+              <a:t>5주차를 되짚고 자주 겪는 오류를 정리한 뒤, 클러스터를 stop 하고 6주차 Kafka 를 준비합니다</a:t>
             </a:r>
           </a:p>
         </p:txBody>
@@ -5002,7 +5002,7 @@
                 <a:ea typeface="Pretendard"/>
                 <a:cs typeface="Pretendard"/>
               </a:rPr>
-              <a:t>5주차에 지나온 길 · 튜닝 체크리스트</a:t>
+              <a:t>5주차에 지나온 길</a:t>
             </a:r>
           </a:p>
         </p:txBody>
@@ -5118,7 +5118,7 @@
                 <a:ea typeface="Pretendard"/>
                 <a:cs typeface="Pretendard"/>
               </a:rPr>
-              <a:t>자주 겪는 오류 네 가지</a:t>
+              <a:t>자주 겪는 오류 — Initial job · 4040</a:t>
             </a:r>
           </a:p>
         </p:txBody>
@@ -5234,7 +5234,7 @@
                 <a:ea typeface="Pretendard"/>
                 <a:cs typeface="Pretendard"/>
               </a:rPr>
-              <a:t>컨테이너 정돈 — stop 만, down -v 금지</a:t>
+              <a:t>ls 파일 여섯 → docker compose stop</a:t>
             </a:r>
           </a:p>
         </p:txBody>
@@ -5350,7 +5350,7 @@
                 <a:ea typeface="Pretendard"/>
                 <a:cs typeface="Pretendard"/>
               </a:rPr>
-              <a:t>6-1 Kafka 예고</a:t>
+              <a:t>6-1 Kafka 예고 · week6 폴더</a:t>
             </a:r>
           </a:p>
         </p:txBody>
@@ -5462,7 +5462,7 @@
                 <a:ea typeface="Pretendard"/>
                 <a:cs typeface="Pretendard"/>
               </a:rPr>
-              <a:t>mart.py 와 실측표 — 제출 전 마지막 점검</a:t>
+              <a:t>mart.py · mart.log · README</a:t>
             </a:r>
           </a:p>
         </p:txBody>
@@ -5487,7 +5487,7 @@
       <p:grpSpPr/>
       <p:sp>
         <p:nvSpPr>
-          <p:cNvPr id="2" name="Oval 1"/>
+          <p:cNvPr id="2" name="deckgen:decor"/>
           <p:cNvSpPr/>
           <p:nvPr/>
         </p:nvSpPr>
@@ -5517,7 +5517,7 @@
       </p:sp>
       <p:sp>
         <p:nvSpPr>
-          <p:cNvPr id="3" name="Oval 2"/>
+          <p:cNvPr id="3" name="deckgen:decor"/>
           <p:cNvSpPr/>
           <p:nvPr/>
         </p:nvSpPr>
@@ -5547,7 +5547,7 @@
       </p:sp>
       <p:sp>
         <p:nvSpPr>
-          <p:cNvPr id="4" name="Oval 3"/>
+          <p:cNvPr id="4" name="deckgen:decor"/>
           <p:cNvSpPr/>
           <p:nvPr/>
         </p:nvSpPr>
@@ -5828,7 +5828,7 @@
                 <a:ea typeface="Pretendard"/>
                 <a:cs typeface="Pretendard"/>
               </a:rPr>
-              <a:t>접속 설정을 코드에 담은 mart.py 를 spark-submit 으로 실행한다</a:t>
+              <a:t>셸을 exit() 하고 mart.py 를 spark-submit 으로 실행한다</a:t>
             </a:r>
           </a:p>
         </p:txBody>
@@ -5974,7 +5974,7 @@
                 <a:ea typeface="Pretendard"/>
                 <a:cs typeface="Pretendard"/>
               </a:rPr>
-              <a:t>두 번 돌려 결과가 같은 것(멱등)을 확인한다</a:t>
+              <a:t>두 번 돌려 같은 3행이 나오는 것(멱등)을 확인한다</a:t>
             </a:r>
           </a:p>
         </p:txBody>
@@ -6120,7 +6120,7 @@
                 <a:ea typeface="Pretendard"/>
                 <a:cs typeface="Pretendard"/>
               </a:rPr>
-              <a:t>날짜 인자·로그·종료 코드를 넣어 실무형으로 다듬는다</a:t>
+              <a:t>날짜 인자·로그·종료 코드로 실무형으로 다듬는다</a:t>
             </a:r>
           </a:p>
         </p:txBody>
@@ -6266,7 +6266,7 @@
                 <a:ea typeface="Pretendard"/>
                 <a:cs typeface="Pretendard"/>
               </a:rPr>
-              <a:t>스크립트·마트 조회 결과·실측표를 제출 형태로 정리한다</a:t>
+              <a:t>mart.py · 마트 조회 결과 · README 실측표를 정리한다</a:t>
             </a:r>
           </a:p>
         </p:txBody>
@@ -6341,7 +6341,7 @@
                 <a:ea typeface="Pretendard"/>
                 <a:cs typeface="Pretendard"/>
               </a:rPr>
-              <a:t>결과물 = ① mart.py ② 마트 테이블 조회 캡처 — 제출은 사이트 「산출물 제출」 페이지에서</a:t>
+              <a:t>제출 마감 10-30(금) 23:59 — 사이트 「산출물 제출」 페이지에서</a:t>
             </a:r>
           </a:p>
         </p:txBody>
@@ -6478,7 +6478,7 @@
       <p:grpSpPr/>
       <p:sp>
         <p:nvSpPr>
-          <p:cNvPr id="2" name="Oval 1"/>
+          <p:cNvPr id="2" name="deckgen:decor"/>
           <p:cNvSpPr/>
           <p:nvPr/>
         </p:nvSpPr>
@@ -6508,7 +6508,7 @@
       </p:sp>
       <p:sp>
         <p:nvSpPr>
-          <p:cNvPr id="3" name="Oval 2"/>
+          <p:cNvPr id="3" name="deckgen:decor"/>
           <p:cNvSpPr/>
           <p:nvPr/>
         </p:nvSpPr>
@@ -6538,7 +6538,7 @@
       </p:sp>
       <p:sp>
         <p:nvSpPr>
-          <p:cNvPr id="4" name="Oval 3"/>
+          <p:cNvPr id="4" name="deckgen:decor"/>
           <p:cNvSpPr/>
           <p:nvPr/>
         </p:nvSpPr>
@@ -6714,7 +6714,7 @@
                 <a:ea typeface="Pretendard"/>
                 <a:cs typeface="Pretendard"/>
               </a:rPr>
-              <a:t>5-3 에서 셸에 길게 주던 접속 옵션을 스크립트 안에 담는 것부터 시작합니다</a:t>
+              <a:t>5-3 에서 셸에 길게 주던 접속 설정을 mart.py 안에 담습니다</a:t>
             </a:r>
           </a:p>
         </p:txBody>
@@ -6819,7 +6819,7 @@
                 <a:ea typeface="Pretendard"/>
                 <a:cs typeface="Pretendard"/>
               </a:rPr>
-              <a:t>1. 작성·실행</a:t>
+              <a:t>1. exit · 작성</a:t>
             </a:r>
           </a:p>
         </p:txBody>
@@ -6860,7 +6860,7 @@
                 <a:ea typeface="Pretendard"/>
                 <a:cs typeface="Pretendard"/>
               </a:rPr>
-              <a:t>mart.py</a:t>
+              <a:t>셸 나오기</a:t>
             </a:r>
           </a:p>
           <a:p>
@@ -6878,7 +6878,7 @@
                 <a:ea typeface="Pretendard"/>
                 <a:cs typeface="Pretendard"/>
               </a:rPr>
-              <a:t>spark-submit</a:t>
+              <a:t>히어독 mart.py</a:t>
             </a:r>
           </a:p>
         </p:txBody>
@@ -7024,7 +7024,7 @@
                 <a:ea typeface="Pretendard"/>
                 <a:cs typeface="Pretendard"/>
               </a:rPr>
-              <a:t>한 번 더 실행</a:t>
+              <a:t>한 번 더</a:t>
             </a:r>
           </a:p>
           <a:p>
@@ -7042,7 +7042,7 @@
                 <a:ea typeface="Pretendard"/>
                 <a:cs typeface="Pretendard"/>
               </a:rPr>
-              <a:t>같은 3행</a:t>
+              <a:t>tail -n 8</a:t>
             </a:r>
           </a:p>
         </p:txBody>
@@ -7188,7 +7188,7 @@
                 <a:ea typeface="Pretendard"/>
                 <a:cs typeface="Pretendard"/>
               </a:rPr>
-              <a:t>인자·로그</a:t>
+              <a:t>인자 · mart.log</a:t>
             </a:r>
           </a:p>
           <a:p>
@@ -7352,7 +7352,7 @@
                 <a:ea typeface="Pretendard"/>
                 <a:cs typeface="Pretendard"/>
               </a:rPr>
-              <a:t>실측표</a:t>
+              <a:t>README</a:t>
             </a:r>
           </a:p>
           <a:p>
@@ -7507,7 +7507,7 @@
       <p:grpSpPr/>
       <p:sp>
         <p:nvSpPr>
-          <p:cNvPr id="2" name="Oval 1"/>
+          <p:cNvPr id="2" name="deckgen:decor"/>
           <p:cNvSpPr/>
           <p:nvPr/>
         </p:nvSpPr>
@@ -7537,7 +7537,7 @@
       </p:sp>
       <p:sp>
         <p:nvSpPr>
-          <p:cNvPr id="3" name="Oval 2"/>
+          <p:cNvPr id="3" name="deckgen:decor"/>
           <p:cNvSpPr/>
           <p:nvPr/>
         </p:nvSpPr>
@@ -7567,7 +7567,7 @@
       </p:sp>
       <p:sp>
         <p:nvSpPr>
-          <p:cNvPr id="4" name="Oval 3"/>
+          <p:cNvPr id="4" name="deckgen:decor"/>
           <p:cNvSpPr/>
           <p:nvPr/>
         </p:nvSpPr>
@@ -7631,7 +7631,7 @@
                 <a:ea typeface="Pretendard"/>
                 <a:cs typeface="Pretendard"/>
               </a:rPr>
-              <a:t>1단계</a:t>
+              <a:t>1단계 — 일부러 실패시키기</a:t>
             </a:r>
           </a:p>
         </p:txBody>
@@ -7672,7 +7672,7 @@
                 <a:ea typeface="Pretendard"/>
                 <a:cs typeface="Pretendard"/>
               </a:rPr>
-              <a:t>mart.py 의 처리 흐름 — 일별 매출 마트</a:t>
+              <a:t>셸을 띄운 채 spark-submit 을 내면</a:t>
             </a:r>
           </a:p>
         </p:txBody>
@@ -7709,44 +7709,14 @@
       </p:sp>
       <p:sp>
         <p:nvSpPr>
-          <p:cNvPr id="8" name="Rectangle 7"/>
-          <p:cNvSpPr/>
-          <p:nvPr/>
-        </p:nvSpPr>
-        <p:spPr>
-          <a:xfrm>
-            <a:off x="1143000" y="2781300"/>
-            <a:ext cx="3002280" cy="704850"/>
-          </a:xfrm>
-          <a:prstGeom prst="rect">
-            <a:avLst/>
-          </a:prstGeom>
-          <a:solidFill>
-            <a:srgbClr val="0D2B5E"/>
-          </a:solidFill>
-          <a:ln>
-            <a:noFill/>
-          </a:ln>
-          <a:effectLst/>
-        </p:spPr>
-        <p:txBody>
-          <a:bodyPr rtlCol="0" anchor="ctr" wrap="square"/>
-          <a:lstStyle/>
-          <a:p>
-            <a:pPr algn="ctr"/>
-          </a:p>
-        </p:txBody>
-      </p:sp>
-      <p:sp>
-        <p:nvSpPr>
-          <p:cNvPr id="9" name="TextBox 8"/>
+          <p:cNvPr id="8" name="TextBox 7"/>
           <p:cNvSpPr txBox="1"/>
           <p:nvPr/>
         </p:nvSpPr>
         <p:spPr>
           <a:xfrm>
-            <a:off x="1143000" y="2781300"/>
-            <a:ext cx="3002280" cy="704850"/>
+            <a:off x="1143000" y="2857500"/>
+            <a:ext cx="7372350" cy="533400"/>
           </a:xfrm>
           <a:prstGeom prst="rect">
             <a:avLst/>
@@ -7754,26 +7724,67 @@
           <a:noFill/>
         </p:spPr>
         <p:txBody>
-          <a:bodyPr wrap="square" lIns="0" rIns="0" tIns="0" bIns="0" anchor="ctr">
+          <a:bodyPr wrap="square" lIns="0" rIns="0" tIns="0" bIns="0" anchor="t">
             <a:spAutoFit/>
           </a:bodyPr>
           <a:lstStyle/>
           <a:p>
-            <a:pPr algn="ctr">
-              <a:lnSpc>
-                <a:spcPct val="100000"/>
-              </a:lnSpc>
-            </a:pPr>
-            <a:r>
-              <a:rPr sz="2400" b="1">
-                <a:solidFill>
-                  <a:srgbClr val="FFFFFF"/>
+            <a:pPr algn="l">
+              <a:lnSpc>
+                <a:spcPct val="110000"/>
+              </a:lnSpc>
+            </a:pPr>
+            <a:r>
+              <a:rPr sz="3150" b="1">
+                <a:solidFill>
+                  <a:srgbClr val="0D2B5E"/>
                 </a:solidFill>
                 <a:latin typeface="Pretendard"/>
                 <a:ea typeface="Pretendard"/>
                 <a:cs typeface="Pretendard"/>
               </a:rPr>
-              <a:t>SparkSession</a:t>
+              <a:t>셸이 떠 있을 때</a:t>
+            </a:r>
+          </a:p>
+        </p:txBody>
+      </p:sp>
+      <p:sp>
+        <p:nvSpPr>
+          <p:cNvPr id="9" name="TextBox 8"/>
+          <p:cNvSpPr txBox="1"/>
+          <p:nvPr/>
+        </p:nvSpPr>
+        <p:spPr>
+          <a:xfrm>
+            <a:off x="1143000" y="3467100"/>
+            <a:ext cx="7372350" cy="876300"/>
+          </a:xfrm>
+          <a:prstGeom prst="rect">
+            <a:avLst/>
+          </a:prstGeom>
+          <a:noFill/>
+        </p:spPr>
+        <p:txBody>
+          <a:bodyPr wrap="square" lIns="0" rIns="0" tIns="0" bIns="0" anchor="t">
+            <a:spAutoFit/>
+          </a:bodyPr>
+          <a:lstStyle/>
+          <a:p>
+            <a:pPr algn="l">
+              <a:lnSpc>
+                <a:spcPct val="146000"/>
+              </a:lnSpc>
+            </a:pPr>
+            <a:r>
+              <a:rPr sz="2250" b="0">
+                <a:solidFill>
+                  <a:srgbClr val="3D3D3D"/>
+                </a:solidFill>
+                <a:latin typeface="Pretendard"/>
+                <a:ea typeface="Pretendard"/>
+                <a:cs typeface="Pretendard"/>
+              </a:rPr>
+              <a:t>WARN Initial job has not accepted any resources</a:t>
             </a:r>
           </a:p>
         </p:txBody>
@@ -7786,12 +7797,12 @@
         </p:nvSpPr>
         <p:spPr>
           <a:xfrm>
-            <a:off x="1143000" y="3657600"/>
-            <a:ext cx="3002280" cy="1428750"/>
+            <a:off x="1143000" y="4610100"/>
+            <a:ext cx="7372350" cy="2857500"/>
           </a:xfrm>
           <a:prstGeom prst="roundRect">
             <a:avLst>
-              <a:gd name="adj" fmla="val 3333"/>
+              <a:gd name="adj" fmla="val 1666"/>
             </a:avLst>
           </a:prstGeom>
           <a:solidFill>
@@ -7814,14 +7825,44 @@
       </p:sp>
       <p:sp>
         <p:nvSpPr>
-          <p:cNvPr id="11" name="TextBox 10"/>
+          <p:cNvPr id="11" name="Rectangle 10"/>
+          <p:cNvSpPr/>
+          <p:nvPr/>
+        </p:nvSpPr>
+        <p:spPr>
+          <a:xfrm>
+            <a:off x="1390650" y="4838700"/>
+            <a:ext cx="2152015" cy="599122"/>
+          </a:xfrm>
+          <a:prstGeom prst="rect">
+            <a:avLst/>
+          </a:prstGeom>
+          <a:solidFill>
+            <a:srgbClr val="0D2B5E"/>
+          </a:solidFill>
+          <a:ln>
+            <a:noFill/>
+          </a:ln>
+          <a:effectLst/>
+        </p:spPr>
+        <p:txBody>
+          <a:bodyPr rtlCol="0" anchor="ctr" wrap="square"/>
+          <a:lstStyle/>
+          <a:p>
+            <a:pPr algn="ctr"/>
+          </a:p>
+        </p:txBody>
+      </p:sp>
+      <p:sp>
+        <p:nvSpPr>
+          <p:cNvPr id="12" name="TextBox 11"/>
           <p:cNvSpPr txBox="1"/>
           <p:nvPr/>
         </p:nvSpPr>
         <p:spPr>
           <a:xfrm>
-            <a:off x="1276350" y="3657600"/>
-            <a:ext cx="2735580" cy="1428750"/>
+            <a:off x="1390650" y="4838700"/>
+            <a:ext cx="2152015" cy="599122"/>
           </a:xfrm>
           <a:prstGeom prst="rect">
             <a:avLst/>
@@ -7836,156 +7877,37 @@
           <a:p>
             <a:pPr algn="ctr">
               <a:lnSpc>
-                <a:spcPct val="135000"/>
-              </a:lnSpc>
-            </a:pPr>
-            <a:r>
-              <a:rPr sz="1800" b="0">
-                <a:solidFill>
-                  <a:srgbClr val="3D3D3D"/>
+                <a:spcPct val="100000"/>
+              </a:lnSpc>
+            </a:pPr>
+            <a:r>
+              <a:rPr sz="2025" b="1">
+                <a:solidFill>
+                  <a:srgbClr val="FFFFFF"/>
                 </a:solidFill>
                 <a:latin typeface="Pretendard"/>
                 <a:ea typeface="Pretendard"/>
                 <a:cs typeface="Pretendard"/>
               </a:rPr>
-              <a:t>s3a·Iceberg</a:t>
-            </a:r>
-          </a:p>
-          <a:p>
-            <a:pPr algn="ctr">
-              <a:lnSpc>
-                <a:spcPct val="135000"/>
-              </a:lnSpc>
-            </a:pPr>
-            <a:r>
-              <a:rPr sz="1800" b="0">
-                <a:solidFill>
-                  <a:srgbClr val="3D3D3D"/>
-                </a:solidFill>
-                <a:latin typeface="Pretendard"/>
-                <a:ea typeface="Pretendard"/>
-                <a:cs typeface="Pretendard"/>
-              </a:rPr>
-              <a:t>설정을 코드에</a:t>
-            </a:r>
-          </a:p>
-        </p:txBody>
-      </p:sp>
-      <p:sp>
-        <p:nvSpPr>
-          <p:cNvPr id="12" name="Right Arrow 11"/>
-          <p:cNvSpPr/>
-          <p:nvPr/>
-        </p:nvSpPr>
-        <p:spPr>
-          <a:xfrm>
-            <a:off x="4164330" y="3028950"/>
-            <a:ext cx="209550" cy="209550"/>
-          </a:xfrm>
-          <a:prstGeom prst="rightArrow">
-            <a:avLst/>
-          </a:prstGeom>
-          <a:solidFill>
-            <a:srgbClr val="1E5BC6"/>
-          </a:solidFill>
-          <a:ln>
-            <a:noFill/>
-          </a:ln>
-          <a:effectLst/>
-        </p:spPr>
-        <p:txBody>
-          <a:bodyPr rtlCol="0" anchor="ctr" wrap="square"/>
-          <a:lstStyle/>
-          <a:p>
-            <a:pPr algn="ctr"/>
-          </a:p>
-        </p:txBody>
-      </p:sp>
-      <p:sp>
-        <p:nvSpPr>
-          <p:cNvPr id="13" name="Rectangle 12"/>
-          <p:cNvSpPr/>
-          <p:nvPr/>
-        </p:nvSpPr>
-        <p:spPr>
-          <a:xfrm>
-            <a:off x="4392930" y="2781300"/>
-            <a:ext cx="3002280" cy="704850"/>
-          </a:xfrm>
-          <a:prstGeom prst="rect">
-            <a:avLst/>
-          </a:prstGeom>
-          <a:solidFill>
-            <a:srgbClr val="1E5BC6"/>
-          </a:solidFill>
-          <a:ln>
-            <a:noFill/>
-          </a:ln>
-          <a:effectLst/>
-        </p:spPr>
-        <p:txBody>
-          <a:bodyPr rtlCol="0" anchor="ctr" wrap="square"/>
-          <a:lstStyle/>
-          <a:p>
-            <a:pPr algn="ctr"/>
-          </a:p>
-        </p:txBody>
-      </p:sp>
-      <p:sp>
-        <p:nvSpPr>
-          <p:cNvPr id="14" name="TextBox 13"/>
-          <p:cNvSpPr txBox="1"/>
-          <p:nvPr/>
-        </p:nvSpPr>
-        <p:spPr>
-          <a:xfrm>
-            <a:off x="4392930" y="2781300"/>
-            <a:ext cx="3002280" cy="704850"/>
-          </a:xfrm>
-          <a:prstGeom prst="rect">
-            <a:avLst/>
-          </a:prstGeom>
-          <a:noFill/>
-        </p:spPr>
-        <p:txBody>
-          <a:bodyPr wrap="square" lIns="0" rIns="0" tIns="0" bIns="0" anchor="ctr">
-            <a:spAutoFit/>
-          </a:bodyPr>
-          <a:lstStyle/>
-          <a:p>
-            <a:pPr algn="ctr">
-              <a:lnSpc>
-                <a:spcPct val="100000"/>
-              </a:lnSpc>
-            </a:pPr>
-            <a:r>
-              <a:rPr sz="2400" b="1">
-                <a:solidFill>
-                  <a:srgbClr val="FFFFFF"/>
-                </a:solidFill>
-                <a:latin typeface="Pretendard"/>
-                <a:ea typeface="Pretendard"/>
-                <a:cs typeface="Pretendard"/>
-              </a:rPr>
-              <a:t>원천</a:t>
-            </a:r>
-          </a:p>
-        </p:txBody>
-      </p:sp>
-      <p:sp>
-        <p:nvSpPr>
-          <p:cNvPr id="15" name="Rounded Rectangle 14"/>
-          <p:cNvSpPr/>
-          <p:nvPr/>
-        </p:nvSpPr>
-        <p:spPr>
-          <a:xfrm>
-            <a:off x="4392930" y="3657600"/>
-            <a:ext cx="3002280" cy="1428750"/>
+              <a:t>8080 Cores</a:t>
+            </a:r>
+          </a:p>
+        </p:txBody>
+      </p:sp>
+      <p:sp>
+        <p:nvSpPr>
+          <p:cNvPr id="13" name="Rounded Rectangle 12"/>
+          <p:cNvSpPr/>
+          <p:nvPr/>
+        </p:nvSpPr>
+        <p:spPr>
+          <a:xfrm>
+            <a:off x="1390650" y="5583555"/>
+            <a:ext cx="2152015" cy="1214438"/>
           </a:xfrm>
           <a:prstGeom prst="roundRect">
             <a:avLst>
-              <a:gd name="adj" fmla="val 3333"/>
+              <a:gd name="adj" fmla="val 3921"/>
             </a:avLst>
           </a:prstGeom>
           <a:solidFill>
@@ -8008,14 +7930,14 @@
       </p:sp>
       <p:sp>
         <p:nvSpPr>
-          <p:cNvPr id="16" name="TextBox 15"/>
+          <p:cNvPr id="14" name="TextBox 13"/>
           <p:cNvSpPr txBox="1"/>
           <p:nvPr/>
         </p:nvSpPr>
         <p:spPr>
           <a:xfrm>
-            <a:off x="4526280" y="3657600"/>
-            <a:ext cx="2735580" cy="1428750"/>
+            <a:off x="1524000" y="5583555"/>
+            <a:ext cx="1885315" cy="1214438"/>
           </a:xfrm>
           <a:prstGeom prst="rect">
             <a:avLst/>
@@ -8034,7 +7956,7 @@
               </a:lnSpc>
             </a:pPr>
             <a:r>
-              <a:rPr sz="1800" b="0">
+              <a:rPr sz="1500" b="0">
                 <a:solidFill>
                   <a:srgbClr val="3D3D3D"/>
                 </a:solidFill>
@@ -8042,144 +7964,126 @@
                 <a:ea typeface="Pretendard"/>
                 <a:cs typeface="Pretendard"/>
               </a:rPr>
-              <a:t>orders</a:t>
-            </a:r>
-          </a:p>
+              <a:t>4 Total, 4 Used</a:t>
+            </a:r>
+          </a:p>
+        </p:txBody>
+      </p:sp>
+      <p:sp>
+        <p:nvSpPr>
+          <p:cNvPr id="15" name="Right Arrow 14"/>
+          <p:cNvSpPr/>
+          <p:nvPr/>
+        </p:nvSpPr>
+        <p:spPr>
+          <a:xfrm>
+            <a:off x="3561715" y="5049202"/>
+            <a:ext cx="172402" cy="178118"/>
+          </a:xfrm>
+          <a:prstGeom prst="rightArrow">
+            <a:avLst/>
+          </a:prstGeom>
+          <a:solidFill>
+            <a:srgbClr val="1E5BC6"/>
+          </a:solidFill>
+          <a:ln>
+            <a:noFill/>
+          </a:ln>
+          <a:effectLst/>
+        </p:spPr>
+        <p:txBody>
+          <a:bodyPr rtlCol="0" anchor="ctr" wrap="square"/>
+          <a:lstStyle/>
+          <a:p>
+            <a:pPr algn="ctr"/>
+          </a:p>
+        </p:txBody>
+      </p:sp>
+      <p:sp>
+        <p:nvSpPr>
+          <p:cNvPr id="16" name="Rectangle 15"/>
+          <p:cNvSpPr/>
+          <p:nvPr/>
+        </p:nvSpPr>
+        <p:spPr>
+          <a:xfrm>
+            <a:off x="3753167" y="4838700"/>
+            <a:ext cx="2152015" cy="599122"/>
+          </a:xfrm>
+          <a:prstGeom prst="rect">
+            <a:avLst/>
+          </a:prstGeom>
+          <a:solidFill>
+            <a:srgbClr val="1E5BC6"/>
+          </a:solidFill>
+          <a:ln>
+            <a:noFill/>
+          </a:ln>
+          <a:effectLst/>
+        </p:spPr>
+        <p:txBody>
+          <a:bodyPr rtlCol="0" anchor="ctr" wrap="square"/>
+          <a:lstStyle/>
+          <a:p>
+            <a:pPr algn="ctr"/>
+          </a:p>
+        </p:txBody>
+      </p:sp>
+      <p:sp>
+        <p:nvSpPr>
+          <p:cNvPr id="17" name="TextBox 16"/>
+          <p:cNvSpPr txBox="1"/>
+          <p:nvPr/>
+        </p:nvSpPr>
+        <p:spPr>
+          <a:xfrm>
+            <a:off x="3753167" y="4838700"/>
+            <a:ext cx="2152015" cy="599122"/>
+          </a:xfrm>
+          <a:prstGeom prst="rect">
+            <a:avLst/>
+          </a:prstGeom>
+          <a:noFill/>
+        </p:spPr>
+        <p:txBody>
+          <a:bodyPr wrap="square" lIns="0" rIns="0" tIns="0" bIns="0" anchor="ctr">
+            <a:spAutoFit/>
+          </a:bodyPr>
+          <a:lstStyle/>
           <a:p>
             <a:pPr algn="ctr">
               <a:lnSpc>
-                <a:spcPct val="135000"/>
-              </a:lnSpc>
-            </a:pPr>
-            <a:r>
-              <a:rPr sz="1800" b="0">
-                <a:solidFill>
-                  <a:srgbClr val="3D3D3D"/>
+                <a:spcPct val="100000"/>
+              </a:lnSpc>
+            </a:pPr>
+            <a:r>
+              <a:rPr sz="2025" b="1">
+                <a:solidFill>
+                  <a:srgbClr val="FFFFFF"/>
                 </a:solidFill>
                 <a:latin typeface="Pretendard"/>
                 <a:ea typeface="Pretendard"/>
                 <a:cs typeface="Pretendard"/>
               </a:rPr>
-              <a:t>products</a:t>
-            </a:r>
-          </a:p>
-        </p:txBody>
-      </p:sp>
-      <p:sp>
-        <p:nvSpPr>
-          <p:cNvPr id="17" name="Right Arrow 16"/>
-          <p:cNvSpPr/>
-          <p:nvPr/>
-        </p:nvSpPr>
-        <p:spPr>
-          <a:xfrm>
-            <a:off x="7414260" y="3028950"/>
-            <a:ext cx="209550" cy="209550"/>
-          </a:xfrm>
-          <a:prstGeom prst="rightArrow">
-            <a:avLst/>
-          </a:prstGeom>
-          <a:solidFill>
-            <a:srgbClr val="1E5BC6"/>
-          </a:solidFill>
-          <a:ln>
-            <a:noFill/>
-          </a:ln>
-          <a:effectLst/>
-        </p:spPr>
-        <p:txBody>
-          <a:bodyPr rtlCol="0" anchor="ctr" wrap="square"/>
-          <a:lstStyle/>
-          <a:p>
-            <a:pPr algn="ctr"/>
-          </a:p>
-        </p:txBody>
-      </p:sp>
-      <p:sp>
-        <p:nvSpPr>
-          <p:cNvPr id="18" name="Rectangle 17"/>
-          <p:cNvSpPr/>
-          <p:nvPr/>
-        </p:nvSpPr>
-        <p:spPr>
-          <a:xfrm>
-            <a:off x="7642860" y="2781300"/>
-            <a:ext cx="3002280" cy="704850"/>
-          </a:xfrm>
-          <a:prstGeom prst="rect">
-            <a:avLst/>
-          </a:prstGeom>
-          <a:solidFill>
-            <a:srgbClr val="0D2B5E"/>
-          </a:solidFill>
-          <a:ln>
-            <a:noFill/>
-          </a:ln>
-          <a:effectLst/>
-        </p:spPr>
-        <p:txBody>
-          <a:bodyPr rtlCol="0" anchor="ctr" wrap="square"/>
-          <a:lstStyle/>
-          <a:p>
-            <a:pPr algn="ctr"/>
-          </a:p>
-        </p:txBody>
-      </p:sp>
-      <p:sp>
-        <p:nvSpPr>
-          <p:cNvPr id="19" name="TextBox 18"/>
-          <p:cNvSpPr txBox="1"/>
-          <p:nvPr/>
-        </p:nvSpPr>
-        <p:spPr>
-          <a:xfrm>
-            <a:off x="7642860" y="2781300"/>
-            <a:ext cx="3002280" cy="704850"/>
-          </a:xfrm>
-          <a:prstGeom prst="rect">
-            <a:avLst/>
-          </a:prstGeom>
-          <a:noFill/>
-        </p:spPr>
-        <p:txBody>
-          <a:bodyPr wrap="square" lIns="0" rIns="0" tIns="0" bIns="0" anchor="ctr">
-            <a:spAutoFit/>
-          </a:bodyPr>
-          <a:lstStyle/>
-          <a:p>
-            <a:pPr algn="ctr">
-              <a:lnSpc>
-                <a:spcPct val="100000"/>
-              </a:lnSpc>
-            </a:pPr>
-            <a:r>
-              <a:rPr sz="2400" b="1">
-                <a:solidFill>
-                  <a:srgbClr val="FFFFFF"/>
-                </a:solidFill>
-                <a:latin typeface="Pretendard"/>
-                <a:ea typeface="Pretendard"/>
-                <a:cs typeface="Pretendard"/>
-              </a:rPr>
-              <a:t>join + amount</a:t>
-            </a:r>
-          </a:p>
-        </p:txBody>
-      </p:sp>
-      <p:sp>
-        <p:nvSpPr>
-          <p:cNvPr id="20" name="Rounded Rectangle 19"/>
-          <p:cNvSpPr/>
-          <p:nvPr/>
-        </p:nvSpPr>
-        <p:spPr>
-          <a:xfrm>
-            <a:off x="7642860" y="3657600"/>
-            <a:ext cx="3002280" cy="1428750"/>
+              <a:t>spark-submit</a:t>
+            </a:r>
+          </a:p>
+        </p:txBody>
+      </p:sp>
+      <p:sp>
+        <p:nvSpPr>
+          <p:cNvPr id="18" name="Rounded Rectangle 17"/>
+          <p:cNvSpPr/>
+          <p:nvPr/>
+        </p:nvSpPr>
+        <p:spPr>
+          <a:xfrm>
+            <a:off x="3753167" y="5583555"/>
+            <a:ext cx="2152015" cy="1214438"/>
           </a:xfrm>
           <a:prstGeom prst="roundRect">
             <a:avLst>
-              <a:gd name="adj" fmla="val 3333"/>
+              <a:gd name="adj" fmla="val 3921"/>
             </a:avLst>
           </a:prstGeom>
           <a:solidFill>
@@ -8202,14 +8106,14 @@
       </p:sp>
       <p:sp>
         <p:nvSpPr>
-          <p:cNvPr id="21" name="TextBox 20"/>
+          <p:cNvPr id="19" name="TextBox 18"/>
           <p:cNvSpPr txBox="1"/>
           <p:nvPr/>
         </p:nvSpPr>
         <p:spPr>
           <a:xfrm>
-            <a:off x="7776210" y="3657600"/>
-            <a:ext cx="2735580" cy="1428750"/>
+            <a:off x="3886517" y="5583555"/>
+            <a:ext cx="1885315" cy="1214438"/>
           </a:xfrm>
           <a:prstGeom prst="rect">
             <a:avLst/>
@@ -8228,7 +8132,7 @@
               </a:lnSpc>
             </a:pPr>
             <a:r>
-              <a:rPr sz="1800" b="0">
+              <a:rPr sz="1500" b="0">
                 <a:solidFill>
                   <a:srgbClr val="3D3D3D"/>
                 </a:solidFill>
@@ -8236,21 +8140,21 @@
                 <a:ea typeface="Pretendard"/>
                 <a:cs typeface="Pretendard"/>
               </a:rPr>
-              <a:t>qty × price</a:t>
-            </a:r>
-          </a:p>
-        </p:txBody>
-      </p:sp>
-      <p:sp>
-        <p:nvSpPr>
-          <p:cNvPr id="22" name="Right Arrow 21"/>
-          <p:cNvSpPr/>
-          <p:nvPr/>
-        </p:nvSpPr>
-        <p:spPr>
-          <a:xfrm>
-            <a:off x="10664190" y="3028950"/>
-            <a:ext cx="209550" cy="209550"/>
+              <a:t>일을 못 받음</a:t>
+            </a:r>
+          </a:p>
+        </p:txBody>
+      </p:sp>
+      <p:sp>
+        <p:nvSpPr>
+          <p:cNvPr id="20" name="Right Arrow 19"/>
+          <p:cNvSpPr/>
+          <p:nvPr/>
+        </p:nvSpPr>
+        <p:spPr>
+          <a:xfrm>
+            <a:off x="5924232" y="5049202"/>
+            <a:ext cx="172402" cy="178118"/>
           </a:xfrm>
           <a:prstGeom prst="rightArrow">
             <a:avLst/>
@@ -8273,20 +8177,20 @@
       </p:sp>
       <p:sp>
         <p:nvSpPr>
-          <p:cNvPr id="23" name="Rectangle 22"/>
-          <p:cNvSpPr/>
-          <p:nvPr/>
-        </p:nvSpPr>
-        <p:spPr>
-          <a:xfrm>
-            <a:off x="10892790" y="2781300"/>
-            <a:ext cx="3002280" cy="704850"/>
-          </a:xfrm>
-          <a:prstGeom prst="rect">
-            <a:avLst/>
-          </a:prstGeom>
-          <a:solidFill>
-            <a:srgbClr val="1E5BC6"/>
+          <p:cNvPr id="21" name="Rectangle 20"/>
+          <p:cNvSpPr/>
+          <p:nvPr/>
+        </p:nvSpPr>
+        <p:spPr>
+          <a:xfrm>
+            <a:off x="6115685" y="4838700"/>
+            <a:ext cx="2152015" cy="599122"/>
+          </a:xfrm>
+          <a:prstGeom prst="rect">
+            <a:avLst/>
+          </a:prstGeom>
+          <a:solidFill>
+            <a:srgbClr val="0D2B5E"/>
           </a:solidFill>
           <a:ln>
             <a:noFill/>
@@ -8303,14 +8207,14 @@
       </p:sp>
       <p:sp>
         <p:nvSpPr>
-          <p:cNvPr id="24" name="TextBox 23"/>
+          <p:cNvPr id="22" name="TextBox 21"/>
           <p:cNvSpPr txBox="1"/>
           <p:nvPr/>
         </p:nvSpPr>
         <p:spPr>
           <a:xfrm>
-            <a:off x="10892790" y="2781300"/>
-            <a:ext cx="3002280" cy="704850"/>
+            <a:off x="6115685" y="4838700"/>
+            <a:ext cx="2152015" cy="599122"/>
           </a:xfrm>
           <a:prstGeom prst="rect">
             <a:avLst/>
@@ -8329,7 +8233,7 @@
               </a:lnSpc>
             </a:pPr>
             <a:r>
-              <a:rPr sz="2400" b="1">
+              <a:rPr sz="2025" b="1">
                 <a:solidFill>
                   <a:srgbClr val="FFFFFF"/>
                 </a:solidFill>
@@ -8337,25 +8241,25 @@
                 <a:ea typeface="Pretendard"/>
                 <a:cs typeface="Pretendard"/>
               </a:rPr>
-              <a:t>groupBy 날짜</a:t>
-            </a:r>
-          </a:p>
-        </p:txBody>
-      </p:sp>
-      <p:sp>
-        <p:nvSpPr>
-          <p:cNvPr id="25" name="Rounded Rectangle 24"/>
-          <p:cNvSpPr/>
-          <p:nvPr/>
-        </p:nvSpPr>
-        <p:spPr>
-          <a:xfrm>
-            <a:off x="10892790" y="3657600"/>
-            <a:ext cx="3002280" cy="1428750"/>
+              <a:t>WARN 반복</a:t>
+            </a:r>
+          </a:p>
+        </p:txBody>
+      </p:sp>
+      <p:sp>
+        <p:nvSpPr>
+          <p:cNvPr id="23" name="Rounded Rectangle 22"/>
+          <p:cNvSpPr/>
+          <p:nvPr/>
+        </p:nvSpPr>
+        <p:spPr>
+          <a:xfrm>
+            <a:off x="6115685" y="5583555"/>
+            <a:ext cx="2152015" cy="1214438"/>
           </a:xfrm>
           <a:prstGeom prst="roundRect">
             <a:avLst>
-              <a:gd name="adj" fmla="val 3333"/>
+              <a:gd name="adj" fmla="val 3921"/>
             </a:avLst>
           </a:prstGeom>
           <a:solidFill>
@@ -8378,14 +8282,14 @@
       </p:sp>
       <p:sp>
         <p:nvSpPr>
-          <p:cNvPr id="26" name="TextBox 25"/>
+          <p:cNvPr id="24" name="TextBox 23"/>
           <p:cNvSpPr txBox="1"/>
           <p:nvPr/>
         </p:nvSpPr>
         <p:spPr>
           <a:xfrm>
-            <a:off x="11026140" y="3657600"/>
-            <a:ext cx="2735580" cy="1428750"/>
+            <a:off x="6249035" y="5583555"/>
+            <a:ext cx="1885315" cy="1214438"/>
           </a:xfrm>
           <a:prstGeom prst="rect">
             <a:avLst/>
@@ -8404,7 +8308,7 @@
               </a:lnSpc>
             </a:pPr>
             <a:r>
-              <a:rPr sz="1800" b="0">
+              <a:rPr sz="1500" b="0">
                 <a:solidFill>
                   <a:srgbClr val="3D3D3D"/>
                 </a:solidFill>
@@ -8412,99 +8316,62 @@
                 <a:ea typeface="Pretendard"/>
                 <a:cs typeface="Pretendard"/>
               </a:rPr>
-              <a:t>daily_amount</a:t>
-            </a:r>
-          </a:p>
-          <a:p>
-            <a:pPr algn="ctr">
-              <a:lnSpc>
-                <a:spcPct val="135000"/>
-              </a:lnSpc>
-            </a:pPr>
-            <a:r>
-              <a:rPr sz="1800" b="0">
-                <a:solidFill>
-                  <a:srgbClr val="3D3D3D"/>
+              <a:t>15초마다</a:t>
+            </a:r>
+          </a:p>
+        </p:txBody>
+      </p:sp>
+      <p:sp>
+        <p:nvSpPr>
+          <p:cNvPr id="25" name="TextBox 24"/>
+          <p:cNvSpPr txBox="1"/>
+          <p:nvPr/>
+        </p:nvSpPr>
+        <p:spPr>
+          <a:xfrm>
+            <a:off x="9772650" y="2857500"/>
+            <a:ext cx="7372350" cy="533400"/>
+          </a:xfrm>
+          <a:prstGeom prst="rect">
+            <a:avLst/>
+          </a:prstGeom>
+          <a:noFill/>
+        </p:spPr>
+        <p:txBody>
+          <a:bodyPr wrap="square" lIns="0" rIns="0" tIns="0" bIns="0" anchor="t">
+            <a:spAutoFit/>
+          </a:bodyPr>
+          <a:lstStyle/>
+          <a:p>
+            <a:pPr algn="l">
+              <a:lnSpc>
+                <a:spcPct val="110000"/>
+              </a:lnSpc>
+            </a:pPr>
+            <a:r>
+              <a:rPr sz="3150" b="1">
+                <a:solidFill>
+                  <a:srgbClr val="0D2B5E"/>
                 </a:solidFill>
                 <a:latin typeface="Pretendard"/>
                 <a:ea typeface="Pretendard"/>
                 <a:cs typeface="Pretendard"/>
               </a:rPr>
-              <a:t>order_cnt</a:t>
-            </a:r>
-          </a:p>
-        </p:txBody>
-      </p:sp>
-      <p:sp>
-        <p:nvSpPr>
-          <p:cNvPr id="27" name="Right Arrow 26"/>
-          <p:cNvSpPr/>
-          <p:nvPr/>
-        </p:nvSpPr>
-        <p:spPr>
-          <a:xfrm>
-            <a:off x="13914120" y="3028950"/>
-            <a:ext cx="209550" cy="209550"/>
-          </a:xfrm>
-          <a:prstGeom prst="rightArrow">
-            <a:avLst/>
-          </a:prstGeom>
-          <a:solidFill>
-            <a:srgbClr val="1E5BC6"/>
-          </a:solidFill>
-          <a:ln>
-            <a:noFill/>
-          </a:ln>
-          <a:effectLst/>
-        </p:spPr>
-        <p:txBody>
-          <a:bodyPr rtlCol="0" anchor="ctr" wrap="square"/>
-          <a:lstStyle/>
-          <a:p>
-            <a:pPr algn="ctr"/>
-          </a:p>
-        </p:txBody>
-      </p:sp>
-      <p:sp>
-        <p:nvSpPr>
-          <p:cNvPr id="28" name="Rectangle 27"/>
-          <p:cNvSpPr/>
-          <p:nvPr/>
-        </p:nvSpPr>
-        <p:spPr>
-          <a:xfrm>
-            <a:off x="14142720" y="2781300"/>
-            <a:ext cx="3002280" cy="704850"/>
-          </a:xfrm>
-          <a:prstGeom prst="rect">
-            <a:avLst/>
-          </a:prstGeom>
-          <a:solidFill>
-            <a:srgbClr val="0D2B5E"/>
-          </a:solidFill>
-          <a:ln>
-            <a:noFill/>
-          </a:ln>
-          <a:effectLst/>
-        </p:spPr>
-        <p:txBody>
-          <a:bodyPr rtlCol="0" anchor="ctr" wrap="square"/>
-          <a:lstStyle/>
-          <a:p>
-            <a:pPr algn="ctr"/>
-          </a:p>
-        </p:txBody>
-      </p:sp>
-      <p:sp>
-        <p:nvSpPr>
-          <p:cNvPr id="29" name="TextBox 28"/>
+              <a:t>셸을 exit() 하면</a:t>
+            </a:r>
+          </a:p>
+        </p:txBody>
+      </p:sp>
+      <p:sp>
+        <p:nvSpPr>
+          <p:cNvPr id="26" name="TextBox 25"/>
           <p:cNvSpPr txBox="1"/>
           <p:nvPr/>
         </p:nvSpPr>
         <p:spPr>
           <a:xfrm>
-            <a:off x="14142720" y="2781300"/>
-            <a:ext cx="3002280" cy="704850"/>
+            <a:off x="9772650" y="3467100"/>
+            <a:ext cx="7372350" cy="876300"/>
           </a:xfrm>
           <a:prstGeom prst="rect">
             <a:avLst/>
@@ -8512,44 +8379,44 @@
           <a:noFill/>
         </p:spPr>
         <p:txBody>
-          <a:bodyPr wrap="square" lIns="0" rIns="0" tIns="0" bIns="0" anchor="ctr">
+          <a:bodyPr wrap="square" lIns="0" rIns="0" tIns="0" bIns="0" anchor="t">
             <a:spAutoFit/>
           </a:bodyPr>
           <a:lstStyle/>
           <a:p>
-            <a:pPr algn="ctr">
-              <a:lnSpc>
-                <a:spcPct val="100000"/>
-              </a:lnSpc>
-            </a:pPr>
-            <a:r>
-              <a:rPr sz="2400" b="1">
-                <a:solidFill>
-                  <a:srgbClr val="FFFFFF"/>
+            <a:pPr algn="l">
+              <a:lnSpc>
+                <a:spcPct val="146000"/>
+              </a:lnSpc>
+            </a:pPr>
+            <a:r>
+              <a:rPr sz="2250" b="0">
+                <a:solidFill>
+                  <a:srgbClr val="3D3D3D"/>
                 </a:solidFill>
                 <a:latin typeface="Pretendard"/>
                 <a:ea typeface="Pretendard"/>
                 <a:cs typeface="Pretendard"/>
               </a:rPr>
-              <a:t>coalesce(1) 저장</a:t>
-            </a:r>
-          </a:p>
-        </p:txBody>
-      </p:sp>
-      <p:sp>
-        <p:nvSpPr>
-          <p:cNvPr id="30" name="Rounded Rectangle 29"/>
-          <p:cNvSpPr/>
-          <p:nvPr/>
-        </p:nvSpPr>
-        <p:spPr>
-          <a:xfrm>
-            <a:off x="14142720" y="3657600"/>
-            <a:ext cx="3002280" cy="1428750"/>
+              <a:t>기다리던 잡이 바로 이어서 돈다</a:t>
+            </a:r>
+          </a:p>
+        </p:txBody>
+      </p:sp>
+      <p:sp>
+        <p:nvSpPr>
+          <p:cNvPr id="27" name="Rounded Rectangle 26"/>
+          <p:cNvSpPr/>
+          <p:nvPr/>
+        </p:nvSpPr>
+        <p:spPr>
+          <a:xfrm>
+            <a:off x="9772650" y="4610100"/>
+            <a:ext cx="7372350" cy="2857500"/>
           </a:xfrm>
           <a:prstGeom prst="roundRect">
             <a:avLst>
-              <a:gd name="adj" fmla="val 3333"/>
+              <a:gd name="adj" fmla="val 1666"/>
             </a:avLst>
           </a:prstGeom>
           <a:solidFill>
@@ -8572,14 +8439,44 @@
       </p:sp>
       <p:sp>
         <p:nvSpPr>
-          <p:cNvPr id="31" name="TextBox 30"/>
+          <p:cNvPr id="28" name="Rectangle 27"/>
+          <p:cNvSpPr/>
+          <p:nvPr/>
+        </p:nvSpPr>
+        <p:spPr>
+          <a:xfrm>
+            <a:off x="10020300" y="4838700"/>
+            <a:ext cx="2152015" cy="599122"/>
+          </a:xfrm>
+          <a:prstGeom prst="rect">
+            <a:avLst/>
+          </a:prstGeom>
+          <a:solidFill>
+            <a:srgbClr val="0D2B5E"/>
+          </a:solidFill>
+          <a:ln>
+            <a:noFill/>
+          </a:ln>
+          <a:effectLst/>
+        </p:spPr>
+        <p:txBody>
+          <a:bodyPr rtlCol="0" anchor="ctr" wrap="square"/>
+          <a:lstStyle/>
+          <a:p>
+            <a:pPr algn="ctr"/>
+          </a:p>
+        </p:txBody>
+      </p:sp>
+      <p:sp>
+        <p:nvSpPr>
+          <p:cNvPr id="29" name="TextBox 28"/>
           <p:cNvSpPr txBox="1"/>
           <p:nvPr/>
         </p:nvSpPr>
         <p:spPr>
           <a:xfrm>
-            <a:off x="14276070" y="3657600"/>
-            <a:ext cx="2735580" cy="1428750"/>
+            <a:off x="10020300" y="4838700"/>
+            <a:ext cx="2152015" cy="599122"/>
           </a:xfrm>
           <a:prstGeom prst="rect">
             <a:avLst/>
@@ -8594,21 +8491,78 @@
           <a:p>
             <a:pPr algn="ctr">
               <a:lnSpc>
-                <a:spcPct val="135000"/>
-              </a:lnSpc>
-            </a:pPr>
-            <a:r>
-              <a:rPr sz="1800" b="0">
-                <a:solidFill>
-                  <a:srgbClr val="3D3D3D"/>
+                <a:spcPct val="100000"/>
+              </a:lnSpc>
+            </a:pPr>
+            <a:r>
+              <a:rPr sz="2025" b="1">
+                <a:solidFill>
+                  <a:srgbClr val="FFFFFF"/>
                 </a:solidFill>
                 <a:latin typeface="Pretendard"/>
                 <a:ea typeface="Pretendard"/>
                 <a:cs typeface="Pretendard"/>
               </a:rPr>
-              <a:t>Iceberg 테이블</a:t>
-            </a:r>
-          </a:p>
+              <a:t>exit()</a:t>
+            </a:r>
+          </a:p>
+        </p:txBody>
+      </p:sp>
+      <p:sp>
+        <p:nvSpPr>
+          <p:cNvPr id="30" name="Rounded Rectangle 29"/>
+          <p:cNvSpPr/>
+          <p:nvPr/>
+        </p:nvSpPr>
+        <p:spPr>
+          <a:xfrm>
+            <a:off x="10020300" y="5583555"/>
+            <a:ext cx="2152015" cy="1214438"/>
+          </a:xfrm>
+          <a:prstGeom prst="roundRect">
+            <a:avLst>
+              <a:gd name="adj" fmla="val 3921"/>
+            </a:avLst>
+          </a:prstGeom>
+          <a:solidFill>
+            <a:srgbClr val="FAFBFD"/>
+          </a:solidFill>
+          <a:ln w="9525">
+            <a:solidFill>
+              <a:srgbClr val="DCE1E8"/>
+            </a:solidFill>
+          </a:ln>
+          <a:effectLst/>
+        </p:spPr>
+        <p:txBody>
+          <a:bodyPr rtlCol="0" anchor="ctr" wrap="square"/>
+          <a:lstStyle/>
+          <a:p>
+            <a:pPr algn="ctr"/>
+          </a:p>
+        </p:txBody>
+      </p:sp>
+      <p:sp>
+        <p:nvSpPr>
+          <p:cNvPr id="31" name="TextBox 30"/>
+          <p:cNvSpPr txBox="1"/>
+          <p:nvPr/>
+        </p:nvSpPr>
+        <p:spPr>
+          <a:xfrm>
+            <a:off x="10153650" y="5583555"/>
+            <a:ext cx="1885315" cy="1214438"/>
+          </a:xfrm>
+          <a:prstGeom prst="rect">
+            <a:avLst/>
+          </a:prstGeom>
+          <a:noFill/>
+        </p:spPr>
+        <p:txBody>
+          <a:bodyPr wrap="square" lIns="0" rIns="0" tIns="0" bIns="0" anchor="ctr">
+            <a:spAutoFit/>
+          </a:bodyPr>
+          <a:lstStyle/>
           <a:p>
             <a:pPr algn="ctr">
               <a:lnSpc>
@@ -8616,7 +8570,7 @@
               </a:lnSpc>
             </a:pPr>
             <a:r>
-              <a:rPr sz="1800" b="0">
+              <a:rPr sz="1500" b="0">
                 <a:solidFill>
                   <a:srgbClr val="3D3D3D"/>
                 </a:solidFill>
@@ -8624,55 +8578,81 @@
                 <a:ea typeface="Pretendard"/>
                 <a:cs typeface="Pretendard"/>
               </a:rPr>
-              <a:t>파일 1개</a:t>
-            </a:r>
-          </a:p>
-        </p:txBody>
-      </p:sp>
-      <p:sp>
-        <p:nvSpPr>
-          <p:cNvPr id="32" name="Rounded Rectangle 31"/>
-          <p:cNvSpPr/>
-          <p:nvPr/>
-        </p:nvSpPr>
-        <p:spPr>
-          <a:xfrm>
-            <a:off x="1143000" y="5467350"/>
-            <a:ext cx="16002000" cy="742950"/>
-          </a:xfrm>
-          <a:prstGeom prst="roundRect">
-            <a:avLst>
-              <a:gd name="adj" fmla="val 6410"/>
-            </a:avLst>
-          </a:prstGeom>
-          <a:solidFill>
-            <a:srgbClr val="EDF3FD"/>
-          </a:solidFill>
-          <a:ln w="9525">
-            <a:solidFill>
-              <a:srgbClr val="BFD3F5"/>
-            </a:solidFill>
-          </a:ln>
-          <a:effectLst/>
-        </p:spPr>
-        <p:txBody>
-          <a:bodyPr rtlCol="0" anchor="ctr" wrap="square"/>
-          <a:lstStyle/>
-          <a:p>
-            <a:pPr algn="ctr"/>
-          </a:p>
-        </p:txBody>
-      </p:sp>
-      <p:sp>
-        <p:nvSpPr>
-          <p:cNvPr id="33" name="TextBox 32"/>
+              <a:t>셸 종료</a:t>
+            </a:r>
+          </a:p>
+        </p:txBody>
+      </p:sp>
+      <p:sp>
+        <p:nvSpPr>
+          <p:cNvPr id="32" name="Right Arrow 31"/>
+          <p:cNvSpPr/>
+          <p:nvPr/>
+        </p:nvSpPr>
+        <p:spPr>
+          <a:xfrm>
+            <a:off x="12191365" y="5049202"/>
+            <a:ext cx="172402" cy="178118"/>
+          </a:xfrm>
+          <a:prstGeom prst="rightArrow">
+            <a:avLst/>
+          </a:prstGeom>
+          <a:solidFill>
+            <a:srgbClr val="1E5BC6"/>
+          </a:solidFill>
+          <a:ln>
+            <a:noFill/>
+          </a:ln>
+          <a:effectLst/>
+        </p:spPr>
+        <p:txBody>
+          <a:bodyPr rtlCol="0" anchor="ctr" wrap="square"/>
+          <a:lstStyle/>
+          <a:p>
+            <a:pPr algn="ctr"/>
+          </a:p>
+        </p:txBody>
+      </p:sp>
+      <p:sp>
+        <p:nvSpPr>
+          <p:cNvPr id="33" name="Rectangle 32"/>
+          <p:cNvSpPr/>
+          <p:nvPr/>
+        </p:nvSpPr>
+        <p:spPr>
+          <a:xfrm>
+            <a:off x="12382818" y="4838700"/>
+            <a:ext cx="2152015" cy="599122"/>
+          </a:xfrm>
+          <a:prstGeom prst="rect">
+            <a:avLst/>
+          </a:prstGeom>
+          <a:solidFill>
+            <a:srgbClr val="1E5BC6"/>
+          </a:solidFill>
+          <a:ln>
+            <a:noFill/>
+          </a:ln>
+          <a:effectLst/>
+        </p:spPr>
+        <p:txBody>
+          <a:bodyPr rtlCol="0" anchor="ctr" wrap="square"/>
+          <a:lstStyle/>
+          <a:p>
+            <a:pPr algn="ctr"/>
+          </a:p>
+        </p:txBody>
+      </p:sp>
+      <p:sp>
+        <p:nvSpPr>
+          <p:cNvPr id="34" name="TextBox 33"/>
           <p:cNvSpPr txBox="1"/>
           <p:nvPr/>
         </p:nvSpPr>
         <p:spPr>
           <a:xfrm>
-            <a:off x="1143000" y="5467350"/>
-            <a:ext cx="16002000" cy="742950"/>
+            <a:off x="12382818" y="4838700"/>
+            <a:ext cx="2152015" cy="599122"/>
           </a:xfrm>
           <a:prstGeom prst="rect">
             <a:avLst/>
@@ -8691,29 +8671,310 @@
               </a:lnSpc>
             </a:pPr>
             <a:r>
-              <a:rPr sz="2250" b="1">
-                <a:solidFill>
-                  <a:srgbClr val="0D2B5E"/>
+              <a:rPr sz="2025" b="1">
+                <a:solidFill>
+                  <a:srgbClr val="FFFFFF"/>
                 </a:solidFill>
                 <a:latin typeface="Pretendard"/>
                 <a:ea typeface="Pretendard"/>
                 <a:cs typeface="Pretendard"/>
               </a:rPr>
-              <a:t>원천은 5-4 의 주문·상품 데이터 — 실무라면 원천 테이블을 읽는다</a:t>
-            </a:r>
-          </a:p>
-        </p:txBody>
-      </p:sp>
-      <p:sp>
-        <p:nvSpPr>
-          <p:cNvPr id="34" name="TextBox 33"/>
+              <a:t>코어 반납</a:t>
+            </a:r>
+          </a:p>
+        </p:txBody>
+      </p:sp>
+      <p:sp>
+        <p:nvSpPr>
+          <p:cNvPr id="35" name="Rounded Rectangle 34"/>
+          <p:cNvSpPr/>
+          <p:nvPr/>
+        </p:nvSpPr>
+        <p:spPr>
+          <a:xfrm>
+            <a:off x="12382818" y="5583555"/>
+            <a:ext cx="2152015" cy="1214438"/>
+          </a:xfrm>
+          <a:prstGeom prst="roundRect">
+            <a:avLst>
+              <a:gd name="adj" fmla="val 3921"/>
+            </a:avLst>
+          </a:prstGeom>
+          <a:solidFill>
+            <a:srgbClr val="FAFBFD"/>
+          </a:solidFill>
+          <a:ln w="9525">
+            <a:solidFill>
+              <a:srgbClr val="DCE1E8"/>
+            </a:solidFill>
+          </a:ln>
+          <a:effectLst/>
+        </p:spPr>
+        <p:txBody>
+          <a:bodyPr rtlCol="0" anchor="ctr" wrap="square"/>
+          <a:lstStyle/>
+          <a:p>
+            <a:pPr algn="ctr"/>
+          </a:p>
+        </p:txBody>
+      </p:sp>
+      <p:sp>
+        <p:nvSpPr>
+          <p:cNvPr id="36" name="TextBox 35"/>
           <p:cNvSpPr txBox="1"/>
           <p:nvPr/>
         </p:nvSpPr>
         <p:spPr>
           <a:xfrm>
-            <a:off x="1143000" y="7620000"/>
-            <a:ext cx="16002000" cy="342900"/>
+            <a:off x="12516168" y="5583555"/>
+            <a:ext cx="1885315" cy="1214438"/>
+          </a:xfrm>
+          <a:prstGeom prst="rect">
+            <a:avLst/>
+          </a:prstGeom>
+          <a:noFill/>
+        </p:spPr>
+        <p:txBody>
+          <a:bodyPr wrap="square" lIns="0" rIns="0" tIns="0" bIns="0" anchor="ctr">
+            <a:spAutoFit/>
+          </a:bodyPr>
+          <a:lstStyle/>
+          <a:p>
+            <a:pPr algn="ctr">
+              <a:lnSpc>
+                <a:spcPct val="135000"/>
+              </a:lnSpc>
+            </a:pPr>
+            <a:r>
+              <a:rPr sz="1500" b="0">
+                <a:solidFill>
+                  <a:srgbClr val="3D3D3D"/>
+                </a:solidFill>
+                <a:latin typeface="Pretendard"/>
+                <a:ea typeface="Pretendard"/>
+                <a:cs typeface="Pretendard"/>
+              </a:rPr>
+              <a:t>4개 비움</a:t>
+            </a:r>
+          </a:p>
+        </p:txBody>
+      </p:sp>
+      <p:sp>
+        <p:nvSpPr>
+          <p:cNvPr id="37" name="Right Arrow 36"/>
+          <p:cNvSpPr/>
+          <p:nvPr/>
+        </p:nvSpPr>
+        <p:spPr>
+          <a:xfrm>
+            <a:off x="14553882" y="5049202"/>
+            <a:ext cx="172402" cy="178118"/>
+          </a:xfrm>
+          <a:prstGeom prst="rightArrow">
+            <a:avLst/>
+          </a:prstGeom>
+          <a:solidFill>
+            <a:srgbClr val="1E5BC6"/>
+          </a:solidFill>
+          <a:ln>
+            <a:noFill/>
+          </a:ln>
+          <a:effectLst/>
+        </p:spPr>
+        <p:txBody>
+          <a:bodyPr rtlCol="0" anchor="ctr" wrap="square"/>
+          <a:lstStyle/>
+          <a:p>
+            <a:pPr algn="ctr"/>
+          </a:p>
+        </p:txBody>
+      </p:sp>
+      <p:sp>
+        <p:nvSpPr>
+          <p:cNvPr id="38" name="Rectangle 37"/>
+          <p:cNvSpPr/>
+          <p:nvPr/>
+        </p:nvSpPr>
+        <p:spPr>
+          <a:xfrm>
+            <a:off x="14745335" y="4838700"/>
+            <a:ext cx="2152015" cy="599122"/>
+          </a:xfrm>
+          <a:prstGeom prst="rect">
+            <a:avLst/>
+          </a:prstGeom>
+          <a:solidFill>
+            <a:srgbClr val="0D2B5E"/>
+          </a:solidFill>
+          <a:ln>
+            <a:noFill/>
+          </a:ln>
+          <a:effectLst/>
+        </p:spPr>
+        <p:txBody>
+          <a:bodyPr rtlCol="0" anchor="ctr" wrap="square"/>
+          <a:lstStyle/>
+          <a:p>
+            <a:pPr algn="ctr"/>
+          </a:p>
+        </p:txBody>
+      </p:sp>
+      <p:sp>
+        <p:nvSpPr>
+          <p:cNvPr id="39" name="TextBox 38"/>
+          <p:cNvSpPr txBox="1"/>
+          <p:nvPr/>
+        </p:nvSpPr>
+        <p:spPr>
+          <a:xfrm>
+            <a:off x="14745335" y="4838700"/>
+            <a:ext cx="2152015" cy="599122"/>
+          </a:xfrm>
+          <a:prstGeom prst="rect">
+            <a:avLst/>
+          </a:prstGeom>
+          <a:noFill/>
+        </p:spPr>
+        <p:txBody>
+          <a:bodyPr wrap="square" lIns="0" rIns="0" tIns="0" bIns="0" anchor="ctr">
+            <a:spAutoFit/>
+          </a:bodyPr>
+          <a:lstStyle/>
+          <a:p>
+            <a:pPr algn="ctr">
+              <a:lnSpc>
+                <a:spcPct val="100000"/>
+              </a:lnSpc>
+            </a:pPr>
+            <a:r>
+              <a:rPr sz="2025" b="1">
+                <a:solidFill>
+                  <a:srgbClr val="FFFFFF"/>
+                </a:solidFill>
+                <a:latin typeface="Pretendard"/>
+                <a:ea typeface="Pretendard"/>
+                <a:cs typeface="Pretendard"/>
+              </a:rPr>
+              <a:t>잡 진행</a:t>
+            </a:r>
+          </a:p>
+        </p:txBody>
+      </p:sp>
+      <p:sp>
+        <p:nvSpPr>
+          <p:cNvPr id="40" name="Rounded Rectangle 39"/>
+          <p:cNvSpPr/>
+          <p:nvPr/>
+        </p:nvSpPr>
+        <p:spPr>
+          <a:xfrm>
+            <a:off x="14745335" y="5583555"/>
+            <a:ext cx="2152015" cy="1214438"/>
+          </a:xfrm>
+          <a:prstGeom prst="roundRect">
+            <a:avLst>
+              <a:gd name="adj" fmla="val 3921"/>
+            </a:avLst>
+          </a:prstGeom>
+          <a:solidFill>
+            <a:srgbClr val="FAFBFD"/>
+          </a:solidFill>
+          <a:ln w="9525">
+            <a:solidFill>
+              <a:srgbClr val="DCE1E8"/>
+            </a:solidFill>
+          </a:ln>
+          <a:effectLst/>
+        </p:spPr>
+        <p:txBody>
+          <a:bodyPr rtlCol="0" anchor="ctr" wrap="square"/>
+          <a:lstStyle/>
+          <a:p>
+            <a:pPr algn="ctr"/>
+          </a:p>
+        </p:txBody>
+      </p:sp>
+      <p:sp>
+        <p:nvSpPr>
+          <p:cNvPr id="41" name="TextBox 40"/>
+          <p:cNvSpPr txBox="1"/>
+          <p:nvPr/>
+        </p:nvSpPr>
+        <p:spPr>
+          <a:xfrm>
+            <a:off x="14878685" y="5583555"/>
+            <a:ext cx="1885315" cy="1214438"/>
+          </a:xfrm>
+          <a:prstGeom prst="rect">
+            <a:avLst/>
+          </a:prstGeom>
+          <a:noFill/>
+        </p:spPr>
+        <p:txBody>
+          <a:bodyPr wrap="square" lIns="0" rIns="0" tIns="0" bIns="0" anchor="ctr">
+            <a:spAutoFit/>
+          </a:bodyPr>
+          <a:lstStyle/>
+          <a:p>
+            <a:pPr algn="ctr">
+              <a:lnSpc>
+                <a:spcPct val="135000"/>
+              </a:lnSpc>
+            </a:pPr>
+            <a:r>
+              <a:rPr sz="1500" b="0">
+                <a:solidFill>
+                  <a:srgbClr val="3D3D3D"/>
+                </a:solidFill>
+                <a:latin typeface="Pretendard"/>
+                <a:ea typeface="Pretendard"/>
+                <a:cs typeface="Pretendard"/>
+              </a:rPr>
+              <a:t>표가 찍힘</a:t>
+            </a:r>
+          </a:p>
+        </p:txBody>
+      </p:sp>
+      <p:sp>
+        <p:nvSpPr>
+          <p:cNvPr id="42" name="Oval 41"/>
+          <p:cNvSpPr/>
+          <p:nvPr/>
+        </p:nvSpPr>
+        <p:spPr>
+          <a:xfrm>
+            <a:off x="8686800" y="3771900"/>
+            <a:ext cx="914400" cy="914400"/>
+          </a:xfrm>
+          <a:prstGeom prst="ellipse">
+            <a:avLst/>
+          </a:prstGeom>
+          <a:solidFill>
+            <a:srgbClr val="0D2B5E"/>
+          </a:solidFill>
+          <a:ln>
+            <a:noFill/>
+          </a:ln>
+          <a:effectLst/>
+        </p:spPr>
+        <p:txBody>
+          <a:bodyPr rtlCol="0" anchor="ctr" wrap="square"/>
+          <a:lstStyle/>
+          <a:p>
+            <a:pPr algn="ctr"/>
+          </a:p>
+        </p:txBody>
+      </p:sp>
+      <p:sp>
+        <p:nvSpPr>
+          <p:cNvPr id="43" name="TextBox 42"/>
+          <p:cNvSpPr txBox="1"/>
+          <p:nvPr/>
+        </p:nvSpPr>
+        <p:spPr>
+          <a:xfrm>
+            <a:off x="8686800" y="4057650"/>
+            <a:ext cx="914400" cy="381000"/>
           </a:xfrm>
           <a:prstGeom prst="rect">
             <a:avLst/>
@@ -8726,28 +8987,28 @@
           </a:bodyPr>
           <a:lstStyle/>
           <a:p>
-            <a:pPr algn="l">
+            <a:pPr algn="ctr">
               <a:lnSpc>
                 <a:spcPct val="100000"/>
               </a:lnSpc>
             </a:pPr>
             <a:r>
-              <a:rPr sz="1875" b="1">
-                <a:solidFill>
-                  <a:srgbClr val="7D7D7D"/>
+              <a:rPr sz="2250" b="1">
+                <a:solidFill>
+                  <a:srgbClr val="FFFFFF"/>
                 </a:solidFill>
                 <a:latin typeface="Pretendard"/>
                 <a:ea typeface="Pretendard"/>
                 <a:cs typeface="Pretendard"/>
               </a:rPr>
-              <a:t>writeTo("lake.db.daily_sales_mart").createOrReplace() — 테이블을 통째로 교체해 저장</a:t>
-            </a:r>
-          </a:p>
-        </p:txBody>
-      </p:sp>
-      <p:sp>
-        <p:nvSpPr>
-          <p:cNvPr id="35" name="Rectangle 34"/>
+              <a:t>VS</a:t>
+            </a:r>
+          </a:p>
+        </p:txBody>
+      </p:sp>
+      <p:sp>
+        <p:nvSpPr>
+          <p:cNvPr id="44" name="Rectangle 43"/>
           <p:cNvSpPr/>
           <p:nvPr/>
         </p:nvSpPr>
@@ -8777,7 +9038,7 @@
       </p:sp>
       <p:sp>
         <p:nvSpPr>
-          <p:cNvPr id="36" name="TextBox 35"/>
+          <p:cNvPr id="45" name="TextBox 44"/>
           <p:cNvSpPr txBox="1"/>
           <p:nvPr/>
         </p:nvSpPr>
@@ -8818,7 +9079,7 @@
       </p:sp>
       <p:sp>
         <p:nvSpPr>
-          <p:cNvPr id="37" name="TextBox 36"/>
+          <p:cNvPr id="46" name="TextBox 45"/>
           <p:cNvSpPr txBox="1"/>
           <p:nvPr/>
         </p:nvSpPr>
@@ -8877,7 +9138,7 @@
       <p:grpSpPr/>
       <p:sp>
         <p:nvSpPr>
-          <p:cNvPr id="2" name="Oval 1"/>
+          <p:cNvPr id="2" name="deckgen:decor"/>
           <p:cNvSpPr/>
           <p:nvPr/>
         </p:nvSpPr>
@@ -8907,7 +9168,7 @@
       </p:sp>
       <p:sp>
         <p:nvSpPr>
-          <p:cNvPr id="3" name="Oval 2"/>
+          <p:cNvPr id="3" name="deckgen:decor"/>
           <p:cNvSpPr/>
           <p:nvPr/>
         </p:nvSpPr>
@@ -8937,7 +9198,7 @@
       </p:sp>
       <p:sp>
         <p:nvSpPr>
-          <p:cNvPr id="4" name="Oval 3"/>
+          <p:cNvPr id="4" name="deckgen:decor"/>
           <p:cNvSpPr/>
           <p:nvPr/>
         </p:nvSpPr>
@@ -9001,7 +9262,7 @@
                 <a:ea typeface="Pretendard"/>
                 <a:cs typeface="Pretendard"/>
               </a:rPr>
-              <a:t>1·2단계</a:t>
+              <a:t>1단계</a:t>
             </a:r>
           </a:p>
         </p:txBody>
@@ -9042,7 +9303,7 @@
                 <a:ea typeface="Pretendard"/>
                 <a:cs typeface="Pretendard"/>
               </a:rPr>
-              <a:t>핵심 명령 — 복사 · 제출 · 재실행</a:t>
+              <a:t>mart.py 를 히어독으로 — 그리고 제출</a:t>
             </a:r>
           </a:p>
         </p:txBody>
@@ -9079,20 +9340,22 @@
       </p:sp>
       <p:sp>
         <p:nvSpPr>
-          <p:cNvPr id="8" name="Rectangle 7"/>
-          <p:cNvSpPr/>
-          <p:nvPr/>
-        </p:nvSpPr>
-        <p:spPr>
-          <a:xfrm>
-            <a:off x="1143000" y="2781300"/>
-            <a:ext cx="935581" cy="571500"/>
-          </a:xfrm>
-          <a:prstGeom prst="rect">
-            <a:avLst/>
-          </a:prstGeom>
-          <a:solidFill>
-            <a:srgbClr val="0D2B5E"/>
+          <p:cNvPr id="8" name="Rounded Rectangle 7"/>
+          <p:cNvSpPr/>
+          <p:nvPr/>
+        </p:nvSpPr>
+        <p:spPr>
+          <a:xfrm>
+            <a:off x="1143000" y="2343150"/>
+            <a:ext cx="16002000" cy="5143500"/>
+          </a:xfrm>
+          <a:prstGeom prst="roundRect">
+            <a:avLst>
+              <a:gd name="adj" fmla="val 1851"/>
+            </a:avLst>
+          </a:prstGeom>
+          <a:solidFill>
+            <a:srgbClr val="1E2433"/>
           </a:solidFill>
           <a:ln>
             <a:noFill/>
@@ -9109,14 +9372,44 @@
       </p:sp>
       <p:sp>
         <p:nvSpPr>
-          <p:cNvPr id="9" name="TextBox 8"/>
+          <p:cNvPr id="9" name="Rectangle 8"/>
+          <p:cNvSpPr/>
+          <p:nvPr/>
+        </p:nvSpPr>
+        <p:spPr>
+          <a:xfrm>
+            <a:off x="1143000" y="2343150"/>
+            <a:ext cx="685800" cy="5143500"/>
+          </a:xfrm>
+          <a:prstGeom prst="rect">
+            <a:avLst/>
+          </a:prstGeom>
+          <a:solidFill>
+            <a:srgbClr val="171C29"/>
+          </a:solidFill>
+          <a:ln>
+            <a:noFill/>
+          </a:ln>
+          <a:effectLst/>
+        </p:spPr>
+        <p:txBody>
+          <a:bodyPr rtlCol="0" anchor="ctr" wrap="square"/>
+          <a:lstStyle/>
+          <a:p>
+            <a:pPr algn="ctr"/>
+          </a:p>
+        </p:txBody>
+      </p:sp>
+      <p:sp>
+        <p:nvSpPr>
+          <p:cNvPr id="10" name="deckgen:code-lineno"/>
           <p:cNvSpPr txBox="1"/>
           <p:nvPr/>
         </p:nvSpPr>
         <p:spPr>
           <a:xfrm>
-            <a:off x="1143000" y="2781300"/>
-            <a:ext cx="935581" cy="571500"/>
+            <a:off x="1143000" y="2552700"/>
+            <a:ext cx="552450" cy="4724400"/>
           </a:xfrm>
           <a:prstGeom prst="rect">
             <a:avLst/>
@@ -9124,72 +9417,614 @@
           <a:noFill/>
         </p:spPr>
         <p:txBody>
-          <a:bodyPr wrap="square" lIns="0" rIns="0" tIns="0" bIns="0" anchor="ctr">
+          <a:bodyPr wrap="none" lIns="0" rIns="0" tIns="0" bIns="0" anchor="t">
             <a:spAutoFit/>
           </a:bodyPr>
           <a:lstStyle/>
           <a:p>
-            <a:pPr algn="ctr">
+            <a:pPr algn="r">
+              <a:lnSpc>
+                <a:spcPct val="115000"/>
+              </a:lnSpc>
+            </a:pPr>
+            <a:r>
+              <a:rPr sz="2025" b="0">
+                <a:solidFill>
+                  <a:srgbClr val="7A869C"/>
+                </a:solidFill>
+                <a:latin typeface="D2Coding"/>
+                <a:ea typeface="D2Coding"/>
+                <a:cs typeface="D2Coding"/>
+              </a:rPr>
+              <a:t>1</a:t>
+            </a:r>
+          </a:p>
+          <a:p>
+            <a:pPr algn="r">
+              <a:lnSpc>
+                <a:spcPct val="115000"/>
+              </a:lnSpc>
+            </a:pPr>
+            <a:r>
+              <a:rPr sz="2025" b="0">
+                <a:solidFill>
+                  <a:srgbClr val="7A869C"/>
+                </a:solidFill>
+                <a:latin typeface="D2Coding"/>
+                <a:ea typeface="D2Coding"/>
+                <a:cs typeface="D2Coding"/>
+              </a:rPr>
+              <a:t>2</a:t>
+            </a:r>
+          </a:p>
+          <a:p>
+            <a:pPr algn="r">
+              <a:lnSpc>
+                <a:spcPct val="115000"/>
+              </a:lnSpc>
+            </a:pPr>
+            <a:r>
+              <a:rPr sz="2025" b="0">
+                <a:solidFill>
+                  <a:srgbClr val="7A869C"/>
+                </a:solidFill>
+                <a:latin typeface="D2Coding"/>
+                <a:ea typeface="D2Coding"/>
+                <a:cs typeface="D2Coding"/>
+              </a:rPr>
+              <a:t>3</a:t>
+            </a:r>
+          </a:p>
+          <a:p>
+            <a:pPr algn="r">
+              <a:lnSpc>
+                <a:spcPct val="115000"/>
+              </a:lnSpc>
+            </a:pPr>
+            <a:r>
+              <a:rPr sz="2025" b="0">
+                <a:solidFill>
+                  <a:srgbClr val="7A869C"/>
+                </a:solidFill>
+                <a:latin typeface="D2Coding"/>
+                <a:ea typeface="D2Coding"/>
+                <a:cs typeface="D2Coding"/>
+              </a:rPr>
+              <a:t>4</a:t>
+            </a:r>
+          </a:p>
+          <a:p>
+            <a:pPr algn="r">
+              <a:lnSpc>
+                <a:spcPct val="115000"/>
+              </a:lnSpc>
+            </a:pPr>
+            <a:r>
+              <a:rPr sz="2025" b="0">
+                <a:solidFill>
+                  <a:srgbClr val="7A869C"/>
+                </a:solidFill>
+                <a:latin typeface="D2Coding"/>
+                <a:ea typeface="D2Coding"/>
+                <a:cs typeface="D2Coding"/>
+              </a:rPr>
+              <a:t>5</a:t>
+            </a:r>
+          </a:p>
+          <a:p>
+            <a:pPr algn="r">
+              <a:lnSpc>
+                <a:spcPct val="115000"/>
+              </a:lnSpc>
+            </a:pPr>
+            <a:r>
+              <a:rPr sz="2025" b="0">
+                <a:solidFill>
+                  <a:srgbClr val="7A869C"/>
+                </a:solidFill>
+                <a:latin typeface="D2Coding"/>
+                <a:ea typeface="D2Coding"/>
+                <a:cs typeface="D2Coding"/>
+              </a:rPr>
+              <a:t>6</a:t>
+            </a:r>
+          </a:p>
+          <a:p>
+            <a:pPr algn="r">
+              <a:lnSpc>
+                <a:spcPct val="115000"/>
+              </a:lnSpc>
+            </a:pPr>
+            <a:r>
+              <a:rPr sz="2025" b="0">
+                <a:solidFill>
+                  <a:srgbClr val="7A869C"/>
+                </a:solidFill>
+                <a:latin typeface="D2Coding"/>
+                <a:ea typeface="D2Coding"/>
+                <a:cs typeface="D2Coding"/>
+              </a:rPr>
+              <a:t>7</a:t>
+            </a:r>
+          </a:p>
+          <a:p>
+            <a:pPr algn="r">
+              <a:lnSpc>
+                <a:spcPct val="115000"/>
+              </a:lnSpc>
+            </a:pPr>
+            <a:r>
+              <a:rPr sz="2025" b="0">
+                <a:solidFill>
+                  <a:srgbClr val="7A869C"/>
+                </a:solidFill>
+                <a:latin typeface="D2Coding"/>
+                <a:ea typeface="D2Coding"/>
+                <a:cs typeface="D2Coding"/>
+              </a:rPr>
+              <a:t>8</a:t>
+            </a:r>
+          </a:p>
+          <a:p>
+            <a:pPr algn="r">
+              <a:lnSpc>
+                <a:spcPct val="115000"/>
+              </a:lnSpc>
+            </a:pPr>
+            <a:r>
+              <a:rPr sz="2025" b="0">
+                <a:solidFill>
+                  <a:srgbClr val="7A869C"/>
+                </a:solidFill>
+                <a:latin typeface="D2Coding"/>
+                <a:ea typeface="D2Coding"/>
+                <a:cs typeface="D2Coding"/>
+              </a:rPr>
+              <a:t>9</a:t>
+            </a:r>
+          </a:p>
+          <a:p>
+            <a:pPr algn="r">
+              <a:lnSpc>
+                <a:spcPct val="115000"/>
+              </a:lnSpc>
+            </a:pPr>
+            <a:r>
+              <a:rPr sz="2025" b="0">
+                <a:solidFill>
+                  <a:srgbClr val="7A869C"/>
+                </a:solidFill>
+                <a:latin typeface="D2Coding"/>
+                <a:ea typeface="D2Coding"/>
+                <a:cs typeface="D2Coding"/>
+              </a:rPr>
+              <a:t>10</a:t>
+            </a:r>
+          </a:p>
+          <a:p>
+            <a:pPr algn="r">
+              <a:lnSpc>
+                <a:spcPct val="115000"/>
+              </a:lnSpc>
+            </a:pPr>
+            <a:r>
+              <a:rPr sz="2025" b="0">
+                <a:solidFill>
+                  <a:srgbClr val="7A869C"/>
+                </a:solidFill>
+                <a:latin typeface="D2Coding"/>
+                <a:ea typeface="D2Coding"/>
+                <a:cs typeface="D2Coding"/>
+              </a:rPr>
+              <a:t>11</a:t>
+            </a:r>
+          </a:p>
+          <a:p>
+            <a:pPr algn="r">
+              <a:lnSpc>
+                <a:spcPct val="115000"/>
+              </a:lnSpc>
+            </a:pPr>
+            <a:r>
+              <a:rPr sz="2025" b="0">
+                <a:solidFill>
+                  <a:srgbClr val="7A869C"/>
+                </a:solidFill>
+                <a:latin typeface="D2Coding"/>
+                <a:ea typeface="D2Coding"/>
+                <a:cs typeface="D2Coding"/>
+              </a:rPr>
+              <a:t>12</a:t>
+            </a:r>
+          </a:p>
+          <a:p>
+            <a:pPr algn="r">
+              <a:lnSpc>
+                <a:spcPct val="115000"/>
+              </a:lnSpc>
+            </a:pPr>
+            <a:r>
+              <a:rPr sz="2025" b="0">
+                <a:solidFill>
+                  <a:srgbClr val="7A869C"/>
+                </a:solidFill>
+                <a:latin typeface="D2Coding"/>
+                <a:ea typeface="D2Coding"/>
+                <a:cs typeface="D2Coding"/>
+              </a:rPr>
+              <a:t>13</a:t>
+            </a:r>
+          </a:p>
+        </p:txBody>
+      </p:sp>
+      <p:sp>
+        <p:nvSpPr>
+          <p:cNvPr id="11" name="deckgen:code"/>
+          <p:cNvSpPr txBox="1"/>
+          <p:nvPr/>
+        </p:nvSpPr>
+        <p:spPr>
+          <a:xfrm>
+            <a:off x="2038350" y="2552700"/>
+            <a:ext cx="14897100" cy="4724400"/>
+          </a:xfrm>
+          <a:prstGeom prst="rect">
+            <a:avLst/>
+          </a:prstGeom>
+          <a:noFill/>
+        </p:spPr>
+        <p:txBody>
+          <a:bodyPr wrap="none" lIns="0" rIns="0" tIns="0" bIns="0" anchor="t">
+            <a:spAutoFit/>
+          </a:bodyPr>
+          <a:lstStyle/>
+          <a:p>
+            <a:pPr algn="l">
+              <a:lnSpc>
+                <a:spcPct val="115000"/>
+              </a:lnSpc>
+            </a:pPr>
+            <a:r>
+              <a:rPr sz="2025" b="0">
+                <a:solidFill>
+                  <a:srgbClr val="E6EAF2"/>
+                </a:solidFill>
+                <a:latin typeface="D2Coding"/>
+                <a:ea typeface="D2Coding"/>
+                <a:cs typeface="D2Coding"/>
+              </a:rPr>
+              <a:t>cd ~/data-eng/week5</a:t>
+            </a:r>
+          </a:p>
+          <a:p>
+            <a:pPr algn="l">
+              <a:lnSpc>
+                <a:spcPct val="115000"/>
+              </a:lnSpc>
+            </a:pPr>
+            <a:r>
+              <a:rPr sz="2025" b="0">
+                <a:solidFill>
+                  <a:srgbClr val="E6EAF2"/>
+                </a:solidFill>
+                <a:latin typeface="D2Coding"/>
+                <a:ea typeface="D2Coding"/>
+                <a:cs typeface="D2Coding"/>
+              </a:rPr>
+              <a:t>cat &gt; mart.py &lt;&lt; 'EOF'</a:t>
+            </a:r>
+          </a:p>
+          <a:p>
+            <a:pPr algn="l">
+              <a:lnSpc>
+                <a:spcPct val="115000"/>
+              </a:lnSpc>
+            </a:pPr>
+            <a:r>
+              <a:rPr sz="2025" b="0">
+                <a:solidFill>
+                  <a:srgbClr val="E6EAF2"/>
+                </a:solidFill>
+                <a:latin typeface="D2Coding"/>
+                <a:ea typeface="D2Coding"/>
+                <a:cs typeface="D2Coding"/>
+              </a:rPr>
+              <a:t># … SparkSession 에 s3a · Iceberg(lake) 설정을 코드로</a:t>
+            </a:r>
+          </a:p>
+          <a:p>
+            <a:pPr algn="l">
+              <a:lnSpc>
+                <a:spcPct val="115000"/>
+              </a:lnSpc>
+            </a:pPr>
+            <a:r>
+              <a:rPr sz="2025" b="0">
+                <a:solidFill>
+                  <a:srgbClr val="E6EAF2"/>
+                </a:solidFill>
+                <a:latin typeface="D2Coding"/>
+                <a:ea typeface="D2Coding"/>
+                <a:cs typeface="D2Coding"/>
+              </a:rPr>
+              <a:t>spark.sparkContext.setLogLevel("WARN")   # 결과 표가 끝에 보이게</a:t>
+            </a:r>
+          </a:p>
+          <a:p>
+            <a:pPr algn="l">
+              <a:lnSpc>
+                <a:spcPct val="115000"/>
+              </a:lnSpc>
+            </a:pPr>
+            <a:r>
+              <a:rPr sz="2025" b="0">
+                <a:solidFill>
+                  <a:srgbClr val="E6EAF2"/>
+                </a:solidFill>
+                <a:latin typeface="D2Coding"/>
+                <a:ea typeface="D2Coding"/>
+                <a:cs typeface="D2Coding"/>
+              </a:rPr>
+              <a:t># … orders + products → amount → groupBy(order_date)</a:t>
+            </a:r>
+          </a:p>
+          <a:p>
+            <a:pPr algn="l">
+              <a:lnSpc>
+                <a:spcPct val="115000"/>
+              </a:lnSpc>
+            </a:pPr>
+            <a:r>
+              <a:rPr sz="2025" b="0">
+                <a:solidFill>
+                  <a:srgbClr val="E6EAF2"/>
+                </a:solidFill>
+                <a:latin typeface="D2Coding"/>
+                <a:ea typeface="D2Coding"/>
+                <a:cs typeface="D2Coding"/>
+              </a:rPr>
+              <a:t>mart.coalesce(1).writeTo("lake.db.daily_sales_mart").createOrReplace()</a:t>
+            </a:r>
+          </a:p>
+          <a:p>
+            <a:pPr algn="l">
+              <a:lnSpc>
+                <a:spcPct val="115000"/>
+              </a:lnSpc>
+            </a:pPr>
+            <a:r>
+              <a:rPr sz="2025" b="0">
+                <a:solidFill>
+                  <a:srgbClr val="E6EAF2"/>
+                </a:solidFill>
+                <a:latin typeface="D2Coding"/>
+                <a:ea typeface="D2Coding"/>
+                <a:cs typeface="D2Coding"/>
+              </a:rPr>
+              <a:t>EOF</a:t>
+            </a:r>
+          </a:p>
+          <a:p>
+            <a:pPr algn="l">
+              <a:lnSpc>
+                <a:spcPct val="115000"/>
+              </a:lnSpc>
+            </a:pPr>
+            <a:r>
+              <a:rPr sz="2025" b="0">
+                <a:solidFill>
+                  <a:srgbClr val="E6EAF2"/>
+                </a:solidFill>
+                <a:latin typeface="D2Coding"/>
+                <a:ea typeface="D2Coding"/>
+                <a:cs typeface="D2Coding"/>
+              </a:rPr>
+              <a:t>docker compose cp mart.py spark-master:/tmp/mart.py</a:t>
+            </a:r>
+          </a:p>
+          <a:p>
+            <a:pPr algn="l">
+              <a:lnSpc>
+                <a:spcPct val="115000"/>
+              </a:lnSpc>
+            </a:pPr>
+            <a:r>
+              <a:rPr sz="2025" b="0">
+                <a:solidFill>
+                  <a:srgbClr val="E6EAF2"/>
+                </a:solidFill>
+                <a:latin typeface="D2Coding"/>
+                <a:ea typeface="D2Coding"/>
+                <a:cs typeface="D2Coding"/>
+              </a:rPr>
+              <a:t>docker compose exec spark-master /opt/spark/bin/spark-submit \</a:t>
+            </a:r>
+          </a:p>
+          <a:p>
+            <a:pPr algn="l">
+              <a:lnSpc>
+                <a:spcPct val="115000"/>
+              </a:lnSpc>
+            </a:pPr>
+            <a:r>
+              <a:rPr sz="2025" b="0">
+                <a:solidFill>
+                  <a:srgbClr val="E6EAF2"/>
+                </a:solidFill>
+                <a:latin typeface="D2Coding"/>
+                <a:ea typeface="D2Coding"/>
+                <a:cs typeface="D2Coding"/>
+              </a:rPr>
+              <a:t>  --master spark://spark-master:7077 \</a:t>
+            </a:r>
+          </a:p>
+          <a:p>
+            <a:pPr algn="l">
+              <a:lnSpc>
+                <a:spcPct val="115000"/>
+              </a:lnSpc>
+            </a:pPr>
+            <a:r>
+              <a:rPr sz="2025" b="0">
+                <a:solidFill>
+                  <a:srgbClr val="E6EAF2"/>
+                </a:solidFill>
+                <a:latin typeface="D2Coding"/>
+                <a:ea typeface="D2Coding"/>
+                <a:cs typeface="D2Coding"/>
+              </a:rPr>
+              <a:t>  --conf spark.jars.ivy=/tmp/.ivy2 \</a:t>
+            </a:r>
+          </a:p>
+          <a:p>
+            <a:pPr algn="l">
+              <a:lnSpc>
+                <a:spcPct val="115000"/>
+              </a:lnSpc>
+            </a:pPr>
+            <a:r>
+              <a:rPr sz="2025" b="0">
+                <a:solidFill>
+                  <a:srgbClr val="E6EAF2"/>
+                </a:solidFill>
+                <a:latin typeface="D2Coding"/>
+                <a:ea typeface="D2Coding"/>
+                <a:cs typeface="D2Coding"/>
+              </a:rPr>
+              <a:t>  --packages org.apache.hadoop:hadoop-aws:3.3.4,org.apache.iceberg:iceberg-spark-runtime-3.5_2.12:1.5.2 \</a:t>
+            </a:r>
+          </a:p>
+          <a:p>
+            <a:pPr algn="l">
+              <a:lnSpc>
+                <a:spcPct val="115000"/>
+              </a:lnSpc>
+            </a:pPr>
+            <a:r>
+              <a:rPr sz="2025" b="0">
+                <a:solidFill>
+                  <a:srgbClr val="E6EAF2"/>
+                </a:solidFill>
+                <a:latin typeface="D2Coding"/>
+                <a:ea typeface="D2Coding"/>
+                <a:cs typeface="D2Coding"/>
+              </a:rPr>
+              <a:t>  /tmp/mart.py</a:t>
+            </a:r>
+          </a:p>
+        </p:txBody>
+      </p:sp>
+      <p:sp>
+        <p:nvSpPr>
+          <p:cNvPr id="12" name="Rectangle 11"/>
+          <p:cNvSpPr/>
+          <p:nvPr/>
+        </p:nvSpPr>
+        <p:spPr>
+          <a:xfrm>
+            <a:off x="1143000" y="7600950"/>
+            <a:ext cx="38100" cy="323850"/>
+          </a:xfrm>
+          <a:prstGeom prst="rect">
+            <a:avLst/>
+          </a:prstGeom>
+          <a:solidFill>
+            <a:srgbClr val="BFD3F5"/>
+          </a:solidFill>
+          <a:ln>
+            <a:noFill/>
+          </a:ln>
+          <a:effectLst/>
+        </p:spPr>
+        <p:txBody>
+          <a:bodyPr rtlCol="0" anchor="ctr" wrap="square"/>
+          <a:lstStyle/>
+          <a:p>
+            <a:pPr algn="ctr"/>
+          </a:p>
+        </p:txBody>
+      </p:sp>
+      <p:sp>
+        <p:nvSpPr>
+          <p:cNvPr id="13" name="TextBox 12"/>
+          <p:cNvSpPr txBox="1"/>
+          <p:nvPr/>
+        </p:nvSpPr>
+        <p:spPr>
+          <a:xfrm>
+            <a:off x="1314450" y="7600950"/>
+            <a:ext cx="15830550" cy="342900"/>
+          </a:xfrm>
+          <a:prstGeom prst="rect">
+            <a:avLst/>
+          </a:prstGeom>
+          <a:noFill/>
+        </p:spPr>
+        <p:txBody>
+          <a:bodyPr wrap="square" lIns="0" rIns="0" tIns="0" bIns="0" anchor="t">
+            <a:spAutoFit/>
+          </a:bodyPr>
+          <a:lstStyle/>
+          <a:p>
+            <a:pPr algn="l">
               <a:lnSpc>
                 <a:spcPct val="100000"/>
               </a:lnSpc>
             </a:pPr>
             <a:r>
-              <a:rPr sz="1800" b="1">
-                <a:solidFill>
-                  <a:srgbClr val="FFFFFF"/>
+              <a:rPr sz="1725" b="1">
+                <a:solidFill>
+                  <a:srgbClr val="7D7D7D"/>
                 </a:solidFill>
                 <a:latin typeface="Pretendard"/>
                 <a:ea typeface="Pretendard"/>
                 <a:cs typeface="Pretendard"/>
               </a:rPr>
-              <a:t>복사</a:t>
-            </a:r>
-          </a:p>
-        </p:txBody>
-      </p:sp>
-      <p:sp>
-        <p:nvSpPr>
-          <p:cNvPr id="10" name="Rectangle 9"/>
-          <p:cNvSpPr/>
-          <p:nvPr/>
-        </p:nvSpPr>
-        <p:spPr>
-          <a:xfrm>
-            <a:off x="2078581" y="2781300"/>
-            <a:ext cx="15066419" cy="571500"/>
-          </a:xfrm>
-          <a:prstGeom prst="rect">
-            <a:avLst/>
-          </a:prstGeom>
-          <a:solidFill>
-            <a:srgbClr val="FAFBFD"/>
-          </a:solidFill>
-          <a:ln w="9525">
-            <a:solidFill>
-              <a:srgbClr val="DCE1E8"/>
-            </a:solidFill>
-          </a:ln>
-          <a:effectLst/>
-        </p:spPr>
-        <p:txBody>
-          <a:bodyPr rtlCol="0" anchor="ctr" wrap="square"/>
-          <a:lstStyle/>
-          <a:p>
-            <a:pPr algn="ctr"/>
-          </a:p>
-        </p:txBody>
-      </p:sp>
-      <p:sp>
-        <p:nvSpPr>
-          <p:cNvPr id="11" name="TextBox 10"/>
+              <a:t>히어독 전문은 사이트 본문에서 복사 — 셸을 exit() 한 뒤에 붙여 넣으세요</a:t>
+            </a:r>
+          </a:p>
+        </p:txBody>
+      </p:sp>
+      <p:sp>
+        <p:nvSpPr>
+          <p:cNvPr id="14" name="Rectangle 13"/>
+          <p:cNvSpPr/>
+          <p:nvPr/>
+        </p:nvSpPr>
+        <p:spPr>
+          <a:xfrm>
+            <a:off x="1143000" y="8058150"/>
+            <a:ext cx="16002000" cy="9525"/>
+          </a:xfrm>
+          <a:prstGeom prst="rect">
+            <a:avLst/>
+          </a:prstGeom>
+          <a:solidFill>
+            <a:srgbClr val="DCE1E8"/>
+          </a:solidFill>
+          <a:ln>
+            <a:noFill/>
+          </a:ln>
+          <a:effectLst/>
+        </p:spPr>
+        <p:txBody>
+          <a:bodyPr rtlCol="0" anchor="ctr" wrap="square"/>
+          <a:lstStyle/>
+          <a:p>
+            <a:pPr algn="ctr"/>
+          </a:p>
+        </p:txBody>
+      </p:sp>
+      <p:sp>
+        <p:nvSpPr>
+          <p:cNvPr id="15" name="TextBox 14"/>
           <p:cNvSpPr txBox="1"/>
           <p:nvPr/>
         </p:nvSpPr>
         <p:spPr>
           <a:xfrm>
-            <a:off x="2230981" y="2781300"/>
-            <a:ext cx="14761619" cy="571500"/>
+            <a:off x="1143000" y="8248650"/>
+            <a:ext cx="13335000" cy="323850"/>
           </a:xfrm>
           <a:prstGeom prst="rect">
             <a:avLst/>
@@ -9197,713 +10032,25 @@
           <a:noFill/>
         </p:spPr>
         <p:txBody>
-          <a:bodyPr wrap="square" lIns="0" rIns="0" tIns="0" bIns="0" anchor="ctr">
+          <a:bodyPr wrap="square" lIns="0" rIns="0" tIns="0" bIns="0" anchor="t">
             <a:spAutoFit/>
           </a:bodyPr>
           <a:lstStyle/>
           <a:p>
             <a:pPr algn="l">
               <a:lnSpc>
-                <a:spcPct val="115000"/>
-              </a:lnSpc>
-            </a:pPr>
-            <a:r>
-              <a:rPr sz="1800" b="0">
-                <a:solidFill>
-                  <a:srgbClr val="3D3D3D"/>
+                <a:spcPct val="100000"/>
+              </a:lnSpc>
+            </a:pPr>
+            <a:r>
+              <a:rPr sz="1725" b="0">
+                <a:solidFill>
+                  <a:srgbClr val="7D7D7D"/>
                 </a:solidFill>
                 <a:latin typeface="Pretendard"/>
                 <a:ea typeface="Pretendard"/>
                 <a:cs typeface="Pretendard"/>
               </a:rPr>
-              <a:t>docker compose cp mart.py spark-master:/tmp/mart.py</a:t>
-            </a:r>
-          </a:p>
-        </p:txBody>
-      </p:sp>
-      <p:sp>
-        <p:nvSpPr>
-          <p:cNvPr id="12" name="Rectangle 11"/>
-          <p:cNvSpPr/>
-          <p:nvPr/>
-        </p:nvSpPr>
-        <p:spPr>
-          <a:xfrm>
-            <a:off x="1143000" y="3429000"/>
-            <a:ext cx="935581" cy="571500"/>
-          </a:xfrm>
-          <a:prstGeom prst="rect">
-            <a:avLst/>
-          </a:prstGeom>
-          <a:solidFill>
-            <a:srgbClr val="0D2B5E"/>
-          </a:solidFill>
-          <a:ln>
-            <a:noFill/>
-          </a:ln>
-          <a:effectLst/>
-        </p:spPr>
-        <p:txBody>
-          <a:bodyPr rtlCol="0" anchor="ctr" wrap="square"/>
-          <a:lstStyle/>
-          <a:p>
-            <a:pPr algn="ctr"/>
-          </a:p>
-        </p:txBody>
-      </p:sp>
-      <p:sp>
-        <p:nvSpPr>
-          <p:cNvPr id="13" name="TextBox 12"/>
-          <p:cNvSpPr txBox="1"/>
-          <p:nvPr/>
-        </p:nvSpPr>
-        <p:spPr>
-          <a:xfrm>
-            <a:off x="1143000" y="3429000"/>
-            <a:ext cx="935581" cy="571500"/>
-          </a:xfrm>
-          <a:prstGeom prst="rect">
-            <a:avLst/>
-          </a:prstGeom>
-          <a:noFill/>
-        </p:spPr>
-        <p:txBody>
-          <a:bodyPr wrap="square" lIns="0" rIns="0" tIns="0" bIns="0" anchor="ctr">
-            <a:spAutoFit/>
-          </a:bodyPr>
-          <a:lstStyle/>
-          <a:p>
-            <a:pPr algn="ctr">
-              <a:lnSpc>
-                <a:spcPct val="100000"/>
-              </a:lnSpc>
-            </a:pPr>
-            <a:r>
-              <a:rPr sz="1800" b="1">
-                <a:solidFill>
-                  <a:srgbClr val="FFFFFF"/>
-                </a:solidFill>
-                <a:latin typeface="Pretendard"/>
-                <a:ea typeface="Pretendard"/>
-                <a:cs typeface="Pretendard"/>
-              </a:rPr>
-              <a:t>제출</a:t>
-            </a:r>
-          </a:p>
-        </p:txBody>
-      </p:sp>
-      <p:sp>
-        <p:nvSpPr>
-          <p:cNvPr id="14" name="Rectangle 13"/>
-          <p:cNvSpPr/>
-          <p:nvPr/>
-        </p:nvSpPr>
-        <p:spPr>
-          <a:xfrm>
-            <a:off x="2078581" y="3429000"/>
-            <a:ext cx="15066419" cy="571500"/>
-          </a:xfrm>
-          <a:prstGeom prst="rect">
-            <a:avLst/>
-          </a:prstGeom>
-          <a:solidFill>
-            <a:srgbClr val="FAFBFD"/>
-          </a:solidFill>
-          <a:ln w="9525">
-            <a:solidFill>
-              <a:srgbClr val="DCE1E8"/>
-            </a:solidFill>
-          </a:ln>
-          <a:effectLst/>
-        </p:spPr>
-        <p:txBody>
-          <a:bodyPr rtlCol="0" anchor="ctr" wrap="square"/>
-          <a:lstStyle/>
-          <a:p>
-            <a:pPr algn="ctr"/>
-          </a:p>
-        </p:txBody>
-      </p:sp>
-      <p:sp>
-        <p:nvSpPr>
-          <p:cNvPr id="15" name="TextBox 14"/>
-          <p:cNvSpPr txBox="1"/>
-          <p:nvPr/>
-        </p:nvSpPr>
-        <p:spPr>
-          <a:xfrm>
-            <a:off x="2230981" y="3429000"/>
-            <a:ext cx="14761619" cy="571500"/>
-          </a:xfrm>
-          <a:prstGeom prst="rect">
-            <a:avLst/>
-          </a:prstGeom>
-          <a:noFill/>
-        </p:spPr>
-        <p:txBody>
-          <a:bodyPr wrap="square" lIns="0" rIns="0" tIns="0" bIns="0" anchor="ctr">
-            <a:spAutoFit/>
-          </a:bodyPr>
-          <a:lstStyle/>
-          <a:p>
-            <a:pPr algn="l">
-              <a:lnSpc>
-                <a:spcPct val="115000"/>
-              </a:lnSpc>
-            </a:pPr>
-            <a:r>
-              <a:rPr sz="1800" b="0">
-                <a:solidFill>
-                  <a:srgbClr val="3D3D3D"/>
-                </a:solidFill>
-                <a:latin typeface="Pretendard"/>
-                <a:ea typeface="Pretendard"/>
-                <a:cs typeface="Pretendard"/>
-              </a:rPr>
-              <a:t>docker compose exec spark-master /opt/spark/bin/spark-submit</a:t>
-            </a:r>
-          </a:p>
-        </p:txBody>
-      </p:sp>
-      <p:sp>
-        <p:nvSpPr>
-          <p:cNvPr id="16" name="Rectangle 15"/>
-          <p:cNvSpPr/>
-          <p:nvPr/>
-        </p:nvSpPr>
-        <p:spPr>
-          <a:xfrm>
-            <a:off x="1143000" y="4076700"/>
-            <a:ext cx="935581" cy="571500"/>
-          </a:xfrm>
-          <a:prstGeom prst="rect">
-            <a:avLst/>
-          </a:prstGeom>
-          <a:solidFill>
-            <a:srgbClr val="0D2B5E"/>
-          </a:solidFill>
-          <a:ln>
-            <a:noFill/>
-          </a:ln>
-          <a:effectLst/>
-        </p:spPr>
-        <p:txBody>
-          <a:bodyPr rtlCol="0" anchor="ctr" wrap="square"/>
-          <a:lstStyle/>
-          <a:p>
-            <a:pPr algn="ctr"/>
-          </a:p>
-        </p:txBody>
-      </p:sp>
-      <p:sp>
-        <p:nvSpPr>
-          <p:cNvPr id="17" name="TextBox 16"/>
-          <p:cNvSpPr txBox="1"/>
-          <p:nvPr/>
-        </p:nvSpPr>
-        <p:spPr>
-          <a:xfrm>
-            <a:off x="1143000" y="4076700"/>
-            <a:ext cx="935581" cy="571500"/>
-          </a:xfrm>
-          <a:prstGeom prst="rect">
-            <a:avLst/>
-          </a:prstGeom>
-          <a:noFill/>
-        </p:spPr>
-        <p:txBody>
-          <a:bodyPr wrap="square" lIns="0" rIns="0" tIns="0" bIns="0" anchor="ctr">
-            <a:spAutoFit/>
-          </a:bodyPr>
-          <a:lstStyle/>
-          <a:p>
-            <a:pPr algn="ctr">
-              <a:lnSpc>
-                <a:spcPct val="100000"/>
-              </a:lnSpc>
-            </a:pPr>
-            <a:r>
-              <a:rPr sz="1800" b="1">
-                <a:solidFill>
-                  <a:srgbClr val="FFFFFF"/>
-                </a:solidFill>
-                <a:latin typeface="Pretendard"/>
-                <a:ea typeface="Pretendard"/>
-                <a:cs typeface="Pretendard"/>
-              </a:rPr>
-              <a:t>마스터</a:t>
-            </a:r>
-          </a:p>
-        </p:txBody>
-      </p:sp>
-      <p:sp>
-        <p:nvSpPr>
-          <p:cNvPr id="18" name="Rectangle 17"/>
-          <p:cNvSpPr/>
-          <p:nvPr/>
-        </p:nvSpPr>
-        <p:spPr>
-          <a:xfrm>
-            <a:off x="2078581" y="4076700"/>
-            <a:ext cx="15066419" cy="571500"/>
-          </a:xfrm>
-          <a:prstGeom prst="rect">
-            <a:avLst/>
-          </a:prstGeom>
-          <a:solidFill>
-            <a:srgbClr val="FAFBFD"/>
-          </a:solidFill>
-          <a:ln w="9525">
-            <a:solidFill>
-              <a:srgbClr val="DCE1E8"/>
-            </a:solidFill>
-          </a:ln>
-          <a:effectLst/>
-        </p:spPr>
-        <p:txBody>
-          <a:bodyPr rtlCol="0" anchor="ctr" wrap="square"/>
-          <a:lstStyle/>
-          <a:p>
-            <a:pPr algn="ctr"/>
-          </a:p>
-        </p:txBody>
-      </p:sp>
-      <p:sp>
-        <p:nvSpPr>
-          <p:cNvPr id="19" name="TextBox 18"/>
-          <p:cNvSpPr txBox="1"/>
-          <p:nvPr/>
-        </p:nvSpPr>
-        <p:spPr>
-          <a:xfrm>
-            <a:off x="2230981" y="4076700"/>
-            <a:ext cx="14761619" cy="571500"/>
-          </a:xfrm>
-          <a:prstGeom prst="rect">
-            <a:avLst/>
-          </a:prstGeom>
-          <a:noFill/>
-        </p:spPr>
-        <p:txBody>
-          <a:bodyPr wrap="square" lIns="0" rIns="0" tIns="0" bIns="0" anchor="ctr">
-            <a:spAutoFit/>
-          </a:bodyPr>
-          <a:lstStyle/>
-          <a:p>
-            <a:pPr algn="l">
-              <a:lnSpc>
-                <a:spcPct val="115000"/>
-              </a:lnSpc>
-            </a:pPr>
-            <a:r>
-              <a:rPr sz="1800" b="0">
-                <a:solidFill>
-                  <a:srgbClr val="3D3D3D"/>
-                </a:solidFill>
-                <a:latin typeface="Pretendard"/>
-                <a:ea typeface="Pretendard"/>
-                <a:cs typeface="Pretendard"/>
-              </a:rPr>
-              <a:t>--master spark://spark-master:7077</a:t>
-            </a:r>
-          </a:p>
-        </p:txBody>
-      </p:sp>
-      <p:sp>
-        <p:nvSpPr>
-          <p:cNvPr id="20" name="Rectangle 19"/>
-          <p:cNvSpPr/>
-          <p:nvPr/>
-        </p:nvSpPr>
-        <p:spPr>
-          <a:xfrm>
-            <a:off x="1143000" y="4724400"/>
-            <a:ext cx="935581" cy="571500"/>
-          </a:xfrm>
-          <a:prstGeom prst="rect">
-            <a:avLst/>
-          </a:prstGeom>
-          <a:solidFill>
-            <a:srgbClr val="0D2B5E"/>
-          </a:solidFill>
-          <a:ln>
-            <a:noFill/>
-          </a:ln>
-          <a:effectLst/>
-        </p:spPr>
-        <p:txBody>
-          <a:bodyPr rtlCol="0" anchor="ctr" wrap="square"/>
-          <a:lstStyle/>
-          <a:p>
-            <a:pPr algn="ctr"/>
-          </a:p>
-        </p:txBody>
-      </p:sp>
-      <p:sp>
-        <p:nvSpPr>
-          <p:cNvPr id="21" name="TextBox 20"/>
-          <p:cNvSpPr txBox="1"/>
-          <p:nvPr/>
-        </p:nvSpPr>
-        <p:spPr>
-          <a:xfrm>
-            <a:off x="1143000" y="4724400"/>
-            <a:ext cx="935581" cy="571500"/>
-          </a:xfrm>
-          <a:prstGeom prst="rect">
-            <a:avLst/>
-          </a:prstGeom>
-          <a:noFill/>
-        </p:spPr>
-        <p:txBody>
-          <a:bodyPr wrap="square" lIns="0" rIns="0" tIns="0" bIns="0" anchor="ctr">
-            <a:spAutoFit/>
-          </a:bodyPr>
-          <a:lstStyle/>
-          <a:p>
-            <a:pPr algn="ctr">
-              <a:lnSpc>
-                <a:spcPct val="100000"/>
-              </a:lnSpc>
-            </a:pPr>
-            <a:r>
-              <a:rPr sz="1800" b="1">
-                <a:solidFill>
-                  <a:srgbClr val="FFFFFF"/>
-                </a:solidFill>
-                <a:latin typeface="Pretendard"/>
-                <a:ea typeface="Pretendard"/>
-                <a:cs typeface="Pretendard"/>
-              </a:rPr>
-              <a:t>패키지</a:t>
-            </a:r>
-          </a:p>
-        </p:txBody>
-      </p:sp>
-      <p:sp>
-        <p:nvSpPr>
-          <p:cNvPr id="22" name="Rectangle 21"/>
-          <p:cNvSpPr/>
-          <p:nvPr/>
-        </p:nvSpPr>
-        <p:spPr>
-          <a:xfrm>
-            <a:off x="2078581" y="4724400"/>
-            <a:ext cx="15066419" cy="571500"/>
-          </a:xfrm>
-          <a:prstGeom prst="rect">
-            <a:avLst/>
-          </a:prstGeom>
-          <a:solidFill>
-            <a:srgbClr val="FAFBFD"/>
-          </a:solidFill>
-          <a:ln w="9525">
-            <a:solidFill>
-              <a:srgbClr val="DCE1E8"/>
-            </a:solidFill>
-          </a:ln>
-          <a:effectLst/>
-        </p:spPr>
-        <p:txBody>
-          <a:bodyPr rtlCol="0" anchor="ctr" wrap="square"/>
-          <a:lstStyle/>
-          <a:p>
-            <a:pPr algn="ctr"/>
-          </a:p>
-        </p:txBody>
-      </p:sp>
-      <p:sp>
-        <p:nvSpPr>
-          <p:cNvPr id="23" name="TextBox 22"/>
-          <p:cNvSpPr txBox="1"/>
-          <p:nvPr/>
-        </p:nvSpPr>
-        <p:spPr>
-          <a:xfrm>
-            <a:off x="2230981" y="4724400"/>
-            <a:ext cx="14761619" cy="571500"/>
-          </a:xfrm>
-          <a:prstGeom prst="rect">
-            <a:avLst/>
-          </a:prstGeom>
-          <a:noFill/>
-        </p:spPr>
-        <p:txBody>
-          <a:bodyPr wrap="square" lIns="0" rIns="0" tIns="0" bIns="0" anchor="ctr">
-            <a:spAutoFit/>
-          </a:bodyPr>
-          <a:lstStyle/>
-          <a:p>
-            <a:pPr algn="l">
-              <a:lnSpc>
-                <a:spcPct val="115000"/>
-              </a:lnSpc>
-            </a:pPr>
-            <a:r>
-              <a:rPr sz="1800" b="0">
-                <a:solidFill>
-                  <a:srgbClr val="3D3D3D"/>
-                </a:solidFill>
-                <a:latin typeface="Pretendard"/>
-                <a:ea typeface="Pretendard"/>
-                <a:cs typeface="Pretendard"/>
-              </a:rPr>
-              <a:t>--packages hadoop-aws:3.3.4, iceberg-spark-runtime-3.5_2.12:1.5.2</a:t>
-            </a:r>
-          </a:p>
-        </p:txBody>
-      </p:sp>
-      <p:sp>
-        <p:nvSpPr>
-          <p:cNvPr id="24" name="Rectangle 23"/>
-          <p:cNvSpPr/>
-          <p:nvPr/>
-        </p:nvSpPr>
-        <p:spPr>
-          <a:xfrm>
-            <a:off x="1143000" y="5372100"/>
-            <a:ext cx="935581" cy="571500"/>
-          </a:xfrm>
-          <a:prstGeom prst="rect">
-            <a:avLst/>
-          </a:prstGeom>
-          <a:solidFill>
-            <a:srgbClr val="0D2B5E"/>
-          </a:solidFill>
-          <a:ln>
-            <a:noFill/>
-          </a:ln>
-          <a:effectLst/>
-        </p:spPr>
-        <p:txBody>
-          <a:bodyPr rtlCol="0" anchor="ctr" wrap="square"/>
-          <a:lstStyle/>
-          <a:p>
-            <a:pPr algn="ctr"/>
-          </a:p>
-        </p:txBody>
-      </p:sp>
-      <p:sp>
-        <p:nvSpPr>
-          <p:cNvPr id="25" name="TextBox 24"/>
-          <p:cNvSpPr txBox="1"/>
-          <p:nvPr/>
-        </p:nvSpPr>
-        <p:spPr>
-          <a:xfrm>
-            <a:off x="1143000" y="5372100"/>
-            <a:ext cx="935581" cy="571500"/>
-          </a:xfrm>
-          <a:prstGeom prst="rect">
-            <a:avLst/>
-          </a:prstGeom>
-          <a:noFill/>
-        </p:spPr>
-        <p:txBody>
-          <a:bodyPr wrap="square" lIns="0" rIns="0" tIns="0" bIns="0" anchor="ctr">
-            <a:spAutoFit/>
-          </a:bodyPr>
-          <a:lstStyle/>
-          <a:p>
-            <a:pPr algn="ctr">
-              <a:lnSpc>
-                <a:spcPct val="100000"/>
-              </a:lnSpc>
-            </a:pPr>
-            <a:r>
-              <a:rPr sz="1800" b="1">
-                <a:solidFill>
-                  <a:srgbClr val="FFFFFF"/>
-                </a:solidFill>
-                <a:latin typeface="Pretendard"/>
-                <a:ea typeface="Pretendard"/>
-                <a:cs typeface="Pretendard"/>
-              </a:rPr>
-              <a:t>재실행</a:t>
-            </a:r>
-          </a:p>
-        </p:txBody>
-      </p:sp>
-      <p:sp>
-        <p:nvSpPr>
-          <p:cNvPr id="26" name="Rectangle 25"/>
-          <p:cNvSpPr/>
-          <p:nvPr/>
-        </p:nvSpPr>
-        <p:spPr>
-          <a:xfrm>
-            <a:off x="2078581" y="5372100"/>
-            <a:ext cx="15066419" cy="571500"/>
-          </a:xfrm>
-          <a:prstGeom prst="rect">
-            <a:avLst/>
-          </a:prstGeom>
-          <a:solidFill>
-            <a:srgbClr val="FAFBFD"/>
-          </a:solidFill>
-          <a:ln w="9525">
-            <a:solidFill>
-              <a:srgbClr val="DCE1E8"/>
-            </a:solidFill>
-          </a:ln>
-          <a:effectLst/>
-        </p:spPr>
-        <p:txBody>
-          <a:bodyPr rtlCol="0" anchor="ctr" wrap="square"/>
-          <a:lstStyle/>
-          <a:p>
-            <a:pPr algn="ctr"/>
-          </a:p>
-        </p:txBody>
-      </p:sp>
-      <p:sp>
-        <p:nvSpPr>
-          <p:cNvPr id="27" name="TextBox 26"/>
-          <p:cNvSpPr txBox="1"/>
-          <p:nvPr/>
-        </p:nvSpPr>
-        <p:spPr>
-          <a:xfrm>
-            <a:off x="2230981" y="5372100"/>
-            <a:ext cx="14761619" cy="571500"/>
-          </a:xfrm>
-          <a:prstGeom prst="rect">
-            <a:avLst/>
-          </a:prstGeom>
-          <a:noFill/>
-        </p:spPr>
-        <p:txBody>
-          <a:bodyPr wrap="square" lIns="0" rIns="0" tIns="0" bIns="0" anchor="ctr">
-            <a:spAutoFit/>
-          </a:bodyPr>
-          <a:lstStyle/>
-          <a:p>
-            <a:pPr algn="l">
-              <a:lnSpc>
-                <a:spcPct val="115000"/>
-              </a:lnSpc>
-            </a:pPr>
-            <a:r>
-              <a:rPr sz="1800" b="0">
-                <a:solidFill>
-                  <a:srgbClr val="3D3D3D"/>
-                </a:solidFill>
-                <a:latin typeface="Pretendard"/>
-                <a:ea typeface="Pretendard"/>
-                <a:cs typeface="Pretendard"/>
-              </a:rPr>
-              <a:t>… /tmp/mart.py 2&gt;&amp;1 | tail -n 12   # 같은 3행</a:t>
-            </a:r>
-          </a:p>
-        </p:txBody>
-      </p:sp>
-      <p:sp>
-        <p:nvSpPr>
-          <p:cNvPr id="28" name="TextBox 27"/>
-          <p:cNvSpPr txBox="1"/>
-          <p:nvPr/>
-        </p:nvSpPr>
-        <p:spPr>
-          <a:xfrm>
-            <a:off x="1143000" y="7620000"/>
-            <a:ext cx="16002000" cy="342900"/>
-          </a:xfrm>
-          <a:prstGeom prst="rect">
-            <a:avLst/>
-          </a:prstGeom>
-          <a:noFill/>
-        </p:spPr>
-        <p:txBody>
-          <a:bodyPr wrap="square" lIns="0" rIns="0" tIns="0" bIns="0" anchor="t">
-            <a:spAutoFit/>
-          </a:bodyPr>
-          <a:lstStyle/>
-          <a:p>
-            <a:pPr algn="l">
-              <a:lnSpc>
-                <a:spcPct val="100000"/>
-              </a:lnSpc>
-            </a:pPr>
-            <a:r>
-              <a:rPr sz="1875" b="1">
-                <a:solidFill>
-                  <a:srgbClr val="7D7D7D"/>
-                </a:solidFill>
-                <a:latin typeface="Pretendard"/>
-                <a:ea typeface="Pretendard"/>
-                <a:cs typeface="Pretendard"/>
-              </a:rPr>
-              <a:t>로그 끝에 날짜별 3행(08-24·25·26) — MinIO 의 daily_sales_mart/data/ 에 Parquet 1개면 coalesce(1) 효과</a:t>
-            </a:r>
-          </a:p>
-        </p:txBody>
-      </p:sp>
-      <p:sp>
-        <p:nvSpPr>
-          <p:cNvPr id="29" name="Rectangle 28"/>
-          <p:cNvSpPr/>
-          <p:nvPr/>
-        </p:nvSpPr>
-        <p:spPr>
-          <a:xfrm>
-            <a:off x="1143000" y="8058150"/>
-            <a:ext cx="16002000" cy="9525"/>
-          </a:xfrm>
-          <a:prstGeom prst="rect">
-            <a:avLst/>
-          </a:prstGeom>
-          <a:solidFill>
-            <a:srgbClr val="DCE1E8"/>
-          </a:solidFill>
-          <a:ln>
-            <a:noFill/>
-          </a:ln>
-          <a:effectLst/>
-        </p:spPr>
-        <p:txBody>
-          <a:bodyPr rtlCol="0" anchor="ctr" wrap="square"/>
-          <a:lstStyle/>
-          <a:p>
-            <a:pPr algn="ctr"/>
-          </a:p>
-        </p:txBody>
-      </p:sp>
-      <p:sp>
-        <p:nvSpPr>
-          <p:cNvPr id="30" name="TextBox 29"/>
-          <p:cNvSpPr txBox="1"/>
-          <p:nvPr/>
-        </p:nvSpPr>
-        <p:spPr>
-          <a:xfrm>
-            <a:off x="1143000" y="8248650"/>
-            <a:ext cx="13335000" cy="323850"/>
-          </a:xfrm>
-          <a:prstGeom prst="rect">
-            <a:avLst/>
-          </a:prstGeom>
-          <a:noFill/>
-        </p:spPr>
-        <p:txBody>
-          <a:bodyPr wrap="square" lIns="0" rIns="0" tIns="0" bIns="0" anchor="t">
-            <a:spAutoFit/>
-          </a:bodyPr>
-          <a:lstStyle/>
-          <a:p>
-            <a:pPr algn="l">
-              <a:lnSpc>
-                <a:spcPct val="100000"/>
-              </a:lnSpc>
-            </a:pPr>
-            <a:r>
-              <a:rPr sz="1725" b="0">
-                <a:solidFill>
-                  <a:srgbClr val="7D7D7D"/>
-                </a:solidFill>
-                <a:latin typeface="Pretendard"/>
-                <a:ea typeface="Pretendard"/>
-                <a:cs typeface="Pretendard"/>
-              </a:rPr>
               <a:t>데이터 엔지니어링 &amp; RAG 파이프라인 160H · 5-5 · 실습 1H</a:t>
             </a:r>
           </a:p>
@@ -9911,7 +10058,7 @@
       </p:sp>
       <p:sp>
         <p:nvSpPr>
-          <p:cNvPr id="31" name="TextBox 30"/>
+          <p:cNvPr id="16" name="TextBox 15"/>
           <p:cNvSpPr txBox="1"/>
           <p:nvPr/>
         </p:nvSpPr>
@@ -9970,7 +10117,7 @@
       <p:grpSpPr/>
       <p:sp>
         <p:nvSpPr>
-          <p:cNvPr id="2" name="Oval 1"/>
+          <p:cNvPr id="2" name="deckgen:decor"/>
           <p:cNvSpPr/>
           <p:nvPr/>
         </p:nvSpPr>
@@ -10000,7 +10147,7 @@
       </p:sp>
       <p:sp>
         <p:nvSpPr>
-          <p:cNvPr id="3" name="Oval 2"/>
+          <p:cNvPr id="3" name="deckgen:decor"/>
           <p:cNvSpPr/>
           <p:nvPr/>
         </p:nvSpPr>
@@ -10030,7 +10177,7 @@
       </p:sp>
       <p:sp>
         <p:nvSpPr>
-          <p:cNvPr id="4" name="Oval 3"/>
+          <p:cNvPr id="4" name="deckgen:decor"/>
           <p:cNvSpPr/>
           <p:nvPr/>
         </p:nvSpPr>
@@ -10094,7 +10241,7 @@
                 <a:ea typeface="Pretendard"/>
                 <a:cs typeface="Pretendard"/>
               </a:rPr>
-              <a:t>2단계</a:t>
+              <a:t>1·2단계</a:t>
             </a:r>
           </a:p>
         </p:txBody>
@@ -10135,7 +10282,7 @@
                 <a:ea typeface="Pretendard"/>
                 <a:cs typeface="Pretendard"/>
               </a:rPr>
-              <a:t>멱등 — 전체 교체 vs 증분 병합</a:t>
+              <a:t>첫 실행과 다시 실행 — 같은 3행</a:t>
             </a:r>
           </a:p>
         </p:txBody>
@@ -10206,7 +10353,7 @@
                 <a:ea typeface="Pretendard"/>
                 <a:cs typeface="Pretendard"/>
               </a:rPr>
-              <a:t>createOrReplace — 전체 교체</a:t>
+              <a:t>첫 실행</a:t>
             </a:r>
           </a:p>
         </p:txBody>
@@ -10247,7 +10394,7 @@
                 <a:ea typeface="Pretendard"/>
                 <a:cs typeface="Pretendard"/>
               </a:rPr>
-              <a:t>몇 번을 돌려도 같은 3행이 나온다</a:t>
+              <a:t>version hint WARN 스택 뒤에 표 · data/ 1개</a:t>
             </a:r>
           </a:p>
         </p:txBody>
@@ -10288,20 +10435,20 @@
       </p:sp>
       <p:sp>
         <p:nvSpPr>
-          <p:cNvPr id="11" name="Oval 10"/>
-          <p:cNvSpPr/>
-          <p:nvPr/>
-        </p:nvSpPr>
-        <p:spPr>
-          <a:xfrm>
-            <a:off x="1447800" y="5016817"/>
-            <a:ext cx="97155" cy="97155"/>
-          </a:xfrm>
-          <a:prstGeom prst="ellipse">
-            <a:avLst/>
-          </a:prstGeom>
-          <a:solidFill>
-            <a:srgbClr val="1E5BC6"/>
+          <p:cNvPr id="11" name="Rectangle 10"/>
+          <p:cNvSpPr/>
+          <p:nvPr/>
+        </p:nvSpPr>
+        <p:spPr>
+          <a:xfrm>
+            <a:off x="1390650" y="4838700"/>
+            <a:ext cx="2180303" cy="501967"/>
+          </a:xfrm>
+          <a:prstGeom prst="rect">
+            <a:avLst/>
+          </a:prstGeom>
+          <a:solidFill>
+            <a:srgbClr val="0D2B5E"/>
           </a:solidFill>
           <a:ln>
             <a:noFill/>
@@ -10324,8 +10471,8 @@
         </p:nvSpPr>
         <p:spPr>
           <a:xfrm>
-            <a:off x="1633538" y="4838700"/>
-            <a:ext cx="6634162" cy="453390"/>
+            <a:off x="1390650" y="4838700"/>
+            <a:ext cx="2180303" cy="501967"/>
           </a:xfrm>
           <a:prstGeom prst="rect">
             <a:avLst/>
@@ -10338,37 +10485,37 @@
           </a:bodyPr>
           <a:lstStyle/>
           <a:p>
-            <a:pPr algn="l">
-              <a:lnSpc>
-                <a:spcPct val="120000"/>
-              </a:lnSpc>
-            </a:pPr>
-            <a:r>
-              <a:rPr sz="1575" b="0">
-                <a:solidFill>
-                  <a:srgbClr val="3D3D3D"/>
+            <a:pPr algn="ctr">
+              <a:lnSpc>
+                <a:spcPct val="100000"/>
+              </a:lnSpc>
+            </a:pPr>
+            <a:r>
+              <a:rPr sz="1650" b="1">
+                <a:solidFill>
+                  <a:srgbClr val="FFFFFF"/>
                 </a:solidFill>
                 <a:latin typeface="Pretendard"/>
                 <a:ea typeface="Pretendard"/>
                 <a:cs typeface="Pretendard"/>
               </a:rPr>
-              <a:t>테이블을 통째로 바꿔 쓴다</a:t>
-            </a:r>
-          </a:p>
-        </p:txBody>
-      </p:sp>
-      <p:sp>
-        <p:nvSpPr>
-          <p:cNvPr id="13" name="Oval 12"/>
-          <p:cNvSpPr/>
-          <p:nvPr/>
-        </p:nvSpPr>
-        <p:spPr>
-          <a:xfrm>
-            <a:off x="1447800" y="5527358"/>
-            <a:ext cx="97155" cy="97155"/>
-          </a:xfrm>
-          <a:prstGeom prst="ellipse">
+              <a:t>order_date</a:t>
+            </a:r>
+          </a:p>
+        </p:txBody>
+      </p:sp>
+      <p:sp>
+        <p:nvSpPr>
+          <p:cNvPr id="13" name="Rectangle 12"/>
+          <p:cNvSpPr/>
+          <p:nvPr/>
+        </p:nvSpPr>
+        <p:spPr>
+          <a:xfrm>
+            <a:off x="3609053" y="4838700"/>
+            <a:ext cx="2623984" cy="501967"/>
+          </a:xfrm>
+          <a:prstGeom prst="rect">
             <a:avLst/>
           </a:prstGeom>
           <a:solidFill>
@@ -10395,8 +10542,8 @@
         </p:nvSpPr>
         <p:spPr>
           <a:xfrm>
-            <a:off x="1633538" y="5349240"/>
-            <a:ext cx="6634162" cy="453390"/>
+            <a:off x="3609053" y="4838700"/>
+            <a:ext cx="2623984" cy="501967"/>
           </a:xfrm>
           <a:prstGeom prst="rect">
             <a:avLst/>
@@ -10409,37 +10556,37 @@
           </a:bodyPr>
           <a:lstStyle/>
           <a:p>
-            <a:pPr algn="l">
-              <a:lnSpc>
-                <a:spcPct val="120000"/>
-              </a:lnSpc>
-            </a:pPr>
-            <a:r>
-              <a:rPr sz="1575" b="0">
-                <a:solidFill>
-                  <a:srgbClr val="3D3D3D"/>
+            <a:pPr algn="ctr">
+              <a:lnSpc>
+                <a:spcPct val="100000"/>
+              </a:lnSpc>
+            </a:pPr>
+            <a:r>
+              <a:rPr sz="1650" b="1">
+                <a:solidFill>
+                  <a:srgbClr val="FFFFFF"/>
                 </a:solidFill>
                 <a:latin typeface="Pretendard"/>
                 <a:ea typeface="Pretendard"/>
                 <a:cs typeface="Pretendard"/>
               </a:rPr>
-              <a:t>매번 다시 계산해도 되는 작은 집계</a:t>
-            </a:r>
-          </a:p>
-        </p:txBody>
-      </p:sp>
-      <p:sp>
-        <p:nvSpPr>
-          <p:cNvPr id="15" name="Oval 14"/>
-          <p:cNvSpPr/>
-          <p:nvPr/>
-        </p:nvSpPr>
-        <p:spPr>
-          <a:xfrm>
-            <a:off x="1447800" y="6037898"/>
-            <a:ext cx="97155" cy="97155"/>
-          </a:xfrm>
-          <a:prstGeom prst="ellipse">
+              <a:t>daily_amount</a:t>
+            </a:r>
+          </a:p>
+        </p:txBody>
+      </p:sp>
+      <p:sp>
+        <p:nvSpPr>
+          <p:cNvPr id="15" name="Rectangle 14"/>
+          <p:cNvSpPr/>
+          <p:nvPr/>
+        </p:nvSpPr>
+        <p:spPr>
+          <a:xfrm>
+            <a:off x="6271137" y="4838700"/>
+            <a:ext cx="1996563" cy="501967"/>
+          </a:xfrm>
+          <a:prstGeom prst="rect">
             <a:avLst/>
           </a:prstGeom>
           <a:solidFill>
@@ -10466,8 +10613,8 @@
         </p:nvSpPr>
         <p:spPr>
           <a:xfrm>
-            <a:off x="1633538" y="5859780"/>
-            <a:ext cx="6634162" cy="453390"/>
+            <a:off x="6271137" y="4838700"/>
+            <a:ext cx="1996563" cy="501967"/>
           </a:xfrm>
           <a:prstGeom prst="rect">
             <a:avLst/>
@@ -10480,28 +10627,703 @@
           </a:bodyPr>
           <a:lstStyle/>
           <a:p>
-            <a:pPr algn="l">
-              <a:lnSpc>
-                <a:spcPct val="120000"/>
-              </a:lnSpc>
-            </a:pPr>
-            <a:r>
-              <a:rPr sz="1575" b="0">
-                <a:solidFill>
-                  <a:srgbClr val="3D3D3D"/>
+            <a:pPr algn="ctr">
+              <a:lnSpc>
+                <a:spcPct val="100000"/>
+              </a:lnSpc>
+            </a:pPr>
+            <a:r>
+              <a:rPr sz="1650" b="1">
+                <a:solidFill>
+                  <a:srgbClr val="FFFFFF"/>
                 </a:solidFill>
                 <a:latin typeface="Pretendard"/>
                 <a:ea typeface="Pretendard"/>
                 <a:cs typeface="Pretendard"/>
               </a:rPr>
-              <a:t>마트에는 이쪽이 단순하다</a:t>
-            </a:r>
-          </a:p>
-        </p:txBody>
-      </p:sp>
-      <p:sp>
-        <p:nvSpPr>
-          <p:cNvPr id="17" name="TextBox 16"/>
+              <a:t>order_cnt</a:t>
+            </a:r>
+          </a:p>
+        </p:txBody>
+      </p:sp>
+      <p:sp>
+        <p:nvSpPr>
+          <p:cNvPr id="17" name="Rounded Rectangle 16"/>
+          <p:cNvSpPr/>
+          <p:nvPr/>
+        </p:nvSpPr>
+        <p:spPr>
+          <a:xfrm>
+            <a:off x="1390650" y="5405438"/>
+            <a:ext cx="2180303" cy="550545"/>
+          </a:xfrm>
+          <a:prstGeom prst="roundRect">
+            <a:avLst>
+              <a:gd name="adj" fmla="val 6920"/>
+            </a:avLst>
+          </a:prstGeom>
+          <a:solidFill>
+            <a:srgbClr val="EDF3FD"/>
+          </a:solidFill>
+          <a:ln w="9525">
+            <a:solidFill>
+              <a:srgbClr val="BFD3F5"/>
+            </a:solidFill>
+          </a:ln>
+          <a:effectLst/>
+        </p:spPr>
+        <p:txBody>
+          <a:bodyPr rtlCol="0" anchor="ctr" wrap="square"/>
+          <a:lstStyle/>
+          <a:p>
+            <a:pPr algn="ctr"/>
+          </a:p>
+        </p:txBody>
+      </p:sp>
+      <p:sp>
+        <p:nvSpPr>
+          <p:cNvPr id="18" name="TextBox 17"/>
+          <p:cNvSpPr txBox="1"/>
+          <p:nvPr/>
+        </p:nvSpPr>
+        <p:spPr>
+          <a:xfrm>
+            <a:off x="1485900" y="5405438"/>
+            <a:ext cx="1989803" cy="550545"/>
+          </a:xfrm>
+          <a:prstGeom prst="rect">
+            <a:avLst/>
+          </a:prstGeom>
+          <a:noFill/>
+        </p:spPr>
+        <p:txBody>
+          <a:bodyPr wrap="square" lIns="0" rIns="0" tIns="0" bIns="0" anchor="ctr">
+            <a:spAutoFit/>
+          </a:bodyPr>
+          <a:lstStyle/>
+          <a:p>
+            <a:pPr algn="l">
+              <a:lnSpc>
+                <a:spcPct val="115000"/>
+              </a:lnSpc>
+            </a:pPr>
+            <a:r>
+              <a:rPr sz="1575" b="1">
+                <a:solidFill>
+                  <a:srgbClr val="0D2B5E"/>
+                </a:solidFill>
+                <a:latin typeface="Pretendard"/>
+                <a:ea typeface="Pretendard"/>
+                <a:cs typeface="Pretendard"/>
+              </a:rPr>
+              <a:t>2026-08-24</a:t>
+            </a:r>
+          </a:p>
+        </p:txBody>
+      </p:sp>
+      <p:sp>
+        <p:nvSpPr>
+          <p:cNvPr id="19" name="Rounded Rectangle 18"/>
+          <p:cNvSpPr/>
+          <p:nvPr/>
+        </p:nvSpPr>
+        <p:spPr>
+          <a:xfrm>
+            <a:off x="3609053" y="5405438"/>
+            <a:ext cx="2623984" cy="550545"/>
+          </a:xfrm>
+          <a:prstGeom prst="roundRect">
+            <a:avLst>
+              <a:gd name="adj" fmla="val 6920"/>
+            </a:avLst>
+          </a:prstGeom>
+          <a:solidFill>
+            <a:srgbClr val="FAFBFD"/>
+          </a:solidFill>
+          <a:ln w="9525">
+            <a:solidFill>
+              <a:srgbClr val="DCE1E8"/>
+            </a:solidFill>
+          </a:ln>
+          <a:effectLst/>
+        </p:spPr>
+        <p:txBody>
+          <a:bodyPr rtlCol="0" anchor="ctr" wrap="square"/>
+          <a:lstStyle/>
+          <a:p>
+            <a:pPr algn="ctr"/>
+          </a:p>
+        </p:txBody>
+      </p:sp>
+      <p:sp>
+        <p:nvSpPr>
+          <p:cNvPr id="20" name="TextBox 19"/>
+          <p:cNvSpPr txBox="1"/>
+          <p:nvPr/>
+        </p:nvSpPr>
+        <p:spPr>
+          <a:xfrm>
+            <a:off x="3704303" y="5405438"/>
+            <a:ext cx="2433484" cy="550545"/>
+          </a:xfrm>
+          <a:prstGeom prst="rect">
+            <a:avLst/>
+          </a:prstGeom>
+          <a:noFill/>
+        </p:spPr>
+        <p:txBody>
+          <a:bodyPr wrap="square" lIns="0" rIns="0" tIns="0" bIns="0" anchor="ctr">
+            <a:spAutoFit/>
+          </a:bodyPr>
+          <a:lstStyle/>
+          <a:p>
+            <a:pPr algn="ctr">
+              <a:lnSpc>
+                <a:spcPct val="115000"/>
+              </a:lnSpc>
+            </a:pPr>
+            <a:r>
+              <a:rPr sz="1575" b="0">
+                <a:solidFill>
+                  <a:srgbClr val="3D3D3D"/>
+                </a:solidFill>
+                <a:latin typeface="Pretendard"/>
+                <a:ea typeface="Pretendard"/>
+                <a:cs typeface="Pretendard"/>
+              </a:rPr>
+              <a:t>113000</a:t>
+            </a:r>
+          </a:p>
+        </p:txBody>
+      </p:sp>
+      <p:sp>
+        <p:nvSpPr>
+          <p:cNvPr id="21" name="Rounded Rectangle 20"/>
+          <p:cNvSpPr/>
+          <p:nvPr/>
+        </p:nvSpPr>
+        <p:spPr>
+          <a:xfrm>
+            <a:off x="6271137" y="5405438"/>
+            <a:ext cx="1996563" cy="550545"/>
+          </a:xfrm>
+          <a:prstGeom prst="roundRect">
+            <a:avLst>
+              <a:gd name="adj" fmla="val 6920"/>
+            </a:avLst>
+          </a:prstGeom>
+          <a:solidFill>
+            <a:srgbClr val="FAFBFD"/>
+          </a:solidFill>
+          <a:ln w="9525">
+            <a:solidFill>
+              <a:srgbClr val="DCE1E8"/>
+            </a:solidFill>
+          </a:ln>
+          <a:effectLst/>
+        </p:spPr>
+        <p:txBody>
+          <a:bodyPr rtlCol="0" anchor="ctr" wrap="square"/>
+          <a:lstStyle/>
+          <a:p>
+            <a:pPr algn="ctr"/>
+          </a:p>
+        </p:txBody>
+      </p:sp>
+      <p:sp>
+        <p:nvSpPr>
+          <p:cNvPr id="22" name="TextBox 21"/>
+          <p:cNvSpPr txBox="1"/>
+          <p:nvPr/>
+        </p:nvSpPr>
+        <p:spPr>
+          <a:xfrm>
+            <a:off x="6366387" y="5405438"/>
+            <a:ext cx="1806063" cy="550545"/>
+          </a:xfrm>
+          <a:prstGeom prst="rect">
+            <a:avLst/>
+          </a:prstGeom>
+          <a:noFill/>
+        </p:spPr>
+        <p:txBody>
+          <a:bodyPr wrap="square" lIns="0" rIns="0" tIns="0" bIns="0" anchor="ctr">
+            <a:spAutoFit/>
+          </a:bodyPr>
+          <a:lstStyle/>
+          <a:p>
+            <a:pPr algn="ctr">
+              <a:lnSpc>
+                <a:spcPct val="115000"/>
+              </a:lnSpc>
+            </a:pPr>
+            <a:r>
+              <a:rPr sz="1575" b="0">
+                <a:solidFill>
+                  <a:srgbClr val="3D3D3D"/>
+                </a:solidFill>
+                <a:latin typeface="Pretendard"/>
+                <a:ea typeface="Pretendard"/>
+                <a:cs typeface="Pretendard"/>
+              </a:rPr>
+              <a:t>2</a:t>
+            </a:r>
+          </a:p>
+        </p:txBody>
+      </p:sp>
+      <p:sp>
+        <p:nvSpPr>
+          <p:cNvPr id="23" name="Rounded Rectangle 22"/>
+          <p:cNvSpPr/>
+          <p:nvPr/>
+        </p:nvSpPr>
+        <p:spPr>
+          <a:xfrm>
+            <a:off x="1390650" y="6020752"/>
+            <a:ext cx="2180303" cy="550545"/>
+          </a:xfrm>
+          <a:prstGeom prst="roundRect">
+            <a:avLst>
+              <a:gd name="adj" fmla="val 6920"/>
+            </a:avLst>
+          </a:prstGeom>
+          <a:solidFill>
+            <a:srgbClr val="EDF3FD"/>
+          </a:solidFill>
+          <a:ln w="9525">
+            <a:solidFill>
+              <a:srgbClr val="BFD3F5"/>
+            </a:solidFill>
+          </a:ln>
+          <a:effectLst/>
+        </p:spPr>
+        <p:txBody>
+          <a:bodyPr rtlCol="0" anchor="ctr" wrap="square"/>
+          <a:lstStyle/>
+          <a:p>
+            <a:pPr algn="ctr"/>
+          </a:p>
+        </p:txBody>
+      </p:sp>
+      <p:sp>
+        <p:nvSpPr>
+          <p:cNvPr id="24" name="TextBox 23"/>
+          <p:cNvSpPr txBox="1"/>
+          <p:nvPr/>
+        </p:nvSpPr>
+        <p:spPr>
+          <a:xfrm>
+            <a:off x="1485900" y="6020752"/>
+            <a:ext cx="1989803" cy="550545"/>
+          </a:xfrm>
+          <a:prstGeom prst="rect">
+            <a:avLst/>
+          </a:prstGeom>
+          <a:noFill/>
+        </p:spPr>
+        <p:txBody>
+          <a:bodyPr wrap="square" lIns="0" rIns="0" tIns="0" bIns="0" anchor="ctr">
+            <a:spAutoFit/>
+          </a:bodyPr>
+          <a:lstStyle/>
+          <a:p>
+            <a:pPr algn="l">
+              <a:lnSpc>
+                <a:spcPct val="115000"/>
+              </a:lnSpc>
+            </a:pPr>
+            <a:r>
+              <a:rPr sz="1575" b="1">
+                <a:solidFill>
+                  <a:srgbClr val="0D2B5E"/>
+                </a:solidFill>
+                <a:latin typeface="Pretendard"/>
+                <a:ea typeface="Pretendard"/>
+                <a:cs typeface="Pretendard"/>
+              </a:rPr>
+              <a:t>2026-08-25</a:t>
+            </a:r>
+          </a:p>
+        </p:txBody>
+      </p:sp>
+      <p:sp>
+        <p:nvSpPr>
+          <p:cNvPr id="25" name="Rounded Rectangle 24"/>
+          <p:cNvSpPr/>
+          <p:nvPr/>
+        </p:nvSpPr>
+        <p:spPr>
+          <a:xfrm>
+            <a:off x="3609053" y="6020752"/>
+            <a:ext cx="2623984" cy="550545"/>
+          </a:xfrm>
+          <a:prstGeom prst="roundRect">
+            <a:avLst>
+              <a:gd name="adj" fmla="val 6920"/>
+            </a:avLst>
+          </a:prstGeom>
+          <a:solidFill>
+            <a:srgbClr val="FAFBFD"/>
+          </a:solidFill>
+          <a:ln w="9525">
+            <a:solidFill>
+              <a:srgbClr val="DCE1E8"/>
+            </a:solidFill>
+          </a:ln>
+          <a:effectLst/>
+        </p:spPr>
+        <p:txBody>
+          <a:bodyPr rtlCol="0" anchor="ctr" wrap="square"/>
+          <a:lstStyle/>
+          <a:p>
+            <a:pPr algn="ctr"/>
+          </a:p>
+        </p:txBody>
+      </p:sp>
+      <p:sp>
+        <p:nvSpPr>
+          <p:cNvPr id="26" name="TextBox 25"/>
+          <p:cNvSpPr txBox="1"/>
+          <p:nvPr/>
+        </p:nvSpPr>
+        <p:spPr>
+          <a:xfrm>
+            <a:off x="3704303" y="6020752"/>
+            <a:ext cx="2433484" cy="550545"/>
+          </a:xfrm>
+          <a:prstGeom prst="rect">
+            <a:avLst/>
+          </a:prstGeom>
+          <a:noFill/>
+        </p:spPr>
+        <p:txBody>
+          <a:bodyPr wrap="square" lIns="0" rIns="0" tIns="0" bIns="0" anchor="ctr">
+            <a:spAutoFit/>
+          </a:bodyPr>
+          <a:lstStyle/>
+          <a:p>
+            <a:pPr algn="ctr">
+              <a:lnSpc>
+                <a:spcPct val="115000"/>
+              </a:lnSpc>
+            </a:pPr>
+            <a:r>
+              <a:rPr sz="1575" b="0">
+                <a:solidFill>
+                  <a:srgbClr val="3D3D3D"/>
+                </a:solidFill>
+                <a:latin typeface="Pretendard"/>
+                <a:ea typeface="Pretendard"/>
+                <a:cs typeface="Pretendard"/>
+              </a:rPr>
+              <a:t>1155000</a:t>
+            </a:r>
+          </a:p>
+        </p:txBody>
+      </p:sp>
+      <p:sp>
+        <p:nvSpPr>
+          <p:cNvPr id="27" name="Rounded Rectangle 26"/>
+          <p:cNvSpPr/>
+          <p:nvPr/>
+        </p:nvSpPr>
+        <p:spPr>
+          <a:xfrm>
+            <a:off x="6271137" y="6020752"/>
+            <a:ext cx="1996563" cy="550545"/>
+          </a:xfrm>
+          <a:prstGeom prst="roundRect">
+            <a:avLst>
+              <a:gd name="adj" fmla="val 6920"/>
+            </a:avLst>
+          </a:prstGeom>
+          <a:solidFill>
+            <a:srgbClr val="FAFBFD"/>
+          </a:solidFill>
+          <a:ln w="9525">
+            <a:solidFill>
+              <a:srgbClr val="DCE1E8"/>
+            </a:solidFill>
+          </a:ln>
+          <a:effectLst/>
+        </p:spPr>
+        <p:txBody>
+          <a:bodyPr rtlCol="0" anchor="ctr" wrap="square"/>
+          <a:lstStyle/>
+          <a:p>
+            <a:pPr algn="ctr"/>
+          </a:p>
+        </p:txBody>
+      </p:sp>
+      <p:sp>
+        <p:nvSpPr>
+          <p:cNvPr id="28" name="TextBox 27"/>
+          <p:cNvSpPr txBox="1"/>
+          <p:nvPr/>
+        </p:nvSpPr>
+        <p:spPr>
+          <a:xfrm>
+            <a:off x="6366387" y="6020752"/>
+            <a:ext cx="1806063" cy="550545"/>
+          </a:xfrm>
+          <a:prstGeom prst="rect">
+            <a:avLst/>
+          </a:prstGeom>
+          <a:noFill/>
+        </p:spPr>
+        <p:txBody>
+          <a:bodyPr wrap="square" lIns="0" rIns="0" tIns="0" bIns="0" anchor="ctr">
+            <a:spAutoFit/>
+          </a:bodyPr>
+          <a:lstStyle/>
+          <a:p>
+            <a:pPr algn="ctr">
+              <a:lnSpc>
+                <a:spcPct val="115000"/>
+              </a:lnSpc>
+            </a:pPr>
+            <a:r>
+              <a:rPr sz="1575" b="0">
+                <a:solidFill>
+                  <a:srgbClr val="3D3D3D"/>
+                </a:solidFill>
+                <a:latin typeface="Pretendard"/>
+                <a:ea typeface="Pretendard"/>
+                <a:cs typeface="Pretendard"/>
+              </a:rPr>
+              <a:t>2</a:t>
+            </a:r>
+          </a:p>
+        </p:txBody>
+      </p:sp>
+      <p:sp>
+        <p:nvSpPr>
+          <p:cNvPr id="29" name="Rounded Rectangle 28"/>
+          <p:cNvSpPr/>
+          <p:nvPr/>
+        </p:nvSpPr>
+        <p:spPr>
+          <a:xfrm>
+            <a:off x="1390650" y="6636068"/>
+            <a:ext cx="2180303" cy="550545"/>
+          </a:xfrm>
+          <a:prstGeom prst="roundRect">
+            <a:avLst>
+              <a:gd name="adj" fmla="val 6920"/>
+            </a:avLst>
+          </a:prstGeom>
+          <a:solidFill>
+            <a:srgbClr val="EDF3FD"/>
+          </a:solidFill>
+          <a:ln w="9525">
+            <a:solidFill>
+              <a:srgbClr val="BFD3F5"/>
+            </a:solidFill>
+          </a:ln>
+          <a:effectLst/>
+        </p:spPr>
+        <p:txBody>
+          <a:bodyPr rtlCol="0" anchor="ctr" wrap="square"/>
+          <a:lstStyle/>
+          <a:p>
+            <a:pPr algn="ctr"/>
+          </a:p>
+        </p:txBody>
+      </p:sp>
+      <p:sp>
+        <p:nvSpPr>
+          <p:cNvPr id="30" name="TextBox 29"/>
+          <p:cNvSpPr txBox="1"/>
+          <p:nvPr/>
+        </p:nvSpPr>
+        <p:spPr>
+          <a:xfrm>
+            <a:off x="1485900" y="6636068"/>
+            <a:ext cx="1989803" cy="550545"/>
+          </a:xfrm>
+          <a:prstGeom prst="rect">
+            <a:avLst/>
+          </a:prstGeom>
+          <a:noFill/>
+        </p:spPr>
+        <p:txBody>
+          <a:bodyPr wrap="square" lIns="0" rIns="0" tIns="0" bIns="0" anchor="ctr">
+            <a:spAutoFit/>
+          </a:bodyPr>
+          <a:lstStyle/>
+          <a:p>
+            <a:pPr algn="l">
+              <a:lnSpc>
+                <a:spcPct val="115000"/>
+              </a:lnSpc>
+            </a:pPr>
+            <a:r>
+              <a:rPr sz="1575" b="1">
+                <a:solidFill>
+                  <a:srgbClr val="0D2B5E"/>
+                </a:solidFill>
+                <a:latin typeface="Pretendard"/>
+                <a:ea typeface="Pretendard"/>
+                <a:cs typeface="Pretendard"/>
+              </a:rPr>
+              <a:t>2026-08-26</a:t>
+            </a:r>
+          </a:p>
+        </p:txBody>
+      </p:sp>
+      <p:sp>
+        <p:nvSpPr>
+          <p:cNvPr id="31" name="Rounded Rectangle 30"/>
+          <p:cNvSpPr/>
+          <p:nvPr/>
+        </p:nvSpPr>
+        <p:spPr>
+          <a:xfrm>
+            <a:off x="3609053" y="6636068"/>
+            <a:ext cx="2623984" cy="550545"/>
+          </a:xfrm>
+          <a:prstGeom prst="roundRect">
+            <a:avLst>
+              <a:gd name="adj" fmla="val 6920"/>
+            </a:avLst>
+          </a:prstGeom>
+          <a:solidFill>
+            <a:srgbClr val="FAFBFD"/>
+          </a:solidFill>
+          <a:ln w="9525">
+            <a:solidFill>
+              <a:srgbClr val="DCE1E8"/>
+            </a:solidFill>
+          </a:ln>
+          <a:effectLst/>
+        </p:spPr>
+        <p:txBody>
+          <a:bodyPr rtlCol="0" anchor="ctr" wrap="square"/>
+          <a:lstStyle/>
+          <a:p>
+            <a:pPr algn="ctr"/>
+          </a:p>
+        </p:txBody>
+      </p:sp>
+      <p:sp>
+        <p:nvSpPr>
+          <p:cNvPr id="32" name="TextBox 31"/>
+          <p:cNvSpPr txBox="1"/>
+          <p:nvPr/>
+        </p:nvSpPr>
+        <p:spPr>
+          <a:xfrm>
+            <a:off x="3704303" y="6636068"/>
+            <a:ext cx="2433484" cy="550545"/>
+          </a:xfrm>
+          <a:prstGeom prst="rect">
+            <a:avLst/>
+          </a:prstGeom>
+          <a:noFill/>
+        </p:spPr>
+        <p:txBody>
+          <a:bodyPr wrap="square" lIns="0" rIns="0" tIns="0" bIns="0" anchor="ctr">
+            <a:spAutoFit/>
+          </a:bodyPr>
+          <a:lstStyle/>
+          <a:p>
+            <a:pPr algn="ctr">
+              <a:lnSpc>
+                <a:spcPct val="115000"/>
+              </a:lnSpc>
+            </a:pPr>
+            <a:r>
+              <a:rPr sz="1575" b="0">
+                <a:solidFill>
+                  <a:srgbClr val="3D3D3D"/>
+                </a:solidFill>
+                <a:latin typeface="Pretendard"/>
+                <a:ea typeface="Pretendard"/>
+                <a:cs typeface="Pretendard"/>
+              </a:rPr>
+              <a:t>46000</a:t>
+            </a:r>
+          </a:p>
+        </p:txBody>
+      </p:sp>
+      <p:sp>
+        <p:nvSpPr>
+          <p:cNvPr id="33" name="Rounded Rectangle 32"/>
+          <p:cNvSpPr/>
+          <p:nvPr/>
+        </p:nvSpPr>
+        <p:spPr>
+          <a:xfrm>
+            <a:off x="6271137" y="6636068"/>
+            <a:ext cx="1996563" cy="550545"/>
+          </a:xfrm>
+          <a:prstGeom prst="roundRect">
+            <a:avLst>
+              <a:gd name="adj" fmla="val 6920"/>
+            </a:avLst>
+          </a:prstGeom>
+          <a:solidFill>
+            <a:srgbClr val="FAFBFD"/>
+          </a:solidFill>
+          <a:ln w="9525">
+            <a:solidFill>
+              <a:srgbClr val="DCE1E8"/>
+            </a:solidFill>
+          </a:ln>
+          <a:effectLst/>
+        </p:spPr>
+        <p:txBody>
+          <a:bodyPr rtlCol="0" anchor="ctr" wrap="square"/>
+          <a:lstStyle/>
+          <a:p>
+            <a:pPr algn="ctr"/>
+          </a:p>
+        </p:txBody>
+      </p:sp>
+      <p:sp>
+        <p:nvSpPr>
+          <p:cNvPr id="34" name="TextBox 33"/>
+          <p:cNvSpPr txBox="1"/>
+          <p:nvPr/>
+        </p:nvSpPr>
+        <p:spPr>
+          <a:xfrm>
+            <a:off x="6366387" y="6636068"/>
+            <a:ext cx="1806063" cy="550545"/>
+          </a:xfrm>
+          <a:prstGeom prst="rect">
+            <a:avLst/>
+          </a:prstGeom>
+          <a:noFill/>
+        </p:spPr>
+        <p:txBody>
+          <a:bodyPr wrap="square" lIns="0" rIns="0" tIns="0" bIns="0" anchor="ctr">
+            <a:spAutoFit/>
+          </a:bodyPr>
+          <a:lstStyle/>
+          <a:p>
+            <a:pPr algn="ctr">
+              <a:lnSpc>
+                <a:spcPct val="115000"/>
+              </a:lnSpc>
+            </a:pPr>
+            <a:r>
+              <a:rPr sz="1575" b="0">
+                <a:solidFill>
+                  <a:srgbClr val="3D3D3D"/>
+                </a:solidFill>
+                <a:latin typeface="Pretendard"/>
+                <a:ea typeface="Pretendard"/>
+                <a:cs typeface="Pretendard"/>
+              </a:rPr>
+              <a:t>1</a:t>
+            </a:r>
+          </a:p>
+        </p:txBody>
+      </p:sp>
+      <p:sp>
+        <p:nvSpPr>
+          <p:cNvPr id="35" name="TextBox 34"/>
           <p:cNvSpPr txBox="1"/>
           <p:nvPr/>
         </p:nvSpPr>
@@ -10535,14 +11357,14 @@
                 <a:ea typeface="Pretendard"/>
                 <a:cs typeface="Pretendard"/>
               </a:rPr>
-              <a:t>MERGE — 증분 병합 (4-3)</a:t>
-            </a:r>
-          </a:p>
-        </p:txBody>
-      </p:sp>
-      <p:sp>
-        <p:nvSpPr>
-          <p:cNvPr id="18" name="TextBox 17"/>
+              <a:t>다시 실행 · tail -n 8</a:t>
+            </a:r>
+          </a:p>
+        </p:txBody>
+      </p:sp>
+      <p:sp>
+        <p:nvSpPr>
+          <p:cNvPr id="36" name="TextBox 35"/>
           <p:cNvSpPr txBox="1"/>
           <p:nvPr/>
         </p:nvSpPr>
@@ -10576,14 +11398,14 @@
                 <a:ea typeface="Pretendard"/>
                 <a:cs typeface="Pretendard"/>
               </a:rPr>
-              <a:t>바뀐 행만 끼워 넣는다</a:t>
-            </a:r>
-          </a:p>
-        </p:txBody>
-      </p:sp>
-      <p:sp>
-        <p:nvSpPr>
-          <p:cNvPr id="19" name="Rounded Rectangle 18"/>
+              <a:t>WARN 없이 같은 표만 · data/ 2개</a:t>
+            </a:r>
+          </a:p>
+        </p:txBody>
+      </p:sp>
+      <p:sp>
+        <p:nvSpPr>
+          <p:cNvPr id="37" name="Rounded Rectangle 36"/>
           <p:cNvSpPr/>
           <p:nvPr/>
         </p:nvSpPr>
@@ -10617,7 +11439,7 @@
       </p:sp>
       <p:sp>
         <p:nvSpPr>
-          <p:cNvPr id="20" name="Oval 19"/>
+          <p:cNvPr id="38" name="Oval 37"/>
           <p:cNvSpPr/>
           <p:nvPr/>
         </p:nvSpPr>
@@ -10647,7 +11469,7 @@
       </p:sp>
       <p:sp>
         <p:nvSpPr>
-          <p:cNvPr id="21" name="TextBox 20"/>
+          <p:cNvPr id="39" name="TextBox 38"/>
           <p:cNvSpPr txBox="1"/>
           <p:nvPr/>
         </p:nvSpPr>
@@ -10681,14 +11503,14 @@
                 <a:ea typeface="Pretendard"/>
                 <a:cs typeface="Pretendard"/>
               </a:rPr>
-              <a:t>원천이 크고 일부만 바뀔 때 유리</a:t>
-            </a:r>
-          </a:p>
-        </p:txBody>
-      </p:sp>
-      <p:sp>
-        <p:nvSpPr>
-          <p:cNvPr id="22" name="Oval 21"/>
+              <a:t>createOrReplace — 통째로 교체해 멱등</a:t>
+            </a:r>
+          </a:p>
+        </p:txBody>
+      </p:sp>
+      <p:sp>
+        <p:nvSpPr>
+          <p:cNvPr id="40" name="Oval 39"/>
           <p:cNvSpPr/>
           <p:nvPr/>
         </p:nvSpPr>
@@ -10718,7 +11540,7 @@
       </p:sp>
       <p:sp>
         <p:nvSpPr>
-          <p:cNvPr id="23" name="TextBox 22"/>
+          <p:cNvPr id="41" name="TextBox 40"/>
           <p:cNvSpPr txBox="1"/>
           <p:nvPr/>
         </p:nvSpPr>
@@ -10752,14 +11574,14 @@
                 <a:ea typeface="Pretendard"/>
                 <a:cs typeface="Pretendard"/>
               </a:rPr>
-              <a:t>4-3 에서 배운 방식</a:t>
-            </a:r>
-          </a:p>
-        </p:txBody>
-      </p:sp>
-      <p:sp>
-        <p:nvSpPr>
-          <p:cNvPr id="24" name="Oval 23"/>
+              <a:t>옛 판 파일은 스냅샷으로 남는다</a:t>
+            </a:r>
+          </a:p>
+        </p:txBody>
+      </p:sp>
+      <p:sp>
+        <p:nvSpPr>
+          <p:cNvPr id="42" name="Oval 41"/>
           <p:cNvSpPr/>
           <p:nvPr/>
         </p:nvSpPr>
@@ -10789,7 +11611,7 @@
       </p:sp>
       <p:sp>
         <p:nvSpPr>
-          <p:cNvPr id="25" name="TextBox 24"/>
+          <p:cNvPr id="43" name="TextBox 42"/>
           <p:cNvSpPr txBox="1"/>
           <p:nvPr/>
         </p:nvSpPr>
@@ -10823,14 +11645,14 @@
                 <a:ea typeface="Pretendard"/>
                 <a:cs typeface="Pretendard"/>
               </a:rPr>
-              <a:t>같은 멱등, 다른 전략</a:t>
-            </a:r>
-          </a:p>
-        </p:txBody>
-      </p:sp>
-      <p:sp>
-        <p:nvSpPr>
-          <p:cNvPr id="26" name="Oval 25"/>
+              <a:t>정리는 4-4 의 expire_snapshots</a:t>
+            </a:r>
+          </a:p>
+        </p:txBody>
+      </p:sp>
+      <p:sp>
+        <p:nvSpPr>
+          <p:cNvPr id="44" name="Oval 43"/>
           <p:cNvSpPr/>
           <p:nvPr/>
         </p:nvSpPr>
@@ -10860,7 +11682,7 @@
       </p:sp>
       <p:sp>
         <p:nvSpPr>
-          <p:cNvPr id="27" name="TextBox 26"/>
+          <p:cNvPr id="45" name="TextBox 44"/>
           <p:cNvSpPr txBox="1"/>
           <p:nvPr/>
         </p:nvSpPr>
@@ -10901,7 +11723,7 @@
       </p:sp>
       <p:sp>
         <p:nvSpPr>
-          <p:cNvPr id="28" name="Rectangle 27"/>
+          <p:cNvPr id="46" name="Rectangle 45"/>
           <p:cNvSpPr/>
           <p:nvPr/>
         </p:nvSpPr>
@@ -10931,7 +11753,7 @@
       </p:sp>
       <p:sp>
         <p:nvSpPr>
-          <p:cNvPr id="29" name="TextBox 28"/>
+          <p:cNvPr id="47" name="TextBox 46"/>
           <p:cNvSpPr txBox="1"/>
           <p:nvPr/>
         </p:nvSpPr>
@@ -10972,7 +11794,7 @@
       </p:sp>
       <p:sp>
         <p:nvSpPr>
-          <p:cNvPr id="30" name="TextBox 29"/>
+          <p:cNvPr id="48" name="TextBox 47"/>
           <p:cNvSpPr txBox="1"/>
           <p:nvPr/>
         </p:nvSpPr>
@@ -11031,7 +11853,7 @@
       <p:grpSpPr/>
       <p:sp>
         <p:nvSpPr>
-          <p:cNvPr id="2" name="Oval 1"/>
+          <p:cNvPr id="2" name="deckgen:decor"/>
           <p:cNvSpPr/>
           <p:nvPr/>
         </p:nvSpPr>
@@ -11061,7 +11883,7 @@
       </p:sp>
       <p:sp>
         <p:nvSpPr>
-          <p:cNvPr id="3" name="Oval 2"/>
+          <p:cNvPr id="3" name="deckgen:decor"/>
           <p:cNvSpPr/>
           <p:nvPr/>
         </p:nvSpPr>
@@ -11091,7 +11913,7 @@
       </p:sp>
       <p:sp>
         <p:nvSpPr>
-          <p:cNvPr id="4" name="Oval 3"/>
+          <p:cNvPr id="4" name="deckgen:decor"/>
           <p:cNvSpPr/>
           <p:nvPr/>
         </p:nvSpPr>
@@ -11196,7 +12018,7 @@
                 <a:ea typeface="Pretendard"/>
                 <a:cs typeface="Pretendard"/>
               </a:rPr>
-              <a:t>실무형으로 — 인자 · 로그 · 종료 코드</a:t>
+              <a:t>개선판 — 로그는 파일로, 종료 코드는 다음 상자</a:t>
             </a:r>
           </a:p>
         </p:txBody>
@@ -11233,54 +12055,93 @@
       </p:sp>
       <p:sp>
         <p:nvSpPr>
-          <p:cNvPr id="8" name="Rounded Rectangle 7"/>
-          <p:cNvSpPr/>
-          <p:nvPr/>
-        </p:nvSpPr>
-        <p:spPr>
-          <a:xfrm>
-            <a:off x="1143000" y="2933700"/>
-            <a:ext cx="11430000" cy="1095375"/>
+          <p:cNvPr id="8" name="Rectangle 7"/>
+          <p:cNvSpPr/>
+          <p:nvPr/>
+        </p:nvSpPr>
+        <p:spPr>
+          <a:xfrm>
+            <a:off x="1143000" y="2343150"/>
+            <a:ext cx="7810500" cy="533400"/>
+          </a:xfrm>
+          <a:prstGeom prst="rect">
+            <a:avLst/>
+          </a:prstGeom>
+          <a:solidFill>
+            <a:srgbClr val="0D2B5E"/>
+          </a:solidFill>
+          <a:ln>
+            <a:noFill/>
+          </a:ln>
+          <a:effectLst/>
+        </p:spPr>
+        <p:txBody>
+          <a:bodyPr rtlCol="0" anchor="ctr" wrap="square"/>
+          <a:lstStyle/>
+          <a:p>
+            <a:pPr algn="ctr"/>
+          </a:p>
+        </p:txBody>
+      </p:sp>
+      <p:sp>
+        <p:nvSpPr>
+          <p:cNvPr id="9" name="TextBox 8"/>
+          <p:cNvSpPr txBox="1"/>
+          <p:nvPr/>
+        </p:nvSpPr>
+        <p:spPr>
+          <a:xfrm>
+            <a:off x="1352550" y="2343150"/>
+            <a:ext cx="7391400" cy="533400"/>
+          </a:xfrm>
+          <a:prstGeom prst="rect">
+            <a:avLst/>
+          </a:prstGeom>
+          <a:noFill/>
+        </p:spPr>
+        <p:txBody>
+          <a:bodyPr wrap="square" lIns="0" rIns="0" tIns="0" bIns="0" anchor="ctr">
+            <a:spAutoFit/>
+          </a:bodyPr>
+          <a:lstStyle/>
+          <a:p>
+            <a:pPr algn="l">
+              <a:lnSpc>
+                <a:spcPct val="100000"/>
+              </a:lnSpc>
+            </a:pPr>
+            <a:r>
+              <a:rPr sz="1950" b="1">
+                <a:solidFill>
+                  <a:srgbClr val="FFFFFF"/>
+                </a:solidFill>
+                <a:latin typeface="Pretendard"/>
+                <a:ea typeface="Pretendard"/>
+                <a:cs typeface="Pretendard"/>
+              </a:rPr>
+              <a:t>상자 1 — 실행(exec 가 맨 끝)</a:t>
+            </a:r>
+          </a:p>
+        </p:txBody>
+      </p:sp>
+      <p:sp>
+        <p:nvSpPr>
+          <p:cNvPr id="10" name="Rounded Rectangle 9"/>
+          <p:cNvSpPr/>
+          <p:nvPr/>
+        </p:nvSpPr>
+        <p:spPr>
+          <a:xfrm>
+            <a:off x="1143000" y="2876550"/>
+            <a:ext cx="7810500" cy="4552950"/>
           </a:xfrm>
           <a:prstGeom prst="roundRect">
             <a:avLst>
-              <a:gd name="adj" fmla="val 4347"/>
+              <a:gd name="adj" fmla="val 418"/>
             </a:avLst>
           </a:prstGeom>
           <a:solidFill>
-            <a:srgbClr val="FAFBFD"/>
-          </a:solidFill>
-          <a:ln w="9525">
-            <a:solidFill>
-              <a:srgbClr val="DCE1E8"/>
-            </a:solidFill>
-          </a:ln>
-          <a:effectLst/>
-        </p:spPr>
-        <p:txBody>
-          <a:bodyPr rtlCol="0" anchor="ctr" wrap="square"/>
-          <a:lstStyle/>
-          <a:p>
-            <a:pPr algn="ctr"/>
-          </a:p>
-        </p:txBody>
-      </p:sp>
-      <p:sp>
-        <p:nvSpPr>
-          <p:cNvPr id="9" name="Oval 8"/>
-          <p:cNvSpPr/>
-          <p:nvPr/>
-        </p:nvSpPr>
-        <p:spPr>
-          <a:xfrm>
-            <a:off x="1447800" y="3181350"/>
-            <a:ext cx="590550" cy="590550"/>
-          </a:xfrm>
-          <a:prstGeom prst="ellipse">
-            <a:avLst/>
-          </a:prstGeom>
-          <a:solidFill>
-            <a:srgbClr val="0D2B5E"/>
+            <a:srgbClr val="1E2433"/>
           </a:solidFill>
           <a:ln>
             <a:noFill/>
@@ -11297,14 +12158,551 @@
       </p:sp>
       <p:sp>
         <p:nvSpPr>
-          <p:cNvPr id="10" name="TextBox 9"/>
+          <p:cNvPr id="11" name="Rectangle 10"/>
+          <p:cNvSpPr/>
+          <p:nvPr/>
+        </p:nvSpPr>
+        <p:spPr>
+          <a:xfrm>
+            <a:off x="1143000" y="2876550"/>
+            <a:ext cx="533400" cy="4552950"/>
+          </a:xfrm>
+          <a:prstGeom prst="rect">
+            <a:avLst/>
+          </a:prstGeom>
+          <a:solidFill>
+            <a:srgbClr val="171C29"/>
+          </a:solidFill>
+          <a:ln>
+            <a:noFill/>
+          </a:ln>
+          <a:effectLst/>
+        </p:spPr>
+        <p:txBody>
+          <a:bodyPr rtlCol="0" anchor="ctr" wrap="square"/>
+          <a:lstStyle/>
+          <a:p>
+            <a:pPr algn="ctr"/>
+          </a:p>
+        </p:txBody>
+      </p:sp>
+      <p:sp>
+        <p:nvSpPr>
+          <p:cNvPr id="12" name="deckgen:code-lineno"/>
           <p:cNvSpPr txBox="1"/>
           <p:nvPr/>
         </p:nvSpPr>
         <p:spPr>
           <a:xfrm>
-            <a:off x="1447800" y="3333750"/>
-            <a:ext cx="590550" cy="323850"/>
+            <a:off x="1143000" y="3028950"/>
+            <a:ext cx="419100" cy="4248150"/>
+          </a:xfrm>
+          <a:prstGeom prst="rect">
+            <a:avLst/>
+          </a:prstGeom>
+          <a:noFill/>
+        </p:spPr>
+        <p:txBody>
+          <a:bodyPr wrap="none" lIns="0" rIns="0" tIns="0" bIns="0" anchor="t">
+            <a:spAutoFit/>
+          </a:bodyPr>
+          <a:lstStyle/>
+          <a:p>
+            <a:pPr algn="r">
+              <a:lnSpc>
+                <a:spcPts val="2897"/>
+              </a:lnSpc>
+            </a:pPr>
+            <a:r>
+              <a:rPr sz="2100" b="0">
+                <a:solidFill>
+                  <a:srgbClr val="7A869C"/>
+                </a:solidFill>
+                <a:latin typeface="D2Coding"/>
+                <a:ea typeface="D2Coding"/>
+                <a:cs typeface="D2Coding"/>
+              </a:rPr>
+              <a:t>1</a:t>
+            </a:r>
+          </a:p>
+          <a:p>
+            <a:pPr algn="r">
+              <a:lnSpc>
+                <a:spcPts val="2897"/>
+              </a:lnSpc>
+            </a:pPr>
+            <a:r>
+              <a:rPr sz="2100" b="0">
+                <a:solidFill>
+                  <a:srgbClr val="7A869C"/>
+                </a:solidFill>
+                <a:latin typeface="D2Coding"/>
+                <a:ea typeface="D2Coding"/>
+                <a:cs typeface="D2Coding"/>
+              </a:rPr>
+              <a:t>2</a:t>
+            </a:r>
+          </a:p>
+          <a:p>
+            <a:pPr algn="r">
+              <a:lnSpc>
+                <a:spcPts val="2897"/>
+              </a:lnSpc>
+            </a:pPr>
+            <a:r>
+              <a:rPr sz="2100" b="0">
+                <a:solidFill>
+                  <a:srgbClr val="7A869C"/>
+                </a:solidFill>
+                <a:latin typeface="D2Coding"/>
+                <a:ea typeface="D2Coding"/>
+                <a:cs typeface="D2Coding"/>
+              </a:rPr>
+              <a:t>3</a:t>
+            </a:r>
+          </a:p>
+          <a:p>
+            <a:pPr algn="r">
+              <a:lnSpc>
+                <a:spcPts val="2897"/>
+              </a:lnSpc>
+            </a:pPr>
+            <a:r>
+              <a:rPr sz="2100" b="0">
+                <a:solidFill>
+                  <a:srgbClr val="7A869C"/>
+                </a:solidFill>
+                <a:latin typeface="D2Coding"/>
+                <a:ea typeface="D2Coding"/>
+                <a:cs typeface="D2Coding"/>
+              </a:rPr>
+              <a:t>4</a:t>
+            </a:r>
+          </a:p>
+          <a:p>
+            <a:pPr algn="r">
+              <a:lnSpc>
+                <a:spcPts val="2897"/>
+              </a:lnSpc>
+            </a:pPr>
+            <a:r>
+              <a:rPr sz="2100" b="0">
+                <a:solidFill>
+                  <a:srgbClr val="7A869C"/>
+                </a:solidFill>
+                <a:latin typeface="D2Coding"/>
+                <a:ea typeface="D2Coding"/>
+                <a:cs typeface="D2Coding"/>
+              </a:rPr>
+              <a:t>5</a:t>
+            </a:r>
+          </a:p>
+        </p:txBody>
+      </p:sp>
+      <p:sp>
+        <p:nvSpPr>
+          <p:cNvPr id="13" name="deckgen:code"/>
+          <p:cNvSpPr txBox="1"/>
+          <p:nvPr/>
+        </p:nvSpPr>
+        <p:spPr>
+          <a:xfrm>
+            <a:off x="1828800" y="3028950"/>
+            <a:ext cx="6972300" cy="4248150"/>
+          </a:xfrm>
+          <a:prstGeom prst="rect">
+            <a:avLst/>
+          </a:prstGeom>
+          <a:noFill/>
+        </p:spPr>
+        <p:txBody>
+          <a:bodyPr wrap="none" lIns="0" rIns="0" tIns="0" bIns="0" anchor="t">
+            <a:spAutoFit/>
+          </a:bodyPr>
+          <a:lstStyle/>
+          <a:p>
+            <a:pPr algn="l">
+              <a:lnSpc>
+                <a:spcPts val="2897"/>
+              </a:lnSpc>
+            </a:pPr>
+            <a:r>
+              <a:rPr sz="2100" b="0">
+                <a:solidFill>
+                  <a:srgbClr val="E6EAF2"/>
+                </a:solidFill>
+                <a:latin typeface="D2Coding"/>
+                <a:ea typeface="D2Coding"/>
+                <a:cs typeface="D2Coding"/>
+              </a:rPr>
+              <a:t>docker compose cp mart.py spark-master:/tmp/mart.py</a:t>
+            </a:r>
+          </a:p>
+          <a:p>
+            <a:pPr algn="l">
+              <a:lnSpc>
+                <a:spcPts val="2897"/>
+              </a:lnSpc>
+            </a:pPr>
+            <a:r>
+              <a:rPr sz="2100" b="0">
+                <a:solidFill>
+                  <a:srgbClr val="E6EAF2"/>
+                </a:solidFill>
+                <a:latin typeface="D2Coding"/>
+                <a:ea typeface="D2Coding"/>
+                <a:cs typeface="D2Coding"/>
+              </a:rPr>
+              <a:t/>
+            </a:r>
+          </a:p>
+          <a:p>
+            <a:pPr algn="l">
+              <a:lnSpc>
+                <a:spcPts val="2897"/>
+              </a:lnSpc>
+            </a:pPr>
+            <a:r>
+              <a:rPr sz="2100" b="0">
+                <a:solidFill>
+                  <a:srgbClr val="E6EAF2"/>
+                </a:solidFill>
+                <a:latin typeface="D2Coding"/>
+                <a:ea typeface="D2Coding"/>
+                <a:cs typeface="D2Coding"/>
+              </a:rPr>
+              <a:t>docker compose exec spark-master \</a:t>
+            </a:r>
+          </a:p>
+          <a:p>
+            <a:pPr algn="l">
+              <a:lnSpc>
+                <a:spcPts val="2897"/>
+              </a:lnSpc>
+            </a:pPr>
+            <a:r>
+              <a:rPr sz="2100" b="0">
+                <a:solidFill>
+                  <a:srgbClr val="E6EAF2"/>
+                </a:solidFill>
+                <a:latin typeface="D2Coding"/>
+                <a:ea typeface="D2Coding"/>
+                <a:cs typeface="D2Coding"/>
+              </a:rPr>
+              <a:t>  /opt/spark/bin/spark-submit … \</a:t>
+            </a:r>
+          </a:p>
+          <a:p>
+            <a:pPr algn="l">
+              <a:lnSpc>
+                <a:spcPts val="2897"/>
+              </a:lnSpc>
+            </a:pPr>
+            <a:r>
+              <a:rPr sz="2100" b="0">
+                <a:solidFill>
+                  <a:srgbClr val="E6EAF2"/>
+                </a:solidFill>
+                <a:latin typeface="D2Coding"/>
+                <a:ea typeface="D2Coding"/>
+                <a:cs typeface="D2Coding"/>
+              </a:rPr>
+              <a:t>  /tmp/mart.py 2026-08-25 &gt; mart.log 2&gt;&amp;1</a:t>
+            </a:r>
+          </a:p>
+        </p:txBody>
+      </p:sp>
+      <p:sp>
+        <p:nvSpPr>
+          <p:cNvPr id="14" name="Rectangle 13"/>
+          <p:cNvSpPr/>
+          <p:nvPr/>
+        </p:nvSpPr>
+        <p:spPr>
+          <a:xfrm>
+            <a:off x="9334500" y="2343150"/>
+            <a:ext cx="7810500" cy="533400"/>
+          </a:xfrm>
+          <a:prstGeom prst="rect">
+            <a:avLst/>
+          </a:prstGeom>
+          <a:solidFill>
+            <a:srgbClr val="1E7B4F"/>
+          </a:solidFill>
+          <a:ln>
+            <a:noFill/>
+          </a:ln>
+          <a:effectLst/>
+        </p:spPr>
+        <p:txBody>
+          <a:bodyPr rtlCol="0" anchor="ctr" wrap="square"/>
+          <a:lstStyle/>
+          <a:p>
+            <a:pPr algn="ctr"/>
+          </a:p>
+        </p:txBody>
+      </p:sp>
+      <p:sp>
+        <p:nvSpPr>
+          <p:cNvPr id="15" name="TextBox 14"/>
+          <p:cNvSpPr txBox="1"/>
+          <p:nvPr/>
+        </p:nvSpPr>
+        <p:spPr>
+          <a:xfrm>
+            <a:off x="9544050" y="2343150"/>
+            <a:ext cx="7391400" cy="533400"/>
+          </a:xfrm>
+          <a:prstGeom prst="rect">
+            <a:avLst/>
+          </a:prstGeom>
+          <a:noFill/>
+        </p:spPr>
+        <p:txBody>
+          <a:bodyPr wrap="square" lIns="0" rIns="0" tIns="0" bIns="0" anchor="ctr">
+            <a:spAutoFit/>
+          </a:bodyPr>
+          <a:lstStyle/>
+          <a:p>
+            <a:pPr algn="l">
+              <a:lnSpc>
+                <a:spcPct val="100000"/>
+              </a:lnSpc>
+            </a:pPr>
+            <a:r>
+              <a:rPr sz="1950" b="1">
+                <a:solidFill>
+                  <a:srgbClr val="FFFFFF"/>
+                </a:solidFill>
+                <a:latin typeface="Pretendard"/>
+                <a:ea typeface="Pretendard"/>
+                <a:cs typeface="Pretendard"/>
+              </a:rPr>
+              <a:t>✓  상자 2 — 확인</a:t>
+            </a:r>
+          </a:p>
+        </p:txBody>
+      </p:sp>
+      <p:sp>
+        <p:nvSpPr>
+          <p:cNvPr id="16" name="Rounded Rectangle 15"/>
+          <p:cNvSpPr/>
+          <p:nvPr/>
+        </p:nvSpPr>
+        <p:spPr>
+          <a:xfrm>
+            <a:off x="9334500" y="2876550"/>
+            <a:ext cx="7810500" cy="4552950"/>
+          </a:xfrm>
+          <a:prstGeom prst="roundRect">
+            <a:avLst>
+              <a:gd name="adj" fmla="val 418"/>
+            </a:avLst>
+          </a:prstGeom>
+          <a:solidFill>
+            <a:srgbClr val="1E2433"/>
+          </a:solidFill>
+          <a:ln>
+            <a:noFill/>
+          </a:ln>
+          <a:effectLst/>
+        </p:spPr>
+        <p:txBody>
+          <a:bodyPr rtlCol="0" anchor="ctr" wrap="square"/>
+          <a:lstStyle/>
+          <a:p>
+            <a:pPr algn="ctr"/>
+          </a:p>
+        </p:txBody>
+      </p:sp>
+      <p:sp>
+        <p:nvSpPr>
+          <p:cNvPr id="17" name="Rectangle 16"/>
+          <p:cNvSpPr/>
+          <p:nvPr/>
+        </p:nvSpPr>
+        <p:spPr>
+          <a:xfrm>
+            <a:off x="9334500" y="2876550"/>
+            <a:ext cx="533400" cy="4552950"/>
+          </a:xfrm>
+          <a:prstGeom prst="rect">
+            <a:avLst/>
+          </a:prstGeom>
+          <a:solidFill>
+            <a:srgbClr val="171C29"/>
+          </a:solidFill>
+          <a:ln>
+            <a:noFill/>
+          </a:ln>
+          <a:effectLst/>
+        </p:spPr>
+        <p:txBody>
+          <a:bodyPr rtlCol="0" anchor="ctr" wrap="square"/>
+          <a:lstStyle/>
+          <a:p>
+            <a:pPr algn="ctr"/>
+          </a:p>
+        </p:txBody>
+      </p:sp>
+      <p:sp>
+        <p:nvSpPr>
+          <p:cNvPr id="18" name="deckgen:code-lineno"/>
+          <p:cNvSpPr txBox="1"/>
+          <p:nvPr/>
+        </p:nvSpPr>
+        <p:spPr>
+          <a:xfrm>
+            <a:off x="9334500" y="3028950"/>
+            <a:ext cx="419100" cy="4248150"/>
+          </a:xfrm>
+          <a:prstGeom prst="rect">
+            <a:avLst/>
+          </a:prstGeom>
+          <a:noFill/>
+        </p:spPr>
+        <p:txBody>
+          <a:bodyPr wrap="none" lIns="0" rIns="0" tIns="0" bIns="0" anchor="t">
+            <a:spAutoFit/>
+          </a:bodyPr>
+          <a:lstStyle/>
+          <a:p>
+            <a:pPr algn="r">
+              <a:lnSpc>
+                <a:spcPts val="2897"/>
+              </a:lnSpc>
+            </a:pPr>
+            <a:r>
+              <a:rPr sz="2100" b="0">
+                <a:solidFill>
+                  <a:srgbClr val="7A869C"/>
+                </a:solidFill>
+                <a:latin typeface="D2Coding"/>
+                <a:ea typeface="D2Coding"/>
+                <a:cs typeface="D2Coding"/>
+              </a:rPr>
+              <a:t>1</a:t>
+            </a:r>
+          </a:p>
+          <a:p>
+            <a:pPr algn="r">
+              <a:lnSpc>
+                <a:spcPts val="2897"/>
+              </a:lnSpc>
+            </a:pPr>
+            <a:r>
+              <a:rPr sz="2100" b="0">
+                <a:solidFill>
+                  <a:srgbClr val="7A869C"/>
+                </a:solidFill>
+                <a:latin typeface="D2Coding"/>
+                <a:ea typeface="D2Coding"/>
+                <a:cs typeface="D2Coding"/>
+              </a:rPr>
+              <a:t>2</a:t>
+            </a:r>
+          </a:p>
+        </p:txBody>
+      </p:sp>
+      <p:sp>
+        <p:nvSpPr>
+          <p:cNvPr id="19" name="deckgen:code"/>
+          <p:cNvSpPr txBox="1"/>
+          <p:nvPr/>
+        </p:nvSpPr>
+        <p:spPr>
+          <a:xfrm>
+            <a:off x="10020300" y="3028950"/>
+            <a:ext cx="6972300" cy="4248150"/>
+          </a:xfrm>
+          <a:prstGeom prst="rect">
+            <a:avLst/>
+          </a:prstGeom>
+          <a:noFill/>
+        </p:spPr>
+        <p:txBody>
+          <a:bodyPr wrap="none" lIns="0" rIns="0" tIns="0" bIns="0" anchor="t">
+            <a:spAutoFit/>
+          </a:bodyPr>
+          <a:lstStyle/>
+          <a:p>
+            <a:pPr algn="l">
+              <a:lnSpc>
+                <a:spcPts val="2897"/>
+              </a:lnSpc>
+            </a:pPr>
+            <a:r>
+              <a:rPr sz="2100" b="0">
+                <a:solidFill>
+                  <a:srgbClr val="E6EAF2"/>
+                </a:solidFill>
+                <a:latin typeface="D2Coding"/>
+                <a:ea typeface="D2Coding"/>
+                <a:cs typeface="D2Coding"/>
+              </a:rPr>
+              <a:t>echo "종료 코드: $?"</a:t>
+            </a:r>
+          </a:p>
+          <a:p>
+            <a:pPr algn="l">
+              <a:lnSpc>
+                <a:spcPts val="2897"/>
+              </a:lnSpc>
+            </a:pPr>
+            <a:r>
+              <a:rPr sz="2100" b="0">
+                <a:solidFill>
+                  <a:srgbClr val="E6EAF2"/>
+                </a:solidFill>
+                <a:latin typeface="D2Coding"/>
+                <a:ea typeface="D2Coding"/>
+                <a:cs typeface="D2Coding"/>
+              </a:rPr>
+              <a:t>grep "\[mart\]" mart.log</a:t>
+            </a:r>
+          </a:p>
+        </p:txBody>
+      </p:sp>
+      <p:sp>
+        <p:nvSpPr>
+          <p:cNvPr id="20" name="Rectangle 19"/>
+          <p:cNvSpPr/>
+          <p:nvPr/>
+        </p:nvSpPr>
+        <p:spPr>
+          <a:xfrm>
+            <a:off x="1143000" y="7600950"/>
+            <a:ext cx="38100" cy="323850"/>
+          </a:xfrm>
+          <a:prstGeom prst="rect">
+            <a:avLst/>
+          </a:prstGeom>
+          <a:solidFill>
+            <a:srgbClr val="BFD3F5"/>
+          </a:solidFill>
+          <a:ln>
+            <a:noFill/>
+          </a:ln>
+          <a:effectLst/>
+        </p:spPr>
+        <p:txBody>
+          <a:bodyPr rtlCol="0" anchor="ctr" wrap="square"/>
+          <a:lstStyle/>
+          <a:p>
+            <a:pPr algn="ctr"/>
+          </a:p>
+        </p:txBody>
+      </p:sp>
+      <p:sp>
+        <p:nvSpPr>
+          <p:cNvPr id="21" name="TextBox 20"/>
+          <p:cNvSpPr txBox="1"/>
+          <p:nvPr/>
+        </p:nvSpPr>
+        <p:spPr>
+          <a:xfrm>
+            <a:off x="1314450" y="7600950"/>
+            <a:ext cx="15830550" cy="342900"/>
           </a:xfrm>
           <a:prstGeom prst="rect">
             <a:avLst/>
@@ -11317,35 +12715,65 @@
           </a:bodyPr>
           <a:lstStyle/>
           <a:p>
-            <a:pPr algn="ctr">
+            <a:pPr algn="l">
               <a:lnSpc>
                 <a:spcPct val="100000"/>
               </a:lnSpc>
             </a:pPr>
             <a:r>
-              <a:rPr sz="2250" b="1">
-                <a:solidFill>
-                  <a:srgbClr val="FFFFFF"/>
+              <a:rPr sz="1725" b="1">
+                <a:solidFill>
+                  <a:srgbClr val="7D7D7D"/>
                 </a:solidFill>
                 <a:latin typeface="Pretendard"/>
                 <a:ea typeface="Pretendard"/>
                 <a:cs typeface="Pretendard"/>
               </a:rPr>
-              <a:t>1</a:t>
-            </a:r>
-          </a:p>
-        </p:txBody>
-      </p:sp>
-      <p:sp>
-        <p:nvSpPr>
-          <p:cNvPr id="11" name="TextBox 10"/>
+              <a:t>exec 뒤에 함께 붙여 넣은 줄은 찍히기만 하고 실행되지 않습니다 — 상자 하나씩, 프롬프트가 돌아온 뒤에</a:t>
+            </a:r>
+          </a:p>
+        </p:txBody>
+      </p:sp>
+      <p:sp>
+        <p:nvSpPr>
+          <p:cNvPr id="22" name="Rectangle 21"/>
+          <p:cNvSpPr/>
+          <p:nvPr/>
+        </p:nvSpPr>
+        <p:spPr>
+          <a:xfrm>
+            <a:off x="1143000" y="8058150"/>
+            <a:ext cx="16002000" cy="9525"/>
+          </a:xfrm>
+          <a:prstGeom prst="rect">
+            <a:avLst/>
+          </a:prstGeom>
+          <a:solidFill>
+            <a:srgbClr val="DCE1E8"/>
+          </a:solidFill>
+          <a:ln>
+            <a:noFill/>
+          </a:ln>
+          <a:effectLst/>
+        </p:spPr>
+        <p:txBody>
+          <a:bodyPr rtlCol="0" anchor="ctr" wrap="square"/>
+          <a:lstStyle/>
+          <a:p>
+            <a:pPr algn="ctr"/>
+          </a:p>
+        </p:txBody>
+      </p:sp>
+      <p:sp>
+        <p:nvSpPr>
+          <p:cNvPr id="23" name="TextBox 22"/>
           <p:cNvSpPr txBox="1"/>
           <p:nvPr/>
         </p:nvSpPr>
         <p:spPr>
           <a:xfrm>
-            <a:off x="2324100" y="3143250"/>
-            <a:ext cx="9906000" cy="400050"/>
+            <a:off x="1143000" y="8248650"/>
+            <a:ext cx="13335000" cy="323850"/>
           </a:xfrm>
           <a:prstGeom prst="rect">
             <a:avLst/>
@@ -11360,699 +12788,26 @@
           <a:p>
             <a:pPr algn="l">
               <a:lnSpc>
-                <a:spcPct val="110000"/>
-              </a:lnSpc>
-            </a:pPr>
-            <a:r>
-              <a:rPr sz="2475" b="1">
-                <a:solidFill>
-                  <a:srgbClr val="0D2B5E"/>
+                <a:spcPct val="100000"/>
+              </a:lnSpc>
+            </a:pPr>
+            <a:r>
+              <a:rPr sz="1725" b="0">
+                <a:solidFill>
+                  <a:srgbClr val="7D7D7D"/>
                 </a:solidFill>
                 <a:latin typeface="Pretendard"/>
                 <a:ea typeface="Pretendard"/>
                 <a:cs typeface="Pretendard"/>
               </a:rPr>
-              <a:t>날짜를 인자로 받는다</a:t>
-            </a:r>
-          </a:p>
-        </p:txBody>
-      </p:sp>
-      <p:sp>
-        <p:nvSpPr>
-          <p:cNvPr id="12" name="TextBox 11"/>
-          <p:cNvSpPr txBox="1"/>
-          <p:nvPr/>
-        </p:nvSpPr>
-        <p:spPr>
-          <a:xfrm>
-            <a:off x="2324100" y="3543300"/>
-            <a:ext cx="9906000" cy="361950"/>
-          </a:xfrm>
-          <a:prstGeom prst="rect">
-            <a:avLst/>
-          </a:prstGeom>
-          <a:noFill/>
-        </p:spPr>
-        <p:txBody>
-          <a:bodyPr wrap="square" lIns="0" rIns="0" tIns="0" bIns="0" anchor="t">
-            <a:spAutoFit/>
-          </a:bodyPr>
-          <a:lstStyle/>
-          <a:p>
-            <a:pPr algn="l">
-              <a:lnSpc>
-                <a:spcPct val="120000"/>
-              </a:lnSpc>
-            </a:pPr>
-            <a:r>
-              <a:rPr sz="2025" b="0">
-                <a:solidFill>
-                  <a:srgbClr val="3D3D3D"/>
-                </a:solidFill>
-                <a:latin typeface="Pretendard"/>
-                <a:ea typeface="Pretendard"/>
-                <a:cs typeface="Pretendard"/>
-              </a:rPr>
-              <a:t>sys.argv[1] — 있으면 그 날짜만 filter</a:t>
-            </a:r>
-          </a:p>
-        </p:txBody>
-      </p:sp>
-      <p:sp>
-        <p:nvSpPr>
-          <p:cNvPr id="13" name="Rounded Rectangle 12"/>
-          <p:cNvSpPr/>
-          <p:nvPr/>
-        </p:nvSpPr>
-        <p:spPr>
-          <a:xfrm>
-            <a:off x="1143000" y="4200525"/>
-            <a:ext cx="11430000" cy="1095375"/>
-          </a:xfrm>
-          <a:prstGeom prst="roundRect">
-            <a:avLst>
-              <a:gd name="adj" fmla="val 4347"/>
-            </a:avLst>
-          </a:prstGeom>
-          <a:solidFill>
-            <a:srgbClr val="FAFBFD"/>
-          </a:solidFill>
-          <a:ln w="9525">
-            <a:solidFill>
-              <a:srgbClr val="DCE1E8"/>
-            </a:solidFill>
-          </a:ln>
-          <a:effectLst/>
-        </p:spPr>
-        <p:txBody>
-          <a:bodyPr rtlCol="0" anchor="ctr" wrap="square"/>
-          <a:lstStyle/>
-          <a:p>
-            <a:pPr algn="ctr"/>
-          </a:p>
-        </p:txBody>
-      </p:sp>
-      <p:sp>
-        <p:nvSpPr>
-          <p:cNvPr id="14" name="Oval 13"/>
-          <p:cNvSpPr/>
-          <p:nvPr/>
-        </p:nvSpPr>
-        <p:spPr>
-          <a:xfrm>
-            <a:off x="1447800" y="4448175"/>
-            <a:ext cx="590550" cy="590550"/>
-          </a:xfrm>
-          <a:prstGeom prst="ellipse">
-            <a:avLst/>
-          </a:prstGeom>
-          <a:solidFill>
-            <a:srgbClr val="0D2B5E"/>
-          </a:solidFill>
-          <a:ln>
-            <a:noFill/>
-          </a:ln>
-          <a:effectLst/>
-        </p:spPr>
-        <p:txBody>
-          <a:bodyPr rtlCol="0" anchor="ctr" wrap="square"/>
-          <a:lstStyle/>
-          <a:p>
-            <a:pPr algn="ctr"/>
-          </a:p>
-        </p:txBody>
-      </p:sp>
-      <p:sp>
-        <p:nvSpPr>
-          <p:cNvPr id="15" name="TextBox 14"/>
-          <p:cNvSpPr txBox="1"/>
-          <p:nvPr/>
-        </p:nvSpPr>
-        <p:spPr>
-          <a:xfrm>
-            <a:off x="1447800" y="4600575"/>
-            <a:ext cx="590550" cy="323850"/>
-          </a:xfrm>
-          <a:prstGeom prst="rect">
-            <a:avLst/>
-          </a:prstGeom>
-          <a:noFill/>
-        </p:spPr>
-        <p:txBody>
-          <a:bodyPr wrap="square" lIns="0" rIns="0" tIns="0" bIns="0" anchor="t">
-            <a:spAutoFit/>
-          </a:bodyPr>
-          <a:lstStyle/>
-          <a:p>
-            <a:pPr algn="ctr">
-              <a:lnSpc>
-                <a:spcPct val="100000"/>
-              </a:lnSpc>
-            </a:pPr>
-            <a:r>
-              <a:rPr sz="2250" b="1">
-                <a:solidFill>
-                  <a:srgbClr val="FFFFFF"/>
-                </a:solidFill>
-                <a:latin typeface="Pretendard"/>
-                <a:ea typeface="Pretendard"/>
-                <a:cs typeface="Pretendard"/>
-              </a:rPr>
-              <a:t>2</a:t>
-            </a:r>
-          </a:p>
-        </p:txBody>
-      </p:sp>
-      <p:sp>
-        <p:nvSpPr>
-          <p:cNvPr id="16" name="TextBox 15"/>
-          <p:cNvSpPr txBox="1"/>
-          <p:nvPr/>
-        </p:nvSpPr>
-        <p:spPr>
-          <a:xfrm>
-            <a:off x="2324100" y="4410075"/>
-            <a:ext cx="9906000" cy="400050"/>
-          </a:xfrm>
-          <a:prstGeom prst="rect">
-            <a:avLst/>
-          </a:prstGeom>
-          <a:noFill/>
-        </p:spPr>
-        <p:txBody>
-          <a:bodyPr wrap="square" lIns="0" rIns="0" tIns="0" bIns="0" anchor="t">
-            <a:spAutoFit/>
-          </a:bodyPr>
-          <a:lstStyle/>
-          <a:p>
-            <a:pPr algn="l">
-              <a:lnSpc>
-                <a:spcPct val="110000"/>
-              </a:lnSpc>
-            </a:pPr>
-            <a:r>
-              <a:rPr sz="2475" b="1">
-                <a:solidFill>
-                  <a:srgbClr val="0D2B5E"/>
-                </a:solidFill>
-                <a:latin typeface="Pretendard"/>
-                <a:ea typeface="Pretendard"/>
-                <a:cs typeface="Pretendard"/>
-              </a:rPr>
-              <a:t>로그와 검증을 남긴다</a:t>
-            </a:r>
-          </a:p>
-        </p:txBody>
-      </p:sp>
-      <p:sp>
-        <p:nvSpPr>
-          <p:cNvPr id="17" name="TextBox 16"/>
-          <p:cNvSpPr txBox="1"/>
-          <p:nvPr/>
-        </p:nvSpPr>
-        <p:spPr>
-          <a:xfrm>
-            <a:off x="2324100" y="4810125"/>
-            <a:ext cx="9906000" cy="361950"/>
-          </a:xfrm>
-          <a:prstGeom prst="rect">
-            <a:avLst/>
-          </a:prstGeom>
-          <a:noFill/>
-        </p:spPr>
-        <p:txBody>
-          <a:bodyPr wrap="square" lIns="0" rIns="0" tIns="0" bIns="0" anchor="t">
-            <a:spAutoFit/>
-          </a:bodyPr>
-          <a:lstStyle/>
-          <a:p>
-            <a:pPr algn="l">
-              <a:lnSpc>
-                <a:spcPct val="120000"/>
-              </a:lnSpc>
-            </a:pPr>
-            <a:r>
-              <a:rPr sz="2025" b="0">
-                <a:solidFill>
-                  <a:srgbClr val="3D3D3D"/>
-                </a:solidFill>
-                <a:latin typeface="Pretendard"/>
-                <a:ea typeface="Pretendard"/>
-                <a:cs typeface="Pretendard"/>
-              </a:rPr>
-              <a:t>[mart] 원천 N행 · 마트 N행 — 원천이 0행이면 중단</a:t>
-            </a:r>
-          </a:p>
-        </p:txBody>
-      </p:sp>
-      <p:sp>
-        <p:nvSpPr>
-          <p:cNvPr id="18" name="Rounded Rectangle 17"/>
-          <p:cNvSpPr/>
-          <p:nvPr/>
-        </p:nvSpPr>
-        <p:spPr>
-          <a:xfrm>
-            <a:off x="1143000" y="5467350"/>
-            <a:ext cx="11430000" cy="1095375"/>
-          </a:xfrm>
-          <a:prstGeom prst="roundRect">
-            <a:avLst>
-              <a:gd name="adj" fmla="val 4347"/>
-            </a:avLst>
-          </a:prstGeom>
-          <a:solidFill>
-            <a:srgbClr val="FAFBFD"/>
-          </a:solidFill>
-          <a:ln w="9525">
-            <a:solidFill>
-              <a:srgbClr val="DCE1E8"/>
-            </a:solidFill>
-          </a:ln>
-          <a:effectLst/>
-        </p:spPr>
-        <p:txBody>
-          <a:bodyPr rtlCol="0" anchor="ctr" wrap="square"/>
-          <a:lstStyle/>
-          <a:p>
-            <a:pPr algn="ctr"/>
-          </a:p>
-        </p:txBody>
-      </p:sp>
-      <p:sp>
-        <p:nvSpPr>
-          <p:cNvPr id="19" name="Oval 18"/>
-          <p:cNvSpPr/>
-          <p:nvPr/>
-        </p:nvSpPr>
-        <p:spPr>
-          <a:xfrm>
-            <a:off x="1447800" y="5715000"/>
-            <a:ext cx="590550" cy="590550"/>
-          </a:xfrm>
-          <a:prstGeom prst="ellipse">
-            <a:avLst/>
-          </a:prstGeom>
-          <a:solidFill>
-            <a:srgbClr val="0D2B5E"/>
-          </a:solidFill>
-          <a:ln>
-            <a:noFill/>
-          </a:ln>
-          <a:effectLst/>
-        </p:spPr>
-        <p:txBody>
-          <a:bodyPr rtlCol="0" anchor="ctr" wrap="square"/>
-          <a:lstStyle/>
-          <a:p>
-            <a:pPr algn="ctr"/>
-          </a:p>
-        </p:txBody>
-      </p:sp>
-      <p:sp>
-        <p:nvSpPr>
-          <p:cNvPr id="20" name="TextBox 19"/>
-          <p:cNvSpPr txBox="1"/>
-          <p:nvPr/>
-        </p:nvSpPr>
-        <p:spPr>
-          <a:xfrm>
-            <a:off x="1447800" y="5867400"/>
-            <a:ext cx="590550" cy="323850"/>
-          </a:xfrm>
-          <a:prstGeom prst="rect">
-            <a:avLst/>
-          </a:prstGeom>
-          <a:noFill/>
-        </p:spPr>
-        <p:txBody>
-          <a:bodyPr wrap="square" lIns="0" rIns="0" tIns="0" bIns="0" anchor="t">
-            <a:spAutoFit/>
-          </a:bodyPr>
-          <a:lstStyle/>
-          <a:p>
-            <a:pPr algn="ctr">
-              <a:lnSpc>
-                <a:spcPct val="100000"/>
-              </a:lnSpc>
-            </a:pPr>
-            <a:r>
-              <a:rPr sz="2250" b="1">
-                <a:solidFill>
-                  <a:srgbClr val="FFFFFF"/>
-                </a:solidFill>
-                <a:latin typeface="Pretendard"/>
-                <a:ea typeface="Pretendard"/>
-                <a:cs typeface="Pretendard"/>
-              </a:rPr>
-              <a:t>3</a:t>
-            </a:r>
-          </a:p>
-        </p:txBody>
-      </p:sp>
-      <p:sp>
-        <p:nvSpPr>
-          <p:cNvPr id="21" name="TextBox 20"/>
-          <p:cNvSpPr txBox="1"/>
-          <p:nvPr/>
-        </p:nvSpPr>
-        <p:spPr>
-          <a:xfrm>
-            <a:off x="2324100" y="5676900"/>
-            <a:ext cx="9906000" cy="400050"/>
-          </a:xfrm>
-          <a:prstGeom prst="rect">
-            <a:avLst/>
-          </a:prstGeom>
-          <a:noFill/>
-        </p:spPr>
-        <p:txBody>
-          <a:bodyPr wrap="square" lIns="0" rIns="0" tIns="0" bIns="0" anchor="t">
-            <a:spAutoFit/>
-          </a:bodyPr>
-          <a:lstStyle/>
-          <a:p>
-            <a:pPr algn="l">
-              <a:lnSpc>
-                <a:spcPct val="110000"/>
-              </a:lnSpc>
-            </a:pPr>
-            <a:r>
-              <a:rPr sz="2475" b="1">
-                <a:solidFill>
-                  <a:srgbClr val="0D2B5E"/>
-                </a:solidFill>
-                <a:latin typeface="Pretendard"/>
-                <a:ea typeface="Pretendard"/>
-                <a:cs typeface="Pretendard"/>
-              </a:rPr>
-              <a:t>종료 코드로 알린다</a:t>
-            </a:r>
-          </a:p>
-        </p:txBody>
-      </p:sp>
-      <p:sp>
-        <p:nvSpPr>
-          <p:cNvPr id="22" name="TextBox 21"/>
-          <p:cNvSpPr txBox="1"/>
-          <p:nvPr/>
-        </p:nvSpPr>
-        <p:spPr>
-          <a:xfrm>
-            <a:off x="2324100" y="6076950"/>
-            <a:ext cx="9906000" cy="361950"/>
-          </a:xfrm>
-          <a:prstGeom prst="rect">
-            <a:avLst/>
-          </a:prstGeom>
-          <a:noFill/>
-        </p:spPr>
-        <p:txBody>
-          <a:bodyPr wrap="square" lIns="0" rIns="0" tIns="0" bIns="0" anchor="t">
-            <a:spAutoFit/>
-          </a:bodyPr>
-          <a:lstStyle/>
-          <a:p>
-            <a:pPr algn="l">
-              <a:lnSpc>
-                <a:spcPct val="120000"/>
-              </a:lnSpc>
-            </a:pPr>
-            <a:r>
-              <a:rPr sz="2025" b="0">
-                <a:solidFill>
-                  <a:srgbClr val="3D3D3D"/>
-                </a:solidFill>
-                <a:latin typeface="Pretendard"/>
-                <a:ea typeface="Pretendard"/>
-                <a:cs typeface="Pretendard"/>
-              </a:rPr>
-              <a:t>sys.exit(1) — 8주차 Airflow 가 이 값을 보고 재시도 여부를 정한다</a:t>
-            </a:r>
-          </a:p>
-        </p:txBody>
-      </p:sp>
-      <p:sp>
-        <p:nvSpPr>
-          <p:cNvPr id="23" name="Rounded Rectangle 22"/>
-          <p:cNvSpPr/>
-          <p:nvPr/>
-        </p:nvSpPr>
-        <p:spPr>
-          <a:xfrm>
-            <a:off x="13144500" y="2933700"/>
-            <a:ext cx="4000500" cy="3629025"/>
-          </a:xfrm>
-          <a:prstGeom prst="roundRect">
-            <a:avLst>
-              <a:gd name="adj" fmla="val 1312"/>
-            </a:avLst>
-          </a:prstGeom>
-          <a:solidFill>
-            <a:srgbClr val="EDF3FD"/>
-          </a:solidFill>
-          <a:ln w="9525">
-            <a:solidFill>
-              <a:srgbClr val="BFD3F5"/>
-            </a:solidFill>
-          </a:ln>
-          <a:effectLst/>
-        </p:spPr>
-        <p:txBody>
-          <a:bodyPr rtlCol="0" anchor="ctr" wrap="square"/>
-          <a:lstStyle/>
-          <a:p>
-            <a:pPr algn="ctr"/>
+              <a:t>데이터 엔지니어링 &amp; RAG 파이프라인 160H · 5-5 · 실습 1H</a:t>
+            </a:r>
           </a:p>
         </p:txBody>
       </p:sp>
       <p:sp>
         <p:nvSpPr>
           <p:cNvPr id="24" name="TextBox 23"/>
-          <p:cNvSpPr txBox="1"/>
-          <p:nvPr/>
-        </p:nvSpPr>
-        <p:spPr>
-          <a:xfrm>
-            <a:off x="13487400" y="3929062"/>
-            <a:ext cx="3314700" cy="304800"/>
-          </a:xfrm>
-          <a:prstGeom prst="rect">
-            <a:avLst/>
-          </a:prstGeom>
-          <a:noFill/>
-        </p:spPr>
-        <p:txBody>
-          <a:bodyPr wrap="square" lIns="0" rIns="0" tIns="0" bIns="0" anchor="t">
-            <a:spAutoFit/>
-          </a:bodyPr>
-          <a:lstStyle/>
-          <a:p>
-            <a:pPr algn="l">
-              <a:lnSpc>
-                <a:spcPct val="100000"/>
-              </a:lnSpc>
-            </a:pPr>
-            <a:r>
-              <a:rPr sz="1800" b="1" spc="190">
-                <a:solidFill>
-                  <a:srgbClr val="1E5BC6"/>
-                </a:solidFill>
-                <a:latin typeface="Pretendard"/>
-                <a:ea typeface="Pretendard"/>
-                <a:cs typeface="Pretendard"/>
-              </a:rPr>
-              <a:t>grep 으로 골라 볼 글자</a:t>
-            </a:r>
-          </a:p>
-        </p:txBody>
-      </p:sp>
-      <p:sp>
-        <p:nvSpPr>
-          <p:cNvPr id="25" name="TextBox 24"/>
-          <p:cNvSpPr txBox="1"/>
-          <p:nvPr/>
-        </p:nvSpPr>
-        <p:spPr>
-          <a:xfrm>
-            <a:off x="13487400" y="4329112"/>
-            <a:ext cx="3314700" cy="1238250"/>
-          </a:xfrm>
-          <a:prstGeom prst="rect">
-            <a:avLst/>
-          </a:prstGeom>
-          <a:noFill/>
-        </p:spPr>
-        <p:txBody>
-          <a:bodyPr wrap="square" lIns="0" rIns="0" tIns="0" bIns="0" anchor="t">
-            <a:spAutoFit/>
-          </a:bodyPr>
-          <a:lstStyle/>
-          <a:p>
-            <a:pPr algn="l">
-              <a:lnSpc>
-                <a:spcPct val="138000"/>
-              </a:lnSpc>
-            </a:pPr>
-            <a:r>
-              <a:rPr sz="2700" b="1">
-                <a:solidFill>
-                  <a:srgbClr val="0D2B5E"/>
-                </a:solidFill>
-                <a:latin typeface="Pretendard"/>
-                <a:ea typeface="Pretendard"/>
-                <a:cs typeface="Pretendard"/>
-              </a:rPr>
-              <a:t>[mart]</a:t>
-            </a:r>
-          </a:p>
-        </p:txBody>
-      </p:sp>
-      <p:sp>
-        <p:nvSpPr>
-          <p:cNvPr id="26" name="Rectangle 25"/>
-          <p:cNvSpPr/>
-          <p:nvPr/>
-        </p:nvSpPr>
-        <p:spPr>
-          <a:xfrm>
-            <a:off x="1143000" y="7581900"/>
-            <a:ext cx="38100" cy="323850"/>
-          </a:xfrm>
-          <a:prstGeom prst="rect">
-            <a:avLst/>
-          </a:prstGeom>
-          <a:solidFill>
-            <a:srgbClr val="BFD3F5"/>
-          </a:solidFill>
-          <a:ln>
-            <a:noFill/>
-          </a:ln>
-          <a:effectLst/>
-        </p:spPr>
-        <p:txBody>
-          <a:bodyPr rtlCol="0" anchor="ctr" wrap="square"/>
-          <a:lstStyle/>
-          <a:p>
-            <a:pPr algn="ctr"/>
-          </a:p>
-        </p:txBody>
-      </p:sp>
-      <p:sp>
-        <p:nvSpPr>
-          <p:cNvPr id="27" name="TextBox 26"/>
-          <p:cNvSpPr txBox="1"/>
-          <p:nvPr/>
-        </p:nvSpPr>
-        <p:spPr>
-          <a:xfrm>
-            <a:off x="1314450" y="7581900"/>
-            <a:ext cx="15830550" cy="342900"/>
-          </a:xfrm>
-          <a:prstGeom prst="rect">
-            <a:avLst/>
-          </a:prstGeom>
-          <a:noFill/>
-        </p:spPr>
-        <p:txBody>
-          <a:bodyPr wrap="square" lIns="0" rIns="0" tIns="0" bIns="0" anchor="t">
-            <a:spAutoFit/>
-          </a:bodyPr>
-          <a:lstStyle/>
-          <a:p>
-            <a:pPr algn="l">
-              <a:lnSpc>
-                <a:spcPct val="100000"/>
-              </a:lnSpc>
-            </a:pPr>
-            <a:r>
-              <a:rPr sz="1725" b="1">
-                <a:solidFill>
-                  <a:srgbClr val="7D7D7D"/>
-                </a:solidFill>
-                <a:latin typeface="Pretendard"/>
-                <a:ea typeface="Pretendard"/>
-                <a:cs typeface="Pretendard"/>
-              </a:rPr>
-              <a:t>1-2 에서 배운 종료 코드가 여기서도 쓰인다 — 배치는 사람이 아니라 스케줄러가 읽는다</a:t>
-            </a:r>
-          </a:p>
-        </p:txBody>
-      </p:sp>
-      <p:sp>
-        <p:nvSpPr>
-          <p:cNvPr id="28" name="Rectangle 27"/>
-          <p:cNvSpPr/>
-          <p:nvPr/>
-        </p:nvSpPr>
-        <p:spPr>
-          <a:xfrm>
-            <a:off x="1143000" y="8058150"/>
-            <a:ext cx="16002000" cy="9525"/>
-          </a:xfrm>
-          <a:prstGeom prst="rect">
-            <a:avLst/>
-          </a:prstGeom>
-          <a:solidFill>
-            <a:srgbClr val="DCE1E8"/>
-          </a:solidFill>
-          <a:ln>
-            <a:noFill/>
-          </a:ln>
-          <a:effectLst/>
-        </p:spPr>
-        <p:txBody>
-          <a:bodyPr rtlCol="0" anchor="ctr" wrap="square"/>
-          <a:lstStyle/>
-          <a:p>
-            <a:pPr algn="ctr"/>
-          </a:p>
-        </p:txBody>
-      </p:sp>
-      <p:sp>
-        <p:nvSpPr>
-          <p:cNvPr id="29" name="TextBox 28"/>
-          <p:cNvSpPr txBox="1"/>
-          <p:nvPr/>
-        </p:nvSpPr>
-        <p:spPr>
-          <a:xfrm>
-            <a:off x="1143000" y="8248650"/>
-            <a:ext cx="13335000" cy="323850"/>
-          </a:xfrm>
-          <a:prstGeom prst="rect">
-            <a:avLst/>
-          </a:prstGeom>
-          <a:noFill/>
-        </p:spPr>
-        <p:txBody>
-          <a:bodyPr wrap="square" lIns="0" rIns="0" tIns="0" bIns="0" anchor="t">
-            <a:spAutoFit/>
-          </a:bodyPr>
-          <a:lstStyle/>
-          <a:p>
-            <a:pPr algn="l">
-              <a:lnSpc>
-                <a:spcPct val="100000"/>
-              </a:lnSpc>
-            </a:pPr>
-            <a:r>
-              <a:rPr sz="1725" b="0">
-                <a:solidFill>
-                  <a:srgbClr val="7D7D7D"/>
-                </a:solidFill>
-                <a:latin typeface="Pretendard"/>
-                <a:ea typeface="Pretendard"/>
-                <a:cs typeface="Pretendard"/>
-              </a:rPr>
-              <a:t>데이터 엔지니어링 &amp; RAG 파이프라인 160H · 5-5 · 실습 1H</a:t>
-            </a:r>
-          </a:p>
-        </p:txBody>
-      </p:sp>
-      <p:sp>
-        <p:nvSpPr>
-          <p:cNvPr id="30" name="TextBox 29"/>
           <p:cNvSpPr txBox="1"/>
           <p:nvPr/>
         </p:nvSpPr>
@@ -12111,7 +12866,7 @@
       <p:grpSpPr/>
       <p:sp>
         <p:nvSpPr>
-          <p:cNvPr id="2" name="Oval 1"/>
+          <p:cNvPr id="2" name="deckgen:decor"/>
           <p:cNvSpPr/>
           <p:nvPr/>
         </p:nvSpPr>
@@ -12141,7 +12896,7 @@
       </p:sp>
       <p:sp>
         <p:nvSpPr>
-          <p:cNvPr id="3" name="Oval 2"/>
+          <p:cNvPr id="3" name="deckgen:decor"/>
           <p:cNvSpPr/>
           <p:nvPr/>
         </p:nvSpPr>
@@ -12171,7 +12926,7 @@
       </p:sp>
       <p:sp>
         <p:nvSpPr>
-          <p:cNvPr id="4" name="Oval 3"/>
+          <p:cNvPr id="4" name="deckgen:decor"/>
           <p:cNvSpPr/>
           <p:nvPr/>
         </p:nvSpPr>
@@ -12276,7 +13031,7 @@
                 <a:ea typeface="Pretendard"/>
                 <a:cs typeface="Pretendard"/>
               </a:rPr>
-              <a:t>있는 날짜와 없는 날짜 — 실패로 끝나야 한다</a:t>
+              <a:t>인자를 바꿔 세 번 — 종료 코드를 읽는다</a:t>
             </a:r>
           </a:p>
         </p:txBody>
@@ -12313,14 +13068,44 @@
       </p:sp>
       <p:sp>
         <p:nvSpPr>
-          <p:cNvPr id="8" name="TextBox 7"/>
+          <p:cNvPr id="8" name="Rectangle 7"/>
+          <p:cNvSpPr/>
+          <p:nvPr/>
+        </p:nvSpPr>
+        <p:spPr>
+          <a:xfrm>
+            <a:off x="1143000" y="2781300"/>
+            <a:ext cx="3962400" cy="590550"/>
+          </a:xfrm>
+          <a:prstGeom prst="rect">
+            <a:avLst/>
+          </a:prstGeom>
+          <a:solidFill>
+            <a:srgbClr val="0D2B5E"/>
+          </a:solidFill>
+          <a:ln>
+            <a:noFill/>
+          </a:ln>
+          <a:effectLst/>
+        </p:spPr>
+        <p:txBody>
+          <a:bodyPr rtlCol="0" anchor="ctr" wrap="square"/>
+          <a:lstStyle/>
+          <a:p>
+            <a:pPr algn="ctr"/>
+          </a:p>
+        </p:txBody>
+      </p:sp>
+      <p:sp>
+        <p:nvSpPr>
+          <p:cNvPr id="9" name="TextBox 8"/>
           <p:cNvSpPr txBox="1"/>
           <p:nvPr/>
         </p:nvSpPr>
         <p:spPr>
           <a:xfrm>
-            <a:off x="1143000" y="2857500"/>
-            <a:ext cx="7372350" cy="533400"/>
+            <a:off x="1143000" y="2781300"/>
+            <a:ext cx="3962400" cy="590550"/>
           </a:xfrm>
           <a:prstGeom prst="rect">
             <a:avLst/>
@@ -12328,40 +13113,70 @@
           <a:noFill/>
         </p:spPr>
         <p:txBody>
-          <a:bodyPr wrap="square" lIns="0" rIns="0" tIns="0" bIns="0" anchor="t">
+          <a:bodyPr wrap="square" lIns="0" rIns="0" tIns="0" bIns="0" anchor="ctr">
             <a:spAutoFit/>
           </a:bodyPr>
           <a:lstStyle/>
           <a:p>
-            <a:pPr algn="l">
-              <a:lnSpc>
-                <a:spcPct val="110000"/>
-              </a:lnSpc>
-            </a:pPr>
-            <a:r>
-              <a:rPr sz="3150" b="1">
-                <a:solidFill>
-                  <a:srgbClr val="0D2B5E"/>
+            <a:pPr algn="ctr">
+              <a:lnSpc>
+                <a:spcPct val="100000"/>
+              </a:lnSpc>
+            </a:pPr>
+            <a:r>
+              <a:rPr sz="2025" b="1">
+                <a:solidFill>
+                  <a:srgbClr val="FFFFFF"/>
                 </a:solidFill>
                 <a:latin typeface="Pretendard"/>
                 <a:ea typeface="Pretendard"/>
                 <a:cs typeface="Pretendard"/>
               </a:rPr>
-              <a:t>2026-08-25 — 있는 날짜</a:t>
-            </a:r>
-          </a:p>
-        </p:txBody>
-      </p:sp>
-      <p:sp>
-        <p:nvSpPr>
-          <p:cNvPr id="9" name="TextBox 8"/>
+              <a:t>인자</a:t>
+            </a:r>
+          </a:p>
+        </p:txBody>
+      </p:sp>
+      <p:sp>
+        <p:nvSpPr>
+          <p:cNvPr id="10" name="Rectangle 9"/>
+          <p:cNvSpPr/>
+          <p:nvPr/>
+        </p:nvSpPr>
+        <p:spPr>
+          <a:xfrm>
+            <a:off x="5143500" y="2781300"/>
+            <a:ext cx="3162300" cy="590550"/>
+          </a:xfrm>
+          <a:prstGeom prst="rect">
+            <a:avLst/>
+          </a:prstGeom>
+          <a:solidFill>
+            <a:srgbClr val="1E5BC6"/>
+          </a:solidFill>
+          <a:ln>
+            <a:noFill/>
+          </a:ln>
+          <a:effectLst/>
+        </p:spPr>
+        <p:txBody>
+          <a:bodyPr rtlCol="0" anchor="ctr" wrap="square"/>
+          <a:lstStyle/>
+          <a:p>
+            <a:pPr algn="ctr"/>
+          </a:p>
+        </p:txBody>
+      </p:sp>
+      <p:sp>
+        <p:nvSpPr>
+          <p:cNvPr id="11" name="TextBox 10"/>
           <p:cNvSpPr txBox="1"/>
           <p:nvPr/>
         </p:nvSpPr>
         <p:spPr>
           <a:xfrm>
-            <a:off x="1143000" y="3467100"/>
-            <a:ext cx="7372350" cy="876300"/>
+            <a:off x="5143500" y="2781300"/>
+            <a:ext cx="3162300" cy="590550"/>
           </a:xfrm>
           <a:prstGeom prst="rect">
             <a:avLst/>
@@ -12369,44 +13184,190 @@
           <a:noFill/>
         </p:spPr>
         <p:txBody>
-          <a:bodyPr wrap="square" lIns="0" rIns="0" tIns="0" bIns="0" anchor="t">
+          <a:bodyPr wrap="square" lIns="0" rIns="0" tIns="0" bIns="0" anchor="ctr">
             <a:spAutoFit/>
           </a:bodyPr>
           <a:lstStyle/>
           <a:p>
-            <a:pPr algn="l">
-              <a:lnSpc>
-                <a:spcPct val="146000"/>
-              </a:lnSpc>
-            </a:pPr>
-            <a:r>
-              <a:rPr sz="2250" b="0">
-                <a:solidFill>
-                  <a:srgbClr val="3D3D3D"/>
+            <a:pPr algn="ctr">
+              <a:lnSpc>
+                <a:spcPct val="100000"/>
+              </a:lnSpc>
+            </a:pPr>
+            <a:r>
+              <a:rPr sz="2025" b="1">
+                <a:solidFill>
+                  <a:srgbClr val="FFFFFF"/>
                 </a:solidFill>
                 <a:latin typeface="Pretendard"/>
                 <a:ea typeface="Pretendard"/>
                 <a:cs typeface="Pretendard"/>
               </a:rPr>
-              <a:t>그 날짜만 처리 · 마트 1행 · 정상 종료</a:t>
-            </a:r>
-          </a:p>
-        </p:txBody>
-      </p:sp>
-      <p:sp>
-        <p:nvSpPr>
-          <p:cNvPr id="10" name="Rounded Rectangle 9"/>
-          <p:cNvSpPr/>
-          <p:nvPr/>
-        </p:nvSpPr>
-        <p:spPr>
-          <a:xfrm>
-            <a:off x="1143000" y="4610100"/>
-            <a:ext cx="7372350" cy="2857500"/>
+              <a:t>종료 코드</a:t>
+            </a:r>
+          </a:p>
+        </p:txBody>
+      </p:sp>
+      <p:sp>
+        <p:nvSpPr>
+          <p:cNvPr id="12" name="Rectangle 11"/>
+          <p:cNvSpPr/>
+          <p:nvPr/>
+        </p:nvSpPr>
+        <p:spPr>
+          <a:xfrm>
+            <a:off x="8343900" y="2781300"/>
+            <a:ext cx="8801100" cy="590550"/>
+          </a:xfrm>
+          <a:prstGeom prst="rect">
+            <a:avLst/>
+          </a:prstGeom>
+          <a:solidFill>
+            <a:srgbClr val="1E5BC6"/>
+          </a:solidFill>
+          <a:ln>
+            <a:noFill/>
+          </a:ln>
+          <a:effectLst/>
+        </p:spPr>
+        <p:txBody>
+          <a:bodyPr rtlCol="0" anchor="ctr" wrap="square"/>
+          <a:lstStyle/>
+          <a:p>
+            <a:pPr algn="ctr"/>
+          </a:p>
+        </p:txBody>
+      </p:sp>
+      <p:sp>
+        <p:nvSpPr>
+          <p:cNvPr id="13" name="TextBox 12"/>
+          <p:cNvSpPr txBox="1"/>
+          <p:nvPr/>
+        </p:nvSpPr>
+        <p:spPr>
+          <a:xfrm>
+            <a:off x="8343900" y="2781300"/>
+            <a:ext cx="8801100" cy="590550"/>
+          </a:xfrm>
+          <a:prstGeom prst="rect">
+            <a:avLst/>
+          </a:prstGeom>
+          <a:noFill/>
+        </p:spPr>
+        <p:txBody>
+          <a:bodyPr wrap="square" lIns="0" rIns="0" tIns="0" bIns="0" anchor="ctr">
+            <a:spAutoFit/>
+          </a:bodyPr>
+          <a:lstStyle/>
+          <a:p>
+            <a:pPr algn="ctr">
+              <a:lnSpc>
+                <a:spcPct val="100000"/>
+              </a:lnSpc>
+            </a:pPr>
+            <a:r>
+              <a:rPr sz="2025" b="1">
+                <a:solidFill>
+                  <a:srgbClr val="FFFFFF"/>
+                </a:solidFill>
+                <a:latin typeface="Pretendard"/>
+                <a:ea typeface="Pretendard"/>
+                <a:cs typeface="Pretendard"/>
+              </a:rPr>
+              <a:t>[mart] 로그</a:t>
+            </a:r>
+          </a:p>
+        </p:txBody>
+      </p:sp>
+      <p:sp>
+        <p:nvSpPr>
+          <p:cNvPr id="14" name="Rounded Rectangle 13"/>
+          <p:cNvSpPr/>
+          <p:nvPr/>
+        </p:nvSpPr>
+        <p:spPr>
+          <a:xfrm>
+            <a:off x="1143000" y="3448050"/>
+            <a:ext cx="3962400" cy="647700"/>
           </a:xfrm>
           <a:prstGeom prst="roundRect">
             <a:avLst>
-              <a:gd name="adj" fmla="val 1666"/>
+              <a:gd name="adj" fmla="val 5882"/>
+            </a:avLst>
+          </a:prstGeom>
+          <a:solidFill>
+            <a:srgbClr val="EDF3FD"/>
+          </a:solidFill>
+          <a:ln w="9525">
+            <a:solidFill>
+              <a:srgbClr val="BFD3F5"/>
+            </a:solidFill>
+          </a:ln>
+          <a:effectLst/>
+        </p:spPr>
+        <p:txBody>
+          <a:bodyPr rtlCol="0" anchor="ctr" wrap="square"/>
+          <a:lstStyle/>
+          <a:p>
+            <a:pPr algn="ctr"/>
+          </a:p>
+        </p:txBody>
+      </p:sp>
+      <p:sp>
+        <p:nvSpPr>
+          <p:cNvPr id="15" name="TextBox 14"/>
+          <p:cNvSpPr txBox="1"/>
+          <p:nvPr/>
+        </p:nvSpPr>
+        <p:spPr>
+          <a:xfrm>
+            <a:off x="1238250" y="3448050"/>
+            <a:ext cx="3771900" cy="647700"/>
+          </a:xfrm>
+          <a:prstGeom prst="rect">
+            <a:avLst/>
+          </a:prstGeom>
+          <a:noFill/>
+        </p:spPr>
+        <p:txBody>
+          <a:bodyPr wrap="square" lIns="0" rIns="0" tIns="0" bIns="0" anchor="ctr">
+            <a:spAutoFit/>
+          </a:bodyPr>
+          <a:lstStyle/>
+          <a:p>
+            <a:pPr algn="l">
+              <a:lnSpc>
+                <a:spcPct val="115000"/>
+              </a:lnSpc>
+            </a:pPr>
+            <a:r>
+              <a:rPr sz="1875" b="1">
+                <a:solidFill>
+                  <a:srgbClr val="0D2B5E"/>
+                </a:solidFill>
+                <a:latin typeface="Pretendard"/>
+                <a:ea typeface="Pretendard"/>
+                <a:cs typeface="Pretendard"/>
+              </a:rPr>
+              <a:t>2026-08-25</a:t>
+            </a:r>
+          </a:p>
+        </p:txBody>
+      </p:sp>
+      <p:sp>
+        <p:nvSpPr>
+          <p:cNvPr id="16" name="Rounded Rectangle 15"/>
+          <p:cNvSpPr/>
+          <p:nvPr/>
+        </p:nvSpPr>
+        <p:spPr>
+          <a:xfrm>
+            <a:off x="5143500" y="3448050"/>
+            <a:ext cx="3162300" cy="647700"/>
+          </a:xfrm>
+          <a:prstGeom prst="roundRect">
+            <a:avLst>
+              <a:gd name="adj" fmla="val 5882"/>
             </a:avLst>
           </a:prstGeom>
           <a:solidFill>
@@ -12429,44 +13390,14 @@
       </p:sp>
       <p:sp>
         <p:nvSpPr>
-          <p:cNvPr id="11" name="Rectangle 10"/>
-          <p:cNvSpPr/>
-          <p:nvPr/>
-        </p:nvSpPr>
-        <p:spPr>
-          <a:xfrm>
-            <a:off x="1390650" y="4838700"/>
-            <a:ext cx="2152015" cy="599122"/>
-          </a:xfrm>
-          <a:prstGeom prst="rect">
-            <a:avLst/>
-          </a:prstGeom>
-          <a:solidFill>
-            <a:srgbClr val="0D2B5E"/>
-          </a:solidFill>
-          <a:ln>
-            <a:noFill/>
-          </a:ln>
-          <a:effectLst/>
-        </p:spPr>
-        <p:txBody>
-          <a:bodyPr rtlCol="0" anchor="ctr" wrap="square"/>
-          <a:lstStyle/>
-          <a:p>
-            <a:pPr algn="ctr"/>
-          </a:p>
-        </p:txBody>
-      </p:sp>
-      <p:sp>
-        <p:nvSpPr>
-          <p:cNvPr id="12" name="TextBox 11"/>
+          <p:cNvPr id="17" name="TextBox 16"/>
           <p:cNvSpPr txBox="1"/>
           <p:nvPr/>
         </p:nvSpPr>
         <p:spPr>
           <a:xfrm>
-            <a:off x="1390650" y="4838700"/>
-            <a:ext cx="2152015" cy="599122"/>
+            <a:off x="5238750" y="3448050"/>
+            <a:ext cx="2971800" cy="647700"/>
           </a:xfrm>
           <a:prstGeom prst="rect">
             <a:avLst/>
@@ -12481,37 +13412,37 @@
           <a:p>
             <a:pPr algn="ctr">
               <a:lnSpc>
-                <a:spcPct val="100000"/>
-              </a:lnSpc>
-            </a:pPr>
-            <a:r>
-              <a:rPr sz="2025" b="1">
-                <a:solidFill>
-                  <a:srgbClr val="FFFFFF"/>
+                <a:spcPct val="115000"/>
+              </a:lnSpc>
+            </a:pPr>
+            <a:r>
+              <a:rPr sz="1875" b="0">
+                <a:solidFill>
+                  <a:srgbClr val="3D3D3D"/>
                 </a:solidFill>
                 <a:latin typeface="Pretendard"/>
                 <a:ea typeface="Pretendard"/>
                 <a:cs typeface="Pretendard"/>
               </a:rPr>
-              <a:t>대상 날짜</a:t>
-            </a:r>
-          </a:p>
-        </p:txBody>
-      </p:sp>
-      <p:sp>
-        <p:nvSpPr>
-          <p:cNvPr id="13" name="Rounded Rectangle 12"/>
-          <p:cNvSpPr/>
-          <p:nvPr/>
-        </p:nvSpPr>
-        <p:spPr>
-          <a:xfrm>
-            <a:off x="1390650" y="5583555"/>
-            <a:ext cx="2152015" cy="1214438"/>
+              <a:t>0</a:t>
+            </a:r>
+          </a:p>
+        </p:txBody>
+      </p:sp>
+      <p:sp>
+        <p:nvSpPr>
+          <p:cNvPr id="18" name="Rounded Rectangle 17"/>
+          <p:cNvSpPr/>
+          <p:nvPr/>
+        </p:nvSpPr>
+        <p:spPr>
+          <a:xfrm>
+            <a:off x="8343900" y="3448050"/>
+            <a:ext cx="8801100" cy="647700"/>
           </a:xfrm>
           <a:prstGeom prst="roundRect">
             <a:avLst>
-              <a:gd name="adj" fmla="val 3921"/>
+              <a:gd name="adj" fmla="val 5882"/>
             </a:avLst>
           </a:prstGeom>
           <a:solidFill>
@@ -12534,14 +13465,14 @@
       </p:sp>
       <p:sp>
         <p:nvSpPr>
-          <p:cNvPr id="14" name="TextBox 13"/>
+          <p:cNvPr id="19" name="TextBox 18"/>
           <p:cNvSpPr txBox="1"/>
           <p:nvPr/>
         </p:nvSpPr>
         <p:spPr>
           <a:xfrm>
-            <a:off x="1524000" y="5583555"/>
-            <a:ext cx="1885315" cy="1214438"/>
+            <a:off x="8439150" y="3448050"/>
+            <a:ext cx="8610600" cy="647700"/>
           </a:xfrm>
           <a:prstGeom prst="rect">
             <a:avLst/>
@@ -12556,11 +13487,11 @@
           <a:p>
             <a:pPr algn="ctr">
               <a:lnSpc>
-                <a:spcPct val="135000"/>
-              </a:lnSpc>
-            </a:pPr>
-            <a:r>
-              <a:rPr sz="1500" b="0">
+                <a:spcPct val="115000"/>
+              </a:lnSpc>
+            </a:pPr>
+            <a:r>
+              <a:rPr sz="1875" b="0">
                 <a:solidFill>
                   <a:srgbClr val="3D3D3D"/>
                 </a:solidFill>
@@ -12568,81 +13499,55 @@
                 <a:ea typeface="Pretendard"/>
                 <a:cs typeface="Pretendard"/>
               </a:rPr>
-              <a:t>2026-08-25</a:t>
-            </a:r>
-          </a:p>
-        </p:txBody>
-      </p:sp>
-      <p:sp>
-        <p:nvSpPr>
-          <p:cNvPr id="15" name="Right Arrow 14"/>
-          <p:cNvSpPr/>
-          <p:nvPr/>
-        </p:nvSpPr>
-        <p:spPr>
-          <a:xfrm>
-            <a:off x="3561715" y="5049202"/>
-            <a:ext cx="172402" cy="178118"/>
-          </a:xfrm>
-          <a:prstGeom prst="rightArrow">
-            <a:avLst/>
-          </a:prstGeom>
-          <a:solidFill>
-            <a:srgbClr val="1E5BC6"/>
-          </a:solidFill>
-          <a:ln>
-            <a:noFill/>
-          </a:ln>
-          <a:effectLst/>
-        </p:spPr>
-        <p:txBody>
-          <a:bodyPr rtlCol="0" anchor="ctr" wrap="square"/>
-          <a:lstStyle/>
-          <a:p>
-            <a:pPr algn="ctr"/>
-          </a:p>
-        </p:txBody>
-      </p:sp>
-      <p:sp>
-        <p:nvSpPr>
-          <p:cNvPr id="16" name="Rectangle 15"/>
-          <p:cNvSpPr/>
-          <p:nvPr/>
-        </p:nvSpPr>
-        <p:spPr>
-          <a:xfrm>
-            <a:off x="3753167" y="4838700"/>
-            <a:ext cx="2152015" cy="599122"/>
-          </a:xfrm>
-          <a:prstGeom prst="rect">
-            <a:avLst/>
-          </a:prstGeom>
-          <a:solidFill>
-            <a:srgbClr val="1E5BC6"/>
-          </a:solidFill>
-          <a:ln>
-            <a:noFill/>
-          </a:ln>
-          <a:effectLst/>
-        </p:spPr>
-        <p:txBody>
-          <a:bodyPr rtlCol="0" anchor="ctr" wrap="square"/>
-          <a:lstStyle/>
-          <a:p>
-            <a:pPr algn="ctr"/>
-          </a:p>
-        </p:txBody>
-      </p:sp>
-      <p:sp>
-        <p:nvSpPr>
-          <p:cNvPr id="17" name="TextBox 16"/>
+              <a:t>원천 2행 · 마트 1행 · 완료</a:t>
+            </a:r>
+          </a:p>
+        </p:txBody>
+      </p:sp>
+      <p:sp>
+        <p:nvSpPr>
+          <p:cNvPr id="20" name="Rounded Rectangle 19"/>
+          <p:cNvSpPr/>
+          <p:nvPr/>
+        </p:nvSpPr>
+        <p:spPr>
+          <a:xfrm>
+            <a:off x="1143000" y="4171950"/>
+            <a:ext cx="3962400" cy="647700"/>
+          </a:xfrm>
+          <a:prstGeom prst="roundRect">
+            <a:avLst>
+              <a:gd name="adj" fmla="val 5882"/>
+            </a:avLst>
+          </a:prstGeom>
+          <a:solidFill>
+            <a:srgbClr val="EDF3FD"/>
+          </a:solidFill>
+          <a:ln w="9525">
+            <a:solidFill>
+              <a:srgbClr val="BFD3F5"/>
+            </a:solidFill>
+          </a:ln>
+          <a:effectLst/>
+        </p:spPr>
+        <p:txBody>
+          <a:bodyPr rtlCol="0" anchor="ctr" wrap="square"/>
+          <a:lstStyle/>
+          <a:p>
+            <a:pPr algn="ctr"/>
+          </a:p>
+        </p:txBody>
+      </p:sp>
+      <p:sp>
+        <p:nvSpPr>
+          <p:cNvPr id="21" name="TextBox 20"/>
           <p:cNvSpPr txBox="1"/>
           <p:nvPr/>
         </p:nvSpPr>
         <p:spPr>
           <a:xfrm>
-            <a:off x="3753167" y="4838700"/>
-            <a:ext cx="2152015" cy="599122"/>
+            <a:off x="1238250" y="4171950"/>
+            <a:ext cx="3771900" cy="647700"/>
           </a:xfrm>
           <a:prstGeom prst="rect">
             <a:avLst/>
@@ -12655,39 +13560,39 @@
           </a:bodyPr>
           <a:lstStyle/>
           <a:p>
-            <a:pPr algn="ctr">
-              <a:lnSpc>
-                <a:spcPct val="100000"/>
-              </a:lnSpc>
-            </a:pPr>
-            <a:r>
-              <a:rPr sz="2025" b="1">
-                <a:solidFill>
-                  <a:srgbClr val="FFFFFF"/>
+            <a:pPr algn="l">
+              <a:lnSpc>
+                <a:spcPct val="115000"/>
+              </a:lnSpc>
+            </a:pPr>
+            <a:r>
+              <a:rPr sz="1875" b="1">
+                <a:solidFill>
+                  <a:srgbClr val="0D2B5E"/>
                 </a:solidFill>
                 <a:latin typeface="Pretendard"/>
                 <a:ea typeface="Pretendard"/>
                 <a:cs typeface="Pretendard"/>
               </a:rPr>
-              <a:t>원천 2행</a:t>
-            </a:r>
-          </a:p>
-        </p:txBody>
-      </p:sp>
-      <p:sp>
-        <p:nvSpPr>
-          <p:cNvPr id="18" name="Rounded Rectangle 17"/>
-          <p:cNvSpPr/>
-          <p:nvPr/>
-        </p:nvSpPr>
-        <p:spPr>
-          <a:xfrm>
-            <a:off x="3753167" y="5583555"/>
-            <a:ext cx="2152015" cy="1214438"/>
+              <a:t>2099-01-01</a:t>
+            </a:r>
+          </a:p>
+        </p:txBody>
+      </p:sp>
+      <p:sp>
+        <p:nvSpPr>
+          <p:cNvPr id="22" name="Rounded Rectangle 21"/>
+          <p:cNvSpPr/>
+          <p:nvPr/>
+        </p:nvSpPr>
+        <p:spPr>
+          <a:xfrm>
+            <a:off x="5143500" y="4171950"/>
+            <a:ext cx="3162300" cy="647700"/>
           </a:xfrm>
           <a:prstGeom prst="roundRect">
             <a:avLst>
-              <a:gd name="adj" fmla="val 3921"/>
+              <a:gd name="adj" fmla="val 5882"/>
             </a:avLst>
           </a:prstGeom>
           <a:solidFill>
@@ -12710,14 +13615,14 @@
       </p:sp>
       <p:sp>
         <p:nvSpPr>
-          <p:cNvPr id="19" name="TextBox 18"/>
+          <p:cNvPr id="23" name="TextBox 22"/>
           <p:cNvSpPr txBox="1"/>
           <p:nvPr/>
         </p:nvSpPr>
         <p:spPr>
           <a:xfrm>
-            <a:off x="3886517" y="5583555"/>
-            <a:ext cx="1885315" cy="1214438"/>
+            <a:off x="5238750" y="4171950"/>
+            <a:ext cx="2971800" cy="647700"/>
           </a:xfrm>
           <a:prstGeom prst="rect">
             <a:avLst/>
@@ -12732,11 +13637,11 @@
           <a:p>
             <a:pPr algn="ctr">
               <a:lnSpc>
-                <a:spcPct val="135000"/>
-              </a:lnSpc>
-            </a:pPr>
-            <a:r>
-              <a:rPr sz="1500" b="0">
+                <a:spcPct val="115000"/>
+              </a:lnSpc>
+            </a:pPr>
+            <a:r>
+              <a:rPr sz="1875" b="0">
                 <a:solidFill>
                   <a:srgbClr val="3D3D3D"/>
                 </a:solidFill>
@@ -12744,126 +13649,25 @@
                 <a:ea typeface="Pretendard"/>
                 <a:cs typeface="Pretendard"/>
               </a:rPr>
-              <a:t>마트 1행</a:t>
-            </a:r>
-          </a:p>
-        </p:txBody>
-      </p:sp>
-      <p:sp>
-        <p:nvSpPr>
-          <p:cNvPr id="20" name="Right Arrow 19"/>
-          <p:cNvSpPr/>
-          <p:nvPr/>
-        </p:nvSpPr>
-        <p:spPr>
-          <a:xfrm>
-            <a:off x="5924232" y="5049202"/>
-            <a:ext cx="172402" cy="178118"/>
-          </a:xfrm>
-          <a:prstGeom prst="rightArrow">
-            <a:avLst/>
-          </a:prstGeom>
-          <a:solidFill>
-            <a:srgbClr val="1E5BC6"/>
-          </a:solidFill>
-          <a:ln>
-            <a:noFill/>
-          </a:ln>
-          <a:effectLst/>
-        </p:spPr>
-        <p:txBody>
-          <a:bodyPr rtlCol="0" anchor="ctr" wrap="square"/>
-          <a:lstStyle/>
-          <a:p>
-            <a:pPr algn="ctr"/>
-          </a:p>
-        </p:txBody>
-      </p:sp>
-      <p:sp>
-        <p:nvSpPr>
-          <p:cNvPr id="21" name="Rectangle 20"/>
-          <p:cNvSpPr/>
-          <p:nvPr/>
-        </p:nvSpPr>
-        <p:spPr>
-          <a:xfrm>
-            <a:off x="6115685" y="4838700"/>
-            <a:ext cx="2152015" cy="599122"/>
-          </a:xfrm>
-          <a:prstGeom prst="rect">
-            <a:avLst/>
-          </a:prstGeom>
-          <a:solidFill>
-            <a:srgbClr val="0D2B5E"/>
-          </a:solidFill>
-          <a:ln>
-            <a:noFill/>
-          </a:ln>
-          <a:effectLst/>
-        </p:spPr>
-        <p:txBody>
-          <a:bodyPr rtlCol="0" anchor="ctr" wrap="square"/>
-          <a:lstStyle/>
-          <a:p>
-            <a:pPr algn="ctr"/>
-          </a:p>
-        </p:txBody>
-      </p:sp>
-      <p:sp>
-        <p:nvSpPr>
-          <p:cNvPr id="22" name="TextBox 21"/>
-          <p:cNvSpPr txBox="1"/>
-          <p:nvPr/>
-        </p:nvSpPr>
-        <p:spPr>
-          <a:xfrm>
-            <a:off x="6115685" y="4838700"/>
-            <a:ext cx="2152015" cy="599122"/>
-          </a:xfrm>
-          <a:prstGeom prst="rect">
-            <a:avLst/>
-          </a:prstGeom>
-          <a:noFill/>
-        </p:spPr>
-        <p:txBody>
-          <a:bodyPr wrap="square" lIns="0" rIns="0" tIns="0" bIns="0" anchor="ctr">
-            <a:spAutoFit/>
-          </a:bodyPr>
-          <a:lstStyle/>
-          <a:p>
-            <a:pPr algn="ctr">
-              <a:lnSpc>
-                <a:spcPct val="100000"/>
-              </a:lnSpc>
-            </a:pPr>
-            <a:r>
-              <a:rPr sz="2025" b="1">
-                <a:solidFill>
-                  <a:srgbClr val="FFFFFF"/>
-                </a:solidFill>
-                <a:latin typeface="Pretendard"/>
-                <a:ea typeface="Pretendard"/>
-                <a:cs typeface="Pretendard"/>
-              </a:rPr>
-              <a:t>[mart] 완료</a:t>
-            </a:r>
-          </a:p>
-        </p:txBody>
-      </p:sp>
-      <p:sp>
-        <p:nvSpPr>
-          <p:cNvPr id="23" name="Rounded Rectangle 22"/>
-          <p:cNvSpPr/>
-          <p:nvPr/>
-        </p:nvSpPr>
-        <p:spPr>
-          <a:xfrm>
-            <a:off x="6115685" y="5583555"/>
-            <a:ext cx="2152015" cy="1214438"/>
+              <a:t>1</a:t>
+            </a:r>
+          </a:p>
+        </p:txBody>
+      </p:sp>
+      <p:sp>
+        <p:nvSpPr>
+          <p:cNvPr id="24" name="Rounded Rectangle 23"/>
+          <p:cNvSpPr/>
+          <p:nvPr/>
+        </p:nvSpPr>
+        <p:spPr>
+          <a:xfrm>
+            <a:off x="8343900" y="4171950"/>
+            <a:ext cx="8801100" cy="647700"/>
           </a:xfrm>
           <a:prstGeom prst="roundRect">
             <a:avLst>
-              <a:gd name="adj" fmla="val 3921"/>
+              <a:gd name="adj" fmla="val 5882"/>
             </a:avLst>
           </a:prstGeom>
           <a:solidFill>
@@ -12886,14 +13690,14 @@
       </p:sp>
       <p:sp>
         <p:nvSpPr>
-          <p:cNvPr id="24" name="TextBox 23"/>
+          <p:cNvPr id="25" name="TextBox 24"/>
           <p:cNvSpPr txBox="1"/>
           <p:nvPr/>
         </p:nvSpPr>
         <p:spPr>
           <a:xfrm>
-            <a:off x="6249035" y="5583555"/>
-            <a:ext cx="1885315" cy="1214438"/>
+            <a:off x="8439150" y="4171950"/>
+            <a:ext cx="8610600" cy="647700"/>
           </a:xfrm>
           <a:prstGeom prst="rect">
             <a:avLst/>
@@ -12908,11 +13712,11 @@
           <a:p>
             <a:pPr algn="ctr">
               <a:lnSpc>
-                <a:spcPct val="135000"/>
-              </a:lnSpc>
-            </a:pPr>
-            <a:r>
-              <a:rPr sz="1500" b="0">
+                <a:spcPct val="115000"/>
+              </a:lnSpc>
+            </a:pPr>
+            <a:r>
+              <a:rPr sz="1875" b="0">
                 <a:solidFill>
                   <a:srgbClr val="3D3D3D"/>
                 </a:solidFill>
@@ -12920,21 +13724,55 @@
                 <a:ea typeface="Pretendard"/>
                 <a:cs typeface="Pretendard"/>
               </a:rPr>
-              <a:t>정상 종료</a:t>
-            </a:r>
-          </a:p>
-        </p:txBody>
-      </p:sp>
-      <p:sp>
-        <p:nvSpPr>
-          <p:cNvPr id="25" name="TextBox 24"/>
+              <a:t>원천 0행 · 중단</a:t>
+            </a:r>
+          </a:p>
+        </p:txBody>
+      </p:sp>
+      <p:sp>
+        <p:nvSpPr>
+          <p:cNvPr id="26" name="Rounded Rectangle 25"/>
+          <p:cNvSpPr/>
+          <p:nvPr/>
+        </p:nvSpPr>
+        <p:spPr>
+          <a:xfrm>
+            <a:off x="1143000" y="4895850"/>
+            <a:ext cx="3962400" cy="647700"/>
+          </a:xfrm>
+          <a:prstGeom prst="roundRect">
+            <a:avLst>
+              <a:gd name="adj" fmla="val 5882"/>
+            </a:avLst>
+          </a:prstGeom>
+          <a:solidFill>
+            <a:srgbClr val="EDF3FD"/>
+          </a:solidFill>
+          <a:ln w="9525">
+            <a:solidFill>
+              <a:srgbClr val="BFD3F5"/>
+            </a:solidFill>
+          </a:ln>
+          <a:effectLst/>
+        </p:spPr>
+        <p:txBody>
+          <a:bodyPr rtlCol="0" anchor="ctr" wrap="square"/>
+          <a:lstStyle/>
+          <a:p>
+            <a:pPr algn="ctr"/>
+          </a:p>
+        </p:txBody>
+      </p:sp>
+      <p:sp>
+        <p:nvSpPr>
+          <p:cNvPr id="27" name="TextBox 26"/>
           <p:cNvSpPr txBox="1"/>
           <p:nvPr/>
         </p:nvSpPr>
         <p:spPr>
           <a:xfrm>
-            <a:off x="9772650" y="2857500"/>
-            <a:ext cx="7372350" cy="533400"/>
+            <a:off x="1238250" y="4895850"/>
+            <a:ext cx="3771900" cy="647700"/>
           </a:xfrm>
           <a:prstGeom prst="rect">
             <a:avLst/>
@@ -12942,18 +13780,18 @@
           <a:noFill/>
         </p:spPr>
         <p:txBody>
-          <a:bodyPr wrap="square" lIns="0" rIns="0" tIns="0" bIns="0" anchor="t">
+          <a:bodyPr wrap="square" lIns="0" rIns="0" tIns="0" bIns="0" anchor="ctr">
             <a:spAutoFit/>
           </a:bodyPr>
           <a:lstStyle/>
           <a:p>
             <a:pPr algn="l">
               <a:lnSpc>
-                <a:spcPct val="110000"/>
-              </a:lnSpc>
-            </a:pPr>
-            <a:r>
-              <a:rPr sz="3150" b="1">
+                <a:spcPct val="115000"/>
+              </a:lnSpc>
+            </a:pPr>
+            <a:r>
+              <a:rPr sz="1875" b="1">
                 <a:solidFill>
                   <a:srgbClr val="0D2B5E"/>
                 </a:solidFill>
@@ -12961,66 +13799,25 @@
                 <a:ea typeface="Pretendard"/>
                 <a:cs typeface="Pretendard"/>
               </a:rPr>
-              <a:t>2099-01-01 — 없는 날짜</a:t>
-            </a:r>
-          </a:p>
-        </p:txBody>
-      </p:sp>
-      <p:sp>
-        <p:nvSpPr>
-          <p:cNvPr id="26" name="TextBox 25"/>
-          <p:cNvSpPr txBox="1"/>
-          <p:nvPr/>
-        </p:nvSpPr>
-        <p:spPr>
-          <a:xfrm>
-            <a:off x="9772650" y="3467100"/>
-            <a:ext cx="7372350" cy="876300"/>
-          </a:xfrm>
-          <a:prstGeom prst="rect">
-            <a:avLst/>
-          </a:prstGeom>
-          <a:noFill/>
-        </p:spPr>
-        <p:txBody>
-          <a:bodyPr wrap="square" lIns="0" rIns="0" tIns="0" bIns="0" anchor="t">
-            <a:spAutoFit/>
-          </a:bodyPr>
-          <a:lstStyle/>
-          <a:p>
-            <a:pPr algn="l">
-              <a:lnSpc>
-                <a:spcPct val="146000"/>
-              </a:lnSpc>
-            </a:pPr>
-            <a:r>
-              <a:rPr sz="2250" b="0">
-                <a:solidFill>
-                  <a:srgbClr val="3D3D3D"/>
-                </a:solidFill>
-                <a:latin typeface="Pretendard"/>
-                <a:ea typeface="Pretendard"/>
-                <a:cs typeface="Pretendard"/>
-              </a:rPr>
-              <a:t>「원천이 비어 있습니다 — 중단」 · 종료 코드 1</a:t>
-            </a:r>
-          </a:p>
-        </p:txBody>
-      </p:sp>
-      <p:sp>
-        <p:nvSpPr>
-          <p:cNvPr id="27" name="Rounded Rectangle 26"/>
-          <p:cNvSpPr/>
-          <p:nvPr/>
-        </p:nvSpPr>
-        <p:spPr>
-          <a:xfrm>
-            <a:off x="9772650" y="4610100"/>
-            <a:ext cx="7372350" cy="2857500"/>
+              <a:t>날짜 없이</a:t>
+            </a:r>
+          </a:p>
+        </p:txBody>
+      </p:sp>
+      <p:sp>
+        <p:nvSpPr>
+          <p:cNvPr id="28" name="Rounded Rectangle 27"/>
+          <p:cNvSpPr/>
+          <p:nvPr/>
+        </p:nvSpPr>
+        <p:spPr>
+          <a:xfrm>
+            <a:off x="5143500" y="4895850"/>
+            <a:ext cx="3162300" cy="647700"/>
           </a:xfrm>
           <a:prstGeom prst="roundRect">
             <a:avLst>
-              <a:gd name="adj" fmla="val 1666"/>
+              <a:gd name="adj" fmla="val 5882"/>
             </a:avLst>
           </a:prstGeom>
           <a:solidFill>
@@ -13043,44 +13840,14 @@
       </p:sp>
       <p:sp>
         <p:nvSpPr>
-          <p:cNvPr id="28" name="Rectangle 27"/>
-          <p:cNvSpPr/>
-          <p:nvPr/>
-        </p:nvSpPr>
-        <p:spPr>
-          <a:xfrm>
-            <a:off x="10020300" y="4838700"/>
-            <a:ext cx="2152015" cy="599122"/>
-          </a:xfrm>
-          <a:prstGeom prst="rect">
-            <a:avLst/>
-          </a:prstGeom>
-          <a:solidFill>
-            <a:srgbClr val="0D2B5E"/>
-          </a:solidFill>
-          <a:ln>
-            <a:noFill/>
-          </a:ln>
-          <a:effectLst/>
-        </p:spPr>
-        <p:txBody>
-          <a:bodyPr rtlCol="0" anchor="ctr" wrap="square"/>
-          <a:lstStyle/>
-          <a:p>
-            <a:pPr algn="ctr"/>
-          </a:p>
-        </p:txBody>
-      </p:sp>
-      <p:sp>
-        <p:nvSpPr>
           <p:cNvPr id="29" name="TextBox 28"/>
           <p:cNvSpPr txBox="1"/>
           <p:nvPr/>
         </p:nvSpPr>
         <p:spPr>
           <a:xfrm>
-            <a:off x="10020300" y="4838700"/>
-            <a:ext cx="2152015" cy="599122"/>
+            <a:off x="5238750" y="4895850"/>
+            <a:ext cx="2971800" cy="647700"/>
           </a:xfrm>
           <a:prstGeom prst="rect">
             <a:avLst/>
@@ -13095,19 +13862,19 @@
           <a:p>
             <a:pPr algn="ctr">
               <a:lnSpc>
-                <a:spcPct val="100000"/>
-              </a:lnSpc>
-            </a:pPr>
-            <a:r>
-              <a:rPr sz="2025" b="1">
-                <a:solidFill>
-                  <a:srgbClr val="FFFFFF"/>
+                <a:spcPct val="115000"/>
+              </a:lnSpc>
+            </a:pPr>
+            <a:r>
+              <a:rPr sz="1875" b="0">
+                <a:solidFill>
+                  <a:srgbClr val="3D3D3D"/>
                 </a:solidFill>
                 <a:latin typeface="Pretendard"/>
                 <a:ea typeface="Pretendard"/>
                 <a:cs typeface="Pretendard"/>
               </a:rPr>
-              <a:t>대상 날짜</a:t>
+              <a:t>0</a:t>
             </a:r>
           </a:p>
         </p:txBody>
@@ -13120,12 +13887,12 @@
         </p:nvSpPr>
         <p:spPr>
           <a:xfrm>
-            <a:off x="10020300" y="5583555"/>
-            <a:ext cx="2152015" cy="1214438"/>
+            <a:off x="8343900" y="4895850"/>
+            <a:ext cx="8801100" cy="647700"/>
           </a:xfrm>
           <a:prstGeom prst="roundRect">
             <a:avLst>
-              <a:gd name="adj" fmla="val 3921"/>
+              <a:gd name="adj" fmla="val 5882"/>
             </a:avLst>
           </a:prstGeom>
           <a:solidFill>
@@ -13154,8 +13921,8 @@
         </p:nvSpPr>
         <p:spPr>
           <a:xfrm>
-            <a:off x="10153650" y="5583555"/>
-            <a:ext cx="1885315" cy="1214438"/>
+            <a:off x="8439150" y="4895850"/>
+            <a:ext cx="8610600" cy="647700"/>
           </a:xfrm>
           <a:prstGeom prst="rect">
             <a:avLst/>
@@ -13170,11 +13937,11 @@
           <a:p>
             <a:pPr algn="ctr">
               <a:lnSpc>
-                <a:spcPct val="135000"/>
-              </a:lnSpc>
-            </a:pPr>
-            <a:r>
-              <a:rPr sz="1500" b="0">
+                <a:spcPct val="115000"/>
+              </a:lnSpc>
+            </a:pPr>
+            <a:r>
+              <a:rPr sz="1875" b="0">
                 <a:solidFill>
                   <a:srgbClr val="3D3D3D"/>
                 </a:solidFill>
@@ -13182,81 +13949,21 @@
                 <a:ea typeface="Pretendard"/>
                 <a:cs typeface="Pretendard"/>
               </a:rPr>
-              <a:t>2099-01-01</a:t>
-            </a:r>
-          </a:p>
-        </p:txBody>
-      </p:sp>
-      <p:sp>
-        <p:nvSpPr>
-          <p:cNvPr id="32" name="Right Arrow 31"/>
-          <p:cNvSpPr/>
-          <p:nvPr/>
-        </p:nvSpPr>
-        <p:spPr>
-          <a:xfrm>
-            <a:off x="12191365" y="5049202"/>
-            <a:ext cx="172402" cy="178118"/>
-          </a:xfrm>
-          <a:prstGeom prst="rightArrow">
-            <a:avLst/>
-          </a:prstGeom>
-          <a:solidFill>
-            <a:srgbClr val="1E5BC6"/>
-          </a:solidFill>
-          <a:ln>
-            <a:noFill/>
-          </a:ln>
-          <a:effectLst/>
-        </p:spPr>
-        <p:txBody>
-          <a:bodyPr rtlCol="0" anchor="ctr" wrap="square"/>
-          <a:lstStyle/>
-          <a:p>
-            <a:pPr algn="ctr"/>
-          </a:p>
-        </p:txBody>
-      </p:sp>
-      <p:sp>
-        <p:nvSpPr>
-          <p:cNvPr id="33" name="Rectangle 32"/>
-          <p:cNvSpPr/>
-          <p:nvPr/>
-        </p:nvSpPr>
-        <p:spPr>
-          <a:xfrm>
-            <a:off x="12382818" y="4838700"/>
-            <a:ext cx="2152015" cy="599122"/>
-          </a:xfrm>
-          <a:prstGeom prst="rect">
-            <a:avLst/>
-          </a:prstGeom>
-          <a:solidFill>
-            <a:srgbClr val="1E5BC6"/>
-          </a:solidFill>
-          <a:ln>
-            <a:noFill/>
-          </a:ln>
-          <a:effectLst/>
-        </p:spPr>
-        <p:txBody>
-          <a:bodyPr rtlCol="0" anchor="ctr" wrap="square"/>
-          <a:lstStyle/>
-          <a:p>
-            <a:pPr algn="ctr"/>
-          </a:p>
-        </p:txBody>
-      </p:sp>
-      <p:sp>
-        <p:nvSpPr>
-          <p:cNvPr id="34" name="TextBox 33"/>
+              <a:t>원천 5행 · 마트 3행 · 완료</a:t>
+            </a:r>
+          </a:p>
+        </p:txBody>
+      </p:sp>
+      <p:sp>
+        <p:nvSpPr>
+          <p:cNvPr id="32" name="TextBox 31"/>
           <p:cNvSpPr txBox="1"/>
           <p:nvPr/>
         </p:nvSpPr>
         <p:spPr>
           <a:xfrm>
-            <a:off x="12382818" y="4838700"/>
-            <a:ext cx="2152015" cy="599122"/>
+            <a:off x="1143000" y="5638800"/>
+            <a:ext cx="16002000" cy="438150"/>
           </a:xfrm>
           <a:prstGeom prst="rect">
             <a:avLst/>
@@ -13264,7 +13971,7 @@
           <a:noFill/>
         </p:spPr>
         <p:txBody>
-          <a:bodyPr wrap="square" lIns="0" rIns="0" tIns="0" bIns="0" anchor="ctr">
+          <a:bodyPr wrap="square" lIns="0" rIns="0" tIns="0" bIns="0" anchor="t">
             <a:spAutoFit/>
           </a:bodyPr>
           <a:lstStyle/>
@@ -13275,63 +13982,29 @@
               </a:lnSpc>
             </a:pPr>
             <a:r>
-              <a:rPr sz="2025" b="1">
-                <a:solidFill>
-                  <a:srgbClr val="FFFFFF"/>
+              <a:rPr sz="1875" b="1">
+                <a:solidFill>
+                  <a:srgbClr val="7D7D7D"/>
                 </a:solidFill>
                 <a:latin typeface="Pretendard"/>
                 <a:ea typeface="Pretendard"/>
                 <a:cs typeface="Pretendard"/>
               </a:rPr>
-              <a:t>원천 0행</a:t>
-            </a:r>
-          </a:p>
-        </p:txBody>
-      </p:sp>
-      <p:sp>
-        <p:nvSpPr>
-          <p:cNvPr id="35" name="Rounded Rectangle 34"/>
-          <p:cNvSpPr/>
-          <p:nvPr/>
-        </p:nvSpPr>
-        <p:spPr>
-          <a:xfrm>
-            <a:off x="12382818" y="5583555"/>
-            <a:ext cx="2152015" cy="1214438"/>
-          </a:xfrm>
-          <a:prstGeom prst="roundRect">
-            <a:avLst>
-              <a:gd name="adj" fmla="val 3921"/>
-            </a:avLst>
-          </a:prstGeom>
-          <a:solidFill>
-            <a:srgbClr val="FAFBFD"/>
-          </a:solidFill>
-          <a:ln w="9525">
-            <a:solidFill>
-              <a:srgbClr val="DCE1E8"/>
-            </a:solidFill>
-          </a:ln>
-          <a:effectLst/>
-        </p:spPr>
-        <p:txBody>
-          <a:bodyPr rtlCol="0" anchor="ctr" wrap="square"/>
-          <a:lstStyle/>
-          <a:p>
-            <a:pPr algn="ctr"/>
-          </a:p>
-        </p:txBody>
-      </p:sp>
-      <p:sp>
-        <p:nvSpPr>
-          <p:cNvPr id="36" name="TextBox 35"/>
+              <a:t>날짜를 주면 마트가 그 한 줄로 교체된다 — 날짜 없이 한 번 더 돌려 3행으로 되돌린다</a:t>
+            </a:r>
+          </a:p>
+        </p:txBody>
+      </p:sp>
+      <p:sp>
+        <p:nvSpPr>
+          <p:cNvPr id="33" name="TextBox 32"/>
           <p:cNvSpPr txBox="1"/>
           <p:nvPr/>
         </p:nvSpPr>
         <p:spPr>
           <a:xfrm>
-            <a:off x="12516168" y="5583555"/>
-            <a:ext cx="1885315" cy="1214438"/>
+            <a:off x="1143000" y="7620000"/>
+            <a:ext cx="16002000" cy="342900"/>
           </a:xfrm>
           <a:prstGeom prst="rect">
             <a:avLst/>
@@ -13339,46 +14012,46 @@
           <a:noFill/>
         </p:spPr>
         <p:txBody>
-          <a:bodyPr wrap="square" lIns="0" rIns="0" tIns="0" bIns="0" anchor="ctr">
+          <a:bodyPr wrap="square" lIns="0" rIns="0" tIns="0" bIns="0" anchor="t">
             <a:spAutoFit/>
           </a:bodyPr>
           <a:lstStyle/>
           <a:p>
-            <a:pPr algn="ctr">
-              <a:lnSpc>
-                <a:spcPct val="135000"/>
-              </a:lnSpc>
-            </a:pPr>
-            <a:r>
-              <a:rPr sz="1500" b="0">
-                <a:solidFill>
-                  <a:srgbClr val="3D3D3D"/>
+            <a:pPr algn="l">
+              <a:lnSpc>
+                <a:spcPct val="100000"/>
+              </a:lnSpc>
+            </a:pPr>
+            <a:r>
+              <a:rPr sz="1875" b="1">
+                <a:solidFill>
+                  <a:srgbClr val="7D7D7D"/>
                 </a:solidFill>
                 <a:latin typeface="Pretendard"/>
                 <a:ea typeface="Pretendard"/>
                 <a:cs typeface="Pretendard"/>
               </a:rPr>
-              <a:t>중단</a:t>
-            </a:r>
-          </a:p>
-        </p:txBody>
-      </p:sp>
-      <p:sp>
-        <p:nvSpPr>
-          <p:cNvPr id="37" name="Right Arrow 36"/>
-          <p:cNvSpPr/>
-          <p:nvPr/>
-        </p:nvSpPr>
-        <p:spPr>
-          <a:xfrm>
-            <a:off x="14553882" y="5049202"/>
-            <a:ext cx="172402" cy="178118"/>
-          </a:xfrm>
-          <a:prstGeom prst="rightArrow">
-            <a:avLst/>
-          </a:prstGeom>
-          <a:solidFill>
-            <a:srgbClr val="1E5BC6"/>
+              <a:t>| grep 을 붙인 뒤의 $? 는 grep 의 0 — 그래서 mart.log 로 받고 따로 확인합니다</a:t>
+            </a:r>
+          </a:p>
+        </p:txBody>
+      </p:sp>
+      <p:sp>
+        <p:nvSpPr>
+          <p:cNvPr id="34" name="Rectangle 33"/>
+          <p:cNvSpPr/>
+          <p:nvPr/>
+        </p:nvSpPr>
+        <p:spPr>
+          <a:xfrm>
+            <a:off x="1143000" y="8058150"/>
+            <a:ext cx="16002000" cy="9525"/>
+          </a:xfrm>
+          <a:prstGeom prst="rect">
+            <a:avLst/>
+          </a:prstGeom>
+          <a:solidFill>
+            <a:srgbClr val="DCE1E8"/>
           </a:solidFill>
           <a:ln>
             <a:noFill/>
@@ -13395,44 +14068,14 @@
       </p:sp>
       <p:sp>
         <p:nvSpPr>
-          <p:cNvPr id="38" name="Rectangle 37"/>
-          <p:cNvSpPr/>
-          <p:nvPr/>
-        </p:nvSpPr>
-        <p:spPr>
-          <a:xfrm>
-            <a:off x="14745335" y="4838700"/>
-            <a:ext cx="2152015" cy="599122"/>
-          </a:xfrm>
-          <a:prstGeom prst="rect">
-            <a:avLst/>
-          </a:prstGeom>
-          <a:solidFill>
-            <a:srgbClr val="0D2B5E"/>
-          </a:solidFill>
-          <a:ln>
-            <a:noFill/>
-          </a:ln>
-          <a:effectLst/>
-        </p:spPr>
-        <p:txBody>
-          <a:bodyPr rtlCol="0" anchor="ctr" wrap="square"/>
-          <a:lstStyle/>
-          <a:p>
-            <a:pPr algn="ctr"/>
-          </a:p>
-        </p:txBody>
-      </p:sp>
-      <p:sp>
-        <p:nvSpPr>
-          <p:cNvPr id="39" name="TextBox 38"/>
+          <p:cNvPr id="35" name="TextBox 34"/>
           <p:cNvSpPr txBox="1"/>
           <p:nvPr/>
         </p:nvSpPr>
         <p:spPr>
           <a:xfrm>
-            <a:off x="14745335" y="4838700"/>
-            <a:ext cx="2152015" cy="599122"/>
+            <a:off x="1143000" y="8248650"/>
+            <a:ext cx="13335000" cy="323850"/>
           </a:xfrm>
           <a:prstGeom prst="rect">
             <a:avLst/>
@@ -13440,242 +14083,25 @@
           <a:noFill/>
         </p:spPr>
         <p:txBody>
-          <a:bodyPr wrap="square" lIns="0" rIns="0" tIns="0" bIns="0" anchor="ctr">
+          <a:bodyPr wrap="square" lIns="0" rIns="0" tIns="0" bIns="0" anchor="t">
             <a:spAutoFit/>
           </a:bodyPr>
           <a:lstStyle/>
           <a:p>
-            <a:pPr algn="ctr">
+            <a:pPr algn="l">
               <a:lnSpc>
                 <a:spcPct val="100000"/>
               </a:lnSpc>
             </a:pPr>
             <a:r>
-              <a:rPr sz="2025" b="1">
-                <a:solidFill>
-                  <a:srgbClr val="FFFFFF"/>
+              <a:rPr sz="1725" b="0">
+                <a:solidFill>
+                  <a:srgbClr val="7D7D7D"/>
                 </a:solidFill>
                 <a:latin typeface="Pretendard"/>
                 <a:ea typeface="Pretendard"/>
                 <a:cs typeface="Pretendard"/>
               </a:rPr>
-              <a:t>sys.exit(1)</a:t>
-            </a:r>
-          </a:p>
-        </p:txBody>
-      </p:sp>
-      <p:sp>
-        <p:nvSpPr>
-          <p:cNvPr id="40" name="Rounded Rectangle 39"/>
-          <p:cNvSpPr/>
-          <p:nvPr/>
-        </p:nvSpPr>
-        <p:spPr>
-          <a:xfrm>
-            <a:off x="14745335" y="5583555"/>
-            <a:ext cx="2152015" cy="1214438"/>
-          </a:xfrm>
-          <a:prstGeom prst="roundRect">
-            <a:avLst>
-              <a:gd name="adj" fmla="val 3921"/>
-            </a:avLst>
-          </a:prstGeom>
-          <a:solidFill>
-            <a:srgbClr val="FAFBFD"/>
-          </a:solidFill>
-          <a:ln w="9525">
-            <a:solidFill>
-              <a:srgbClr val="DCE1E8"/>
-            </a:solidFill>
-          </a:ln>
-          <a:effectLst/>
-        </p:spPr>
-        <p:txBody>
-          <a:bodyPr rtlCol="0" anchor="ctr" wrap="square"/>
-          <a:lstStyle/>
-          <a:p>
-            <a:pPr algn="ctr"/>
-          </a:p>
-        </p:txBody>
-      </p:sp>
-      <p:sp>
-        <p:nvSpPr>
-          <p:cNvPr id="41" name="TextBox 40"/>
-          <p:cNvSpPr txBox="1"/>
-          <p:nvPr/>
-        </p:nvSpPr>
-        <p:spPr>
-          <a:xfrm>
-            <a:off x="14878685" y="5583555"/>
-            <a:ext cx="1885315" cy="1214438"/>
-          </a:xfrm>
-          <a:prstGeom prst="rect">
-            <a:avLst/>
-          </a:prstGeom>
-          <a:noFill/>
-        </p:spPr>
-        <p:txBody>
-          <a:bodyPr wrap="square" lIns="0" rIns="0" tIns="0" bIns="0" anchor="ctr">
-            <a:spAutoFit/>
-          </a:bodyPr>
-          <a:lstStyle/>
-          <a:p>
-            <a:pPr algn="ctr">
-              <a:lnSpc>
-                <a:spcPct val="135000"/>
-              </a:lnSpc>
-            </a:pPr>
-            <a:r>
-              <a:rPr sz="1500" b="0">
-                <a:solidFill>
-                  <a:srgbClr val="3D3D3D"/>
-                </a:solidFill>
-                <a:latin typeface="Pretendard"/>
-                <a:ea typeface="Pretendard"/>
-                <a:cs typeface="Pretendard"/>
-              </a:rPr>
-              <a:t>종료 코드 1</a:t>
-            </a:r>
-          </a:p>
-        </p:txBody>
-      </p:sp>
-      <p:sp>
-        <p:nvSpPr>
-          <p:cNvPr id="42" name="Oval 41"/>
-          <p:cNvSpPr/>
-          <p:nvPr/>
-        </p:nvSpPr>
-        <p:spPr>
-          <a:xfrm>
-            <a:off x="8686800" y="3771900"/>
-            <a:ext cx="914400" cy="914400"/>
-          </a:xfrm>
-          <a:prstGeom prst="ellipse">
-            <a:avLst/>
-          </a:prstGeom>
-          <a:solidFill>
-            <a:srgbClr val="0D2B5E"/>
-          </a:solidFill>
-          <a:ln>
-            <a:noFill/>
-          </a:ln>
-          <a:effectLst/>
-        </p:spPr>
-        <p:txBody>
-          <a:bodyPr rtlCol="0" anchor="ctr" wrap="square"/>
-          <a:lstStyle/>
-          <a:p>
-            <a:pPr algn="ctr"/>
-          </a:p>
-        </p:txBody>
-      </p:sp>
-      <p:sp>
-        <p:nvSpPr>
-          <p:cNvPr id="43" name="TextBox 42"/>
-          <p:cNvSpPr txBox="1"/>
-          <p:nvPr/>
-        </p:nvSpPr>
-        <p:spPr>
-          <a:xfrm>
-            <a:off x="8686800" y="4057650"/>
-            <a:ext cx="914400" cy="381000"/>
-          </a:xfrm>
-          <a:prstGeom prst="rect">
-            <a:avLst/>
-          </a:prstGeom>
-          <a:noFill/>
-        </p:spPr>
-        <p:txBody>
-          <a:bodyPr wrap="square" lIns="0" rIns="0" tIns="0" bIns="0" anchor="t">
-            <a:spAutoFit/>
-          </a:bodyPr>
-          <a:lstStyle/>
-          <a:p>
-            <a:pPr algn="ctr">
-              <a:lnSpc>
-                <a:spcPct val="100000"/>
-              </a:lnSpc>
-            </a:pPr>
-            <a:r>
-              <a:rPr sz="2250" b="1">
-                <a:solidFill>
-                  <a:srgbClr val="FFFFFF"/>
-                </a:solidFill>
-                <a:latin typeface="Pretendard"/>
-                <a:ea typeface="Pretendard"/>
-                <a:cs typeface="Pretendard"/>
-              </a:rPr>
-              <a:t>VS</a:t>
-            </a:r>
-          </a:p>
-        </p:txBody>
-      </p:sp>
-      <p:sp>
-        <p:nvSpPr>
-          <p:cNvPr id="44" name="Rectangle 43"/>
-          <p:cNvSpPr/>
-          <p:nvPr/>
-        </p:nvSpPr>
-        <p:spPr>
-          <a:xfrm>
-            <a:off x="1143000" y="8058150"/>
-            <a:ext cx="16002000" cy="9525"/>
-          </a:xfrm>
-          <a:prstGeom prst="rect">
-            <a:avLst/>
-          </a:prstGeom>
-          <a:solidFill>
-            <a:srgbClr val="DCE1E8"/>
-          </a:solidFill>
-          <a:ln>
-            <a:noFill/>
-          </a:ln>
-          <a:effectLst/>
-        </p:spPr>
-        <p:txBody>
-          <a:bodyPr rtlCol="0" anchor="ctr" wrap="square"/>
-          <a:lstStyle/>
-          <a:p>
-            <a:pPr algn="ctr"/>
-          </a:p>
-        </p:txBody>
-      </p:sp>
-      <p:sp>
-        <p:nvSpPr>
-          <p:cNvPr id="45" name="TextBox 44"/>
-          <p:cNvSpPr txBox="1"/>
-          <p:nvPr/>
-        </p:nvSpPr>
-        <p:spPr>
-          <a:xfrm>
-            <a:off x="1143000" y="8248650"/>
-            <a:ext cx="13335000" cy="323850"/>
-          </a:xfrm>
-          <a:prstGeom prst="rect">
-            <a:avLst/>
-          </a:prstGeom>
-          <a:noFill/>
-        </p:spPr>
-        <p:txBody>
-          <a:bodyPr wrap="square" lIns="0" rIns="0" tIns="0" bIns="0" anchor="t">
-            <a:spAutoFit/>
-          </a:bodyPr>
-          <a:lstStyle/>
-          <a:p>
-            <a:pPr algn="l">
-              <a:lnSpc>
-                <a:spcPct val="100000"/>
-              </a:lnSpc>
-            </a:pPr>
-            <a:r>
-              <a:rPr sz="1725" b="0">
-                <a:solidFill>
-                  <a:srgbClr val="7D7D7D"/>
-                </a:solidFill>
-                <a:latin typeface="Pretendard"/>
-                <a:ea typeface="Pretendard"/>
-                <a:cs typeface="Pretendard"/>
-              </a:rPr>
               <a:t>데이터 엔지니어링 &amp; RAG 파이프라인 160H · 5-5 · 실습 1H</a:t>
             </a:r>
           </a:p>
@@ -13683,7 +14109,7 @@
       </p:sp>
       <p:sp>
         <p:nvSpPr>
-          <p:cNvPr id="46" name="TextBox 45"/>
+          <p:cNvPr id="36" name="TextBox 35"/>
           <p:cNvSpPr txBox="1"/>
           <p:nvPr/>
         </p:nvSpPr>
@@ -13742,7 +14168,7 @@
       <p:grpSpPr/>
       <p:sp>
         <p:nvSpPr>
-          <p:cNvPr id="2" name="Oval 1"/>
+          <p:cNvPr id="2" name="deckgen:decor"/>
           <p:cNvSpPr/>
           <p:nvPr/>
         </p:nvSpPr>
@@ -13772,7 +14198,7 @@
       </p:sp>
       <p:sp>
         <p:nvSpPr>
-          <p:cNvPr id="3" name="Oval 2"/>
+          <p:cNvPr id="3" name="deckgen:decor"/>
           <p:cNvSpPr/>
           <p:nvPr/>
         </p:nvSpPr>
@@ -13802,7 +14228,7 @@
       </p:sp>
       <p:sp>
         <p:nvSpPr>
-          <p:cNvPr id="4" name="Oval 3"/>
+          <p:cNvPr id="4" name="deckgen:decor"/>
           <p:cNvSpPr/>
           <p:nvPr/>
         </p:nvSpPr>
@@ -14008,7 +14434,7 @@
       </p:sp>
       <p:sp>
         <p:nvSpPr>
-          <p:cNvPr id="10" name="TextBox 9"/>
+          <p:cNvPr id="10" name="deckgen:ornament"/>
           <p:cNvSpPr txBox="1"/>
           <p:nvPr/>
         </p:nvSpPr>
@@ -14122,7 +14548,7 @@
                 <a:ea typeface="Pretendard"/>
                 <a:cs typeface="Pretendard"/>
               </a:rPr>
-              <a:t>인자·로그·종료 코드 포함</a:t>
+              <a:t>인자·로그·종료 코드</a:t>
             </a:r>
           </a:p>
         </p:txBody>
@@ -14193,7 +14619,7 @@
       </p:sp>
       <p:sp>
         <p:nvSpPr>
-          <p:cNvPr id="14" name="TextBox 13"/>
+          <p:cNvPr id="14" name="deckgen:ornament"/>
           <p:cNvSpPr txBox="1"/>
           <p:nvPr/>
         </p:nvSpPr>
@@ -14289,7 +14715,7 @@
                 <a:ea typeface="Pretendard"/>
                 <a:cs typeface="Pretendard"/>
               </a:rPr>
-              <a:t>spark-sql 또는</a:t>
+              <a:t>mart.log 의 표</a:t>
             </a:r>
           </a:p>
           <a:p>
@@ -14307,7 +14733,7 @@
                 <a:ea typeface="Pretendard"/>
                 <a:cs typeface="Pretendard"/>
               </a:rPr>
-              <a:t>콘솔 캡처</a:t>
+              <a:t>또는 콘솔 캡처</a:t>
             </a:r>
           </a:p>
         </p:txBody>
@@ -14378,7 +14804,7 @@
       </p:sp>
       <p:sp>
         <p:nvSpPr>
-          <p:cNvPr id="18" name="TextBox 17"/>
+          <p:cNvPr id="18" name="deckgen:ornament"/>
           <p:cNvSpPr txBox="1"/>
           <p:nvPr/>
         </p:nvSpPr>
@@ -14453,7 +14879,7 @@
                 <a:ea typeface="Pretendard"/>
                 <a:cs typeface="Pretendard"/>
               </a:rPr>
-              <a:t>③ 실측표</a:t>
+              <a:t>③ README</a:t>
             </a:r>
           </a:p>
           <a:p>
@@ -14474,7 +14900,7 @@
                 <a:ea typeface="Pretendard"/>
                 <a:cs typeface="Pretendard"/>
               </a:rPr>
-              <a:t>파티션 수 · 200→8 시간</a:t>
+              <a:t>실행 줄 그대로</a:t>
             </a:r>
           </a:p>
           <a:p>
@@ -14492,7 +14918,7 @@
                 <a:ea typeface="Pretendard"/>
                 <a:cs typeface="Pretendard"/>
               </a:rPr>
-              <a:t>파일 수 · 스큐 시간</a:t>
+              <a:t>실측표는 본인 수치</a:t>
             </a:r>
           </a:p>
         </p:txBody>
@@ -14563,7 +14989,7 @@
                 <a:ea typeface="Pretendard"/>
                 <a:cs typeface="Pretendard"/>
               </a:rPr>
-              <a:t>README 의 실측표를 본인 수치로 — 환경마다 달라도 정상, 중요한 것은 방향. 제출 후 산출물 갤러리에도 올려 동료와 비교</a:t>
+              <a:t>README 「3. 실행」 = cp → spark-submit … /tmp/mart.py [날짜] &gt; mart.log 2&gt;&amp;1 → echo "종료 코드: $?"</a:t>
             </a:r>
           </a:p>
         </p:txBody>
